--- a/LINEOA媒体最新情報_2026年9月トレンドレポート_ver1.3.pptx
+++ b/LINEOA媒体最新情報_2026年9月トレンドレポート_ver1.3.pptx
@@ -33975,3350 +33975,6 @@
   <p:cSld>
     <p:spTree>
       <p:nvGrpSpPr>
-        <p:cNvPr id="1" name="Shape 39"/>
-        <p:cNvGrpSpPr/>
-        <p:nvPr/>
-      </p:nvGrpSpPr>
-      <p:grpSpPr>
-        <a:xfrm>
-          <a:off x="0" y="0"/>
-          <a:ext cx="0" cy="0"/>
-          <a:chOff x="0" y="0"/>
-          <a:chExt cx="0" cy="0"/>
-        </a:xfrm>
-      </p:grpSpPr>
-      <p:sp>
-        <p:nvSpPr>
-          <p:cNvPr id="40" name="Google Shape;40;p3"/>
-          <p:cNvSpPr/>
-          <p:nvPr/>
-        </p:nvSpPr>
-        <p:spPr>
-          <a:xfrm>
-            <a:off x="292801" y="730955"/>
-            <a:ext cx="1296144" cy="435690"/>
-          </a:xfrm>
-          <a:prstGeom prst="rect">
-            <a:avLst/>
-          </a:prstGeom>
-          <a:solidFill>
-            <a:schemeClr val="dk2"/>
-          </a:solidFill>
-          <a:ln w="9525" cap="flat" cmpd="sng">
-            <a:solidFill>
-              <a:srgbClr val="4A7DBA"/>
-            </a:solidFill>
-            <a:prstDash val="solid"/>
-            <a:round/>
-            <a:headEnd type="none" w="sm" len="sm"/>
-            <a:tailEnd type="none" w="sm" len="sm"/>
-          </a:ln>
-        </p:spPr>
-        <p:txBody>
-          <a:bodyPr spcFirstLastPara="1" wrap="square" lIns="91425" tIns="45700" rIns="91425" bIns="45700" anchor="ctr" anchorCtr="0">
-            <a:noAutofit/>
-          </a:bodyPr>
-          <a:lstStyle/>
-          <a:p>
-            <a:pPr marL="0" marR="0" lvl="0" indent="0" algn="ctr" rtl="0">
-              <a:spcBef>
-                <a:spcPts val="0"/>
-              </a:spcBef>
-              <a:spcAft>
-                <a:spcPts val="0"/>
-              </a:spcAft>
-              <a:buNone/>
-            </a:pPr>
-            <a:r>
-              <a:rPr lang="ja-JP" sz="1800" b="0" i="0" u="none" strike="noStrike" cap="none">
-                <a:solidFill>
-                  <a:schemeClr val="lt1"/>
-                </a:solidFill>
-                <a:latin typeface="メイリオ"/>
-                <a:ea typeface="Meiryo"/>
-                <a:cs typeface="Meiryo"/>
-                <a:sym typeface="Meiryo"/>
-              </a:rPr>
-              <a:t>対象業界</a:t>
-            </a:r>
-            <a:endParaRPr/>
-          </a:p>
-        </p:txBody>
-      </p:sp>
-      <p:sp>
-        <p:nvSpPr>
-          <p:cNvPr id="43" name="Google Shape;43;p3"/>
-          <p:cNvSpPr/>
-          <p:nvPr/>
-        </p:nvSpPr>
-        <p:spPr>
-          <a:xfrm>
-            <a:off x="1594068" y="730955"/>
-            <a:ext cx="2926883" cy="435690"/>
-          </a:xfrm>
-          <a:prstGeom prst="rect">
-            <a:avLst/>
-          </a:prstGeom>
-          <a:noFill/>
-          <a:ln w="9525" cap="flat" cmpd="sng">
-            <a:solidFill>
-              <a:srgbClr val="4A7DBA"/>
-            </a:solidFill>
-            <a:prstDash val="solid"/>
-            <a:round/>
-            <a:headEnd type="none" w="sm" len="sm"/>
-            <a:tailEnd type="none" w="sm" len="sm"/>
-          </a:ln>
-        </p:spPr>
-        <p:txBody>
-          <a:bodyPr spcFirstLastPara="1" wrap="square" lIns="91425" tIns="45700" rIns="91425" bIns="45700" anchor="ctr" anchorCtr="0">
-            <a:noAutofit/>
-          </a:bodyPr>
-          <a:lstStyle/>
-          <a:p>
-            <a:pPr marL="0" marR="0" lvl="0" indent="0" algn="ctr" rtl="0">
-              <a:spcBef>
-                <a:spcPts val="0"/>
-              </a:spcBef>
-              <a:spcAft>
-                <a:spcPts val="0"/>
-              </a:spcAft>
-              <a:buNone/>
-            </a:pPr>
-            <a:r>
-              <a:rPr lang="ja-JP" sz="1300" b="0" i="0" u="none" strike="noStrike" cap="none">
-                <a:solidFill>
-                  <a:schemeClr val="dk1"/>
-                </a:solidFill>
-                <a:latin typeface="メイリオ"/>
-                <a:ea typeface="Meiryo"/>
-                <a:cs typeface="Meiryo"/>
-                <a:sym typeface="Meiryo"/>
-              </a:rPr>
-              <a:t>友だち獲得を強化したい全業種</a:t>
-            </a:r>
-            <a:endParaRPr/>
-          </a:p>
-        </p:txBody>
-      </p:sp>
-      <p:sp>
-        <p:nvSpPr>
-          <p:cNvPr id="45" name="Google Shape;45;p3"/>
-          <p:cNvSpPr/>
-          <p:nvPr/>
-        </p:nvSpPr>
-        <p:spPr>
-          <a:xfrm>
-            <a:off x="0" y="1234746"/>
-            <a:ext cx="9906000" cy="672259"/>
-          </a:xfrm>
-          <a:prstGeom prst="rect">
-            <a:avLst/>
-          </a:prstGeom>
-          <a:solidFill>
-            <a:srgbClr val="C5D8F1"/>
-          </a:solidFill>
-          <a:ln>
-            <a:noFill/>
-          </a:ln>
-        </p:spPr>
-        <p:txBody>
-          <a:bodyPr spcFirstLastPara="1" wrap="square" lIns="91425" tIns="45700" rIns="91425" bIns="45700" anchor="ctr" anchorCtr="0">
-            <a:noAutofit/>
-          </a:bodyPr>
-          <a:lstStyle/>
-          <a:p>
-            <a:pPr marL="0" marR="0" lvl="0" indent="0" algn="ctr" rtl="0">
-              <a:spcBef>
-                <a:spcPts val="0"/>
-              </a:spcBef>
-              <a:spcAft>
-                <a:spcPts val="0"/>
-              </a:spcAft>
-              <a:buNone/>
-            </a:pPr>
-            <a:r>
-              <a:rPr lang="ja-JP" sz="1600" b="1">
-                <a:solidFill>
-                  <a:srgbClr val="004DE6"/>
-                </a:solidFill>
-                <a:latin typeface="メイリオ"/>
-                <a:ea typeface="Meiryo"/>
-                <a:cs typeface="Meiryo"/>
-                <a:sym typeface="Meiryo"/>
-              </a:rPr>
-              <a:t>　　　　　　</a:t>
-            </a:r>
-            <a:endParaRPr sz="1800" b="1">
-              <a:solidFill>
-                <a:srgbClr val="004DE6"/>
-              </a:solidFill>
-              <a:latin typeface="Meiryo"/>
-              <a:ea typeface="Meiryo"/>
-              <a:cs typeface="Meiryo"/>
-              <a:sym typeface="Meiryo"/>
-            </a:endParaRPr>
-          </a:p>
-        </p:txBody>
-      </p:sp>
-      <p:sp>
-        <p:nvSpPr>
-          <p:cNvPr id="46" name="Google Shape;46;p3"/>
-          <p:cNvSpPr/>
-          <p:nvPr/>
-        </p:nvSpPr>
-        <p:spPr>
-          <a:xfrm>
-            <a:off x="1089832" y="1437370"/>
-            <a:ext cx="7031520" cy="338554"/>
-          </a:xfrm>
-          <a:prstGeom prst="rect">
-            <a:avLst/>
-          </a:prstGeom>
-          <a:noFill/>
-          <a:ln>
-            <a:noFill/>
-          </a:ln>
-        </p:spPr>
-        <p:txBody>
-          <a:bodyPr spcFirstLastPara="1" wrap="square" lIns="91425" tIns="45700" rIns="91425" bIns="45700" anchor="t" anchorCtr="0">
-            <a:spAutoFit/>
-          </a:bodyPr>
-          <a:lstStyle/>
-          <a:p>
-            <a:pPr lvl="0"/>
-            <a:r>
-              <a:rPr lang="en-US" altLang="ja-JP" sz="1600" b="1" dirty="0">
-                <a:solidFill>
-                  <a:srgbClr val="004DE6"/>
-                </a:solidFill>
-                <a:latin typeface="メイリオ"/>
-                <a:ea typeface="Meiryo"/>
-                <a:cs typeface="Meiryo"/>
-                <a:sym typeface="Meiryo"/>
-              </a:rPr>
-              <a:t>【LINE</a:t>
-            </a:r>
-            <a:r>
-              <a:rPr lang="ja-JP" altLang="en-US" sz="1600" b="1" dirty="0">
-                <a:solidFill>
-                  <a:srgbClr val="004DE6"/>
-                </a:solidFill>
-                <a:latin typeface="メイリオ"/>
-                <a:ea typeface="Meiryo"/>
-                <a:cs typeface="Meiryo"/>
-                <a:sym typeface="Meiryo"/>
-              </a:rPr>
-              <a:t>オープンキャンペーン</a:t>
-            </a:r>
-            <a:r>
-              <a:rPr lang="en-US" altLang="ja-JP" sz="1600" b="1" dirty="0">
-                <a:solidFill>
-                  <a:srgbClr val="004DE6"/>
-                </a:solidFill>
-                <a:latin typeface="メイリオ"/>
-                <a:ea typeface="Meiryo"/>
-                <a:cs typeface="Meiryo"/>
-                <a:sym typeface="Meiryo"/>
-              </a:rPr>
-              <a:t>】26</a:t>
-            </a:r>
-            <a:r>
-              <a:rPr lang="ja-JP" altLang="en-US" sz="1600" b="1" dirty="0">
-                <a:solidFill>
-                  <a:srgbClr val="004DE6"/>
-                </a:solidFill>
-                <a:latin typeface="メイリオ"/>
-                <a:ea typeface="Meiryo"/>
-                <a:cs typeface="Meiryo"/>
-                <a:sym typeface="Meiryo"/>
-              </a:rPr>
-              <a:t>年</a:t>
-            </a:r>
-            <a:r>
-              <a:rPr lang="en-US" altLang="ja-JP" sz="1600" b="1" dirty="0">
-                <a:solidFill>
-                  <a:srgbClr val="004DE6"/>
-                </a:solidFill>
-                <a:latin typeface="メイリオ"/>
-                <a:ea typeface="Meiryo"/>
-                <a:cs typeface="Meiryo"/>
-                <a:sym typeface="Meiryo"/>
-              </a:rPr>
-              <a:t>10-12</a:t>
-            </a:r>
-            <a:r>
-              <a:rPr lang="ja-JP" altLang="en-US" sz="1600" b="1" dirty="0">
-                <a:solidFill>
-                  <a:srgbClr val="004DE6"/>
-                </a:solidFill>
-                <a:latin typeface="メイリオ"/>
-                <a:ea typeface="Meiryo"/>
-                <a:cs typeface="Meiryo"/>
-                <a:sym typeface="Meiryo"/>
-              </a:rPr>
-              <a:t>月 期間限定キャンペーン</a:t>
-            </a:r>
-            <a:endParaRPr lang="ja-JP" altLang="en-US" sz="1600" b="1" dirty="0">
-              <a:solidFill>
-                <a:srgbClr val="004DE6"/>
-              </a:solidFill>
-              <a:latin typeface="Meiryo"/>
-              <a:ea typeface="Meiryo"/>
-              <a:cs typeface="Meiryo"/>
-              <a:sym typeface="Meiryo"/>
-            </a:endParaRPr>
-          </a:p>
-        </p:txBody>
-      </p:sp>
-      <p:sp>
-        <p:nvSpPr>
-          <p:cNvPr id="47" name="Google Shape;47;p3"/>
-          <p:cNvSpPr txBox="1"/>
-          <p:nvPr/>
-        </p:nvSpPr>
-        <p:spPr>
-          <a:xfrm>
-            <a:off x="182880" y="88175"/>
-            <a:ext cx="7512385" cy="365091"/>
-          </a:xfrm>
-          <a:prstGeom prst="rect">
-            <a:avLst/>
-          </a:prstGeom>
-          <a:noFill/>
-          <a:ln>
-            <a:noFill/>
-          </a:ln>
-        </p:spPr>
-        <p:txBody>
-          <a:bodyPr spcFirstLastPara="1" wrap="square" lIns="91425" tIns="72000" rIns="91425" bIns="45700" anchor="t" anchorCtr="0">
-            <a:spAutoFit/>
-          </a:bodyPr>
-          <a:lstStyle/>
-          <a:p>
-            <a:pPr marL="0" marR="0" lvl="0" indent="0" algn="l" rtl="0">
-              <a:spcBef>
-                <a:spcPts val="0"/>
-              </a:spcBef>
-              <a:spcAft>
-                <a:spcPts val="0"/>
-              </a:spcAft>
-              <a:buClr>
-                <a:schemeClr val="dk1"/>
-              </a:buClr>
-              <a:buSzPts val="1600"/>
-              <a:buFont typeface="Arial"/>
-              <a:buNone/>
-            </a:pPr>
-            <a:r>
-              <a:rPr lang="ja-JP" sz="1600" b="0" u="none">
-                <a:solidFill>
-                  <a:schemeClr val="dk1"/>
-                </a:solidFill>
-                <a:latin typeface="メイリオ"/>
-                <a:ea typeface="Meiryo"/>
-                <a:cs typeface="Meiryo"/>
-                <a:sym typeface="Meiryo"/>
-              </a:rPr>
-              <a:t>    今後のアップデート情報</a:t>
-            </a:r>
-            <a:endParaRPr sz="1600" b="0" u="none">
-              <a:solidFill>
-                <a:schemeClr val="dk1"/>
-              </a:solidFill>
-              <a:latin typeface="Meiryo"/>
-              <a:ea typeface="Meiryo"/>
-              <a:cs typeface="Meiryo"/>
-              <a:sym typeface="Meiryo"/>
-            </a:endParaRPr>
-          </a:p>
-        </p:txBody>
-      </p:sp>
-      <p:sp>
-        <p:nvSpPr>
-          <p:cNvPr id="50" name="Google Shape;50;p3"/>
-          <p:cNvSpPr/>
-          <p:nvPr/>
-        </p:nvSpPr>
-        <p:spPr>
-          <a:xfrm>
-            <a:off x="0" y="1890267"/>
-            <a:ext cx="9906000" cy="733579"/>
-          </a:xfrm>
-          <a:prstGeom prst="rect">
-            <a:avLst/>
-          </a:prstGeom>
-          <a:solidFill>
-            <a:srgbClr val="F2F2F2"/>
-          </a:solidFill>
-          <a:ln>
-            <a:noFill/>
-          </a:ln>
-        </p:spPr>
-        <p:txBody>
-          <a:bodyPr spcFirstLastPara="1" wrap="square" lIns="91425" tIns="45700" rIns="91425" bIns="45700" anchor="ctr" anchorCtr="0">
-            <a:noAutofit/>
-          </a:bodyPr>
-          <a:lstStyle/>
-          <a:p>
-            <a:pPr marL="0" marR="0" lvl="0" indent="0" algn="ctr" rtl="0">
-              <a:spcBef>
-                <a:spcPts val="0"/>
-              </a:spcBef>
-              <a:spcAft>
-                <a:spcPts val="0"/>
-              </a:spcAft>
-              <a:buNone/>
-            </a:pPr>
-            <a:endParaRPr sz="1200">
-              <a:solidFill>
-                <a:schemeClr val="dk1"/>
-              </a:solidFill>
-              <a:latin typeface="Meiryo"/>
-              <a:ea typeface="Meiryo"/>
-              <a:cs typeface="Meiryo"/>
-              <a:sym typeface="Meiryo"/>
-            </a:endParaRPr>
-          </a:p>
-        </p:txBody>
-      </p:sp>
-      <p:sp>
-        <p:nvSpPr>
-          <p:cNvPr id="51" name="Google Shape;51;p3"/>
-          <p:cNvSpPr/>
-          <p:nvPr/>
-        </p:nvSpPr>
-        <p:spPr>
-          <a:xfrm>
-            <a:off x="544108" y="1961282"/>
-            <a:ext cx="8817783" cy="646331"/>
-          </a:xfrm>
-          <a:prstGeom prst="rect">
-            <a:avLst/>
-          </a:prstGeom>
-          <a:noFill/>
-          <a:ln>
-            <a:noFill/>
-          </a:ln>
-        </p:spPr>
-        <p:txBody>
-          <a:bodyPr spcFirstLastPara="1" wrap="square" lIns="91425" tIns="45700" rIns="91425" bIns="45700" anchor="t" anchorCtr="0">
-            <a:spAutoFit/>
-          </a:bodyPr>
-          <a:lstStyle/>
-          <a:p>
-            <a:pPr marL="0" marR="0" lvl="0" indent="0" algn="ctr" rtl="0">
-              <a:spcBef>
-                <a:spcPts val="0"/>
-              </a:spcBef>
-              <a:spcAft>
-                <a:spcPts val="0"/>
-              </a:spcAft>
-              <a:buNone/>
-            </a:pPr>
-            <a:r>
-              <a:rPr lang="ja-JP" sz="1200" b="1">
-                <a:solidFill>
-                  <a:schemeClr val="dk1"/>
-                </a:solidFill>
-                <a:latin typeface="メイリオ"/>
-                <a:ea typeface="Meiryo"/>
-                <a:cs typeface="Meiryo"/>
-                <a:sym typeface="Meiryo"/>
-              </a:rPr>
-              <a:t>2026年10月20日開始〜12月25日までに終了する案件限定で、</a:t>
-            </a:r>
-            <a:endParaRPr sz="1200" b="1">
-              <a:solidFill>
-                <a:schemeClr val="dk1"/>
-              </a:solidFill>
-              <a:latin typeface="Meiryo"/>
-              <a:ea typeface="Meiryo"/>
-              <a:cs typeface="Meiryo"/>
-              <a:sym typeface="Meiryo"/>
-            </a:endParaRPr>
-          </a:p>
-          <a:p>
-            <a:pPr marL="0" marR="0" lvl="0" indent="0" algn="ctr" rtl="0">
-              <a:spcBef>
-                <a:spcPts val="0"/>
-              </a:spcBef>
-              <a:spcAft>
-                <a:spcPts val="0"/>
-              </a:spcAft>
-              <a:buNone/>
-            </a:pPr>
-            <a:r>
-              <a:rPr lang="ja-JP" sz="1200" b="1">
-                <a:solidFill>
-                  <a:schemeClr val="dk1"/>
-                </a:solidFill>
-                <a:latin typeface="メイリオ"/>
-                <a:ea typeface="Meiryo"/>
-                <a:cs typeface="Meiryo"/>
-                <a:sym typeface="Meiryo"/>
-              </a:rPr>
-              <a:t>基本費用・掲載期間・配信通数の3点が特別条件になるキャンペーン。</a:t>
-            </a:r>
-            <a:endParaRPr/>
-          </a:p>
-          <a:p>
-            <a:pPr marL="0" marR="0" lvl="0" indent="0" algn="ctr" rtl="0">
-              <a:spcBef>
-                <a:spcPts val="0"/>
-              </a:spcBef>
-              <a:spcAft>
-                <a:spcPts val="0"/>
-              </a:spcAft>
-              <a:buNone/>
-            </a:pPr>
-            <a:r>
-              <a:rPr lang="ja-JP" sz="1200" b="1">
-                <a:solidFill>
-                  <a:schemeClr val="dk1"/>
-                </a:solidFill>
-                <a:latin typeface="メイリオ"/>
-                <a:ea typeface="Meiryo"/>
-                <a:cs typeface="Meiryo"/>
-                <a:sym typeface="Meiryo"/>
-              </a:rPr>
-              <a:t>友だち獲得を一気に伸ばしたいクライアントへの提案材料になる。</a:t>
-            </a:r>
-            <a:endParaRPr sz="1400" b="1">
-              <a:solidFill>
-                <a:schemeClr val="dk1"/>
-              </a:solidFill>
-              <a:latin typeface="Meiryo"/>
-              <a:ea typeface="Meiryo"/>
-              <a:cs typeface="Meiryo"/>
-              <a:sym typeface="Meiryo"/>
-            </a:endParaRPr>
-          </a:p>
-        </p:txBody>
-      </p:sp>
-      <p:sp>
-        <p:nvSpPr>
-          <p:cNvPr id="52" name="Google Shape;52;p3"/>
-          <p:cNvSpPr/>
-          <p:nvPr/>
-        </p:nvSpPr>
-        <p:spPr>
-          <a:xfrm>
-            <a:off x="351381" y="2714173"/>
-            <a:ext cx="5200000" cy="338554"/>
-          </a:xfrm>
-          <a:prstGeom prst="rect">
-            <a:avLst/>
-          </a:prstGeom>
-          <a:noFill/>
-          <a:ln>
-            <a:noFill/>
-          </a:ln>
-        </p:spPr>
-        <p:txBody>
-          <a:bodyPr spcFirstLastPara="1" wrap="square" lIns="91425" tIns="45700" rIns="91425" bIns="45700" anchor="t" anchorCtr="0">
-            <a:noAutofit/>
-          </a:bodyPr>
-          <a:lstStyle/>
-          <a:p>
-            <a:pPr marL="0" marR="0" lvl="0" indent="0" algn="l" rtl="0">
-              <a:spcBef>
-                <a:spcPts val="0"/>
-              </a:spcBef>
-              <a:spcAft>
-                <a:spcPts val="0"/>
-              </a:spcAft>
-              <a:buNone/>
-            </a:pPr>
-            <a:r>
-              <a:rPr lang="ja-JP" sz="1400" b="1">
-                <a:solidFill>
-                  <a:srgbClr val="15133D"/>
-                </a:solidFill>
-                <a:latin typeface="メイリオ"/>
-                <a:ea typeface="Meiryo"/>
-                <a:cs typeface="Meiryo"/>
-                <a:sym typeface="Meiryo"/>
-              </a:rPr>
-              <a:t>■ 詳細</a:t>
-            </a:r>
-            <a:endParaRPr/>
-          </a:p>
-        </p:txBody>
-      </p:sp>
-      <p:pic>
-        <p:nvPicPr>
-          <p:cNvPr id="62" name="Google Shape;62;p3" descr="LINE公式アカウントのロゴの使用方法とは？種類やダウンロード方法、利用時の注意点を紹介 | Mico（ミコ）"/>
-          <p:cNvPicPr preferRelativeResize="0"/>
-          <p:nvPr/>
-        </p:nvPicPr>
-        <p:blipFill rotWithShape="1">
-          <a:blip r:embed="rId3">
-            <a:alphaModFix/>
-          </a:blip>
-          <a:srcRect/>
-          <a:stretch/>
-        </p:blipFill>
-        <p:spPr>
-          <a:xfrm>
-            <a:off x="351381" y="1234746"/>
-            <a:ext cx="656177" cy="655521"/>
-          </a:xfrm>
-          <a:prstGeom prst="rect">
-            <a:avLst/>
-          </a:prstGeom>
-          <a:noFill/>
-          <a:ln>
-            <a:noFill/>
-          </a:ln>
-        </p:spPr>
-      </p:pic>
-      <p:sp>
-        <p:nvSpPr>
-          <p:cNvPr id="63" name="Rectangle 62"/>
-          <p:cNvSpPr/>
-          <p:nvPr/>
-        </p:nvSpPr>
-        <p:spPr>
-          <a:xfrm>
-            <a:off x="544108" y="3068960"/>
-            <a:ext cx="3547872" cy="274320"/>
-          </a:xfrm>
-          <a:prstGeom prst="rect">
-            <a:avLst/>
-          </a:prstGeom>
-          <a:solidFill>
-            <a:srgbClr val="F2F2F2"/>
-          </a:solidFill>
-          <a:ln>
-            <a:noFill/>
-          </a:ln>
-          <a:effectLst/>
-        </p:spPr>
-        <p:style>
-          <a:lnRef idx="1">
-            <a:schemeClr val="accent1"/>
-          </a:lnRef>
-          <a:fillRef idx="3">
-            <a:schemeClr val="accent1"/>
-          </a:fillRef>
-          <a:effectRef idx="2">
-            <a:schemeClr val="accent1"/>
-          </a:effectRef>
-          <a:fontRef idx="minor">
-            <a:schemeClr val="lt1"/>
-          </a:fontRef>
-        </p:style>
-        <p:txBody>
-          <a:bodyPr wrap="square" rIns="45720" rtlCol="0" anchor="ctr"/>
-          <a:lstStyle/>
-          <a:p>
-            <a:pPr algn="ctr"/>
-            <a:r>
-              <a:rPr sz="1300" b="1">
-                <a:solidFill>
-                  <a:srgbClr val="333333"/>
-                </a:solidFill>
-                <a:latin typeface="メイリオ"/>
-              </a:rPr>
-              <a:t>AS-IS</a:t>
-            </a:r>
-          </a:p>
-        </p:txBody>
-      </p:sp>
-      <p:sp>
-        <p:nvSpPr>
-          <p:cNvPr id="64" name="Rectangle 63"/>
-          <p:cNvSpPr/>
-          <p:nvPr/>
-        </p:nvSpPr>
-        <p:spPr>
-          <a:xfrm>
-            <a:off x="544108" y="3343280"/>
-            <a:ext cx="3547872" cy="640080"/>
-          </a:xfrm>
-          <a:prstGeom prst="rect">
-            <a:avLst/>
-          </a:prstGeom>
-          <a:solidFill>
-            <a:srgbClr val="F2F2F2"/>
-          </a:solidFill>
-          <a:ln w="12700">
-            <a:solidFill>
-              <a:srgbClr val="D9D9D9"/>
-            </a:solidFill>
-          </a:ln>
-          <a:effectLst/>
-        </p:spPr>
-        <p:style>
-          <a:lnRef idx="1">
-            <a:schemeClr val="accent1"/>
-          </a:lnRef>
-          <a:fillRef idx="3">
-            <a:schemeClr val="accent1"/>
-          </a:fillRef>
-          <a:effectRef idx="2">
-            <a:schemeClr val="accent1"/>
-          </a:effectRef>
-          <a:fontRef idx="minor">
-            <a:schemeClr val="lt1"/>
-          </a:fontRef>
-        </p:style>
-        <p:txBody>
-          <a:bodyPr wrap="square" lIns="182880" tIns="54864" rIns="137160" bIns="54864" rtlCol="0" anchor="ctr"/>
-          <a:lstStyle/>
-          <a:p>
-            <a:pPr algn="ctr">
-              <a:lnSpc>
-                <a:spcPct val="110000"/>
-              </a:lnSpc>
-            </a:pPr>
-            <a:r>
-              <a:rPr sz="1300" b="1" dirty="0">
-                <a:solidFill>
-                  <a:srgbClr val="15133D"/>
-                </a:solidFill>
-                <a:latin typeface="メイリオ"/>
-              </a:rPr>
-              <a:t>通常プラン｜基本費用1,800万円・</a:t>
-            </a:r>
-            <a:endParaRPr lang="en-US" sz="1300" b="1" dirty="0">
-              <a:solidFill>
-                <a:srgbClr val="15133D"/>
-              </a:solidFill>
-              <a:latin typeface="メイリオ"/>
-            </a:endParaRPr>
-          </a:p>
-          <a:p>
-            <a:pPr algn="ctr">
-              <a:lnSpc>
-                <a:spcPct val="110000"/>
-              </a:lnSpc>
-            </a:pPr>
-            <a:r>
-              <a:rPr sz="1300" b="1" dirty="0">
-                <a:solidFill>
-                  <a:srgbClr val="15133D"/>
-                </a:solidFill>
-                <a:latin typeface="メイリオ"/>
-              </a:rPr>
-              <a:t>掲載期間7日間・配信900万通</a:t>
-            </a:r>
-          </a:p>
-        </p:txBody>
-      </p:sp>
-      <p:sp>
-        <p:nvSpPr>
-          <p:cNvPr id="65" name="TextBox 64"/>
-          <p:cNvSpPr txBox="1"/>
-          <p:nvPr/>
-        </p:nvSpPr>
-        <p:spPr>
-          <a:xfrm>
-            <a:off x="4091980" y="3068960"/>
-            <a:ext cx="457200" cy="914400"/>
-          </a:xfrm>
-          <a:prstGeom prst="rect">
-            <a:avLst/>
-          </a:prstGeom>
-          <a:noFill/>
-        </p:spPr>
-        <p:txBody>
-          <a:bodyPr wrap="none" anchor="ctr">
-            <a:spAutoFit/>
-          </a:bodyPr>
-          <a:lstStyle/>
-          <a:p>
-            <a:pPr algn="ctr"/>
-            <a:r>
-              <a:rPr sz="1800" b="1">
-                <a:solidFill>
-                  <a:srgbClr val="3467B2"/>
-                </a:solidFill>
-                <a:latin typeface="メイリオ"/>
-              </a:rPr>
-              <a:t>▶</a:t>
-            </a:r>
-          </a:p>
-        </p:txBody>
-      </p:sp>
-      <p:sp>
-        <p:nvSpPr>
-          <p:cNvPr id="66" name="Rectangle 65"/>
-          <p:cNvSpPr/>
-          <p:nvPr/>
-        </p:nvSpPr>
-        <p:spPr>
-          <a:xfrm>
-            <a:off x="4549180" y="3068960"/>
-            <a:ext cx="5059521" cy="274320"/>
-          </a:xfrm>
-          <a:prstGeom prst="rect">
-            <a:avLst/>
-          </a:prstGeom>
-          <a:solidFill>
-            <a:srgbClr val="15133D"/>
-          </a:solidFill>
-          <a:ln>
-            <a:noFill/>
-          </a:ln>
-          <a:effectLst/>
-        </p:spPr>
-        <p:style>
-          <a:lnRef idx="1">
-            <a:schemeClr val="accent1"/>
-          </a:lnRef>
-          <a:fillRef idx="3">
-            <a:schemeClr val="accent1"/>
-          </a:fillRef>
-          <a:effectRef idx="2">
-            <a:schemeClr val="accent1"/>
-          </a:effectRef>
-          <a:fontRef idx="minor">
-            <a:schemeClr val="lt1"/>
-          </a:fontRef>
-        </p:style>
-        <p:txBody>
-          <a:bodyPr wrap="square" rIns="45720" rtlCol="0" anchor="ctr"/>
-          <a:lstStyle/>
-          <a:p>
-            <a:pPr algn="ctr"/>
-            <a:r>
-              <a:rPr sz="1300" b="1">
-                <a:solidFill>
-                  <a:srgbClr val="FFFFFF"/>
-                </a:solidFill>
-                <a:latin typeface="メイリオ"/>
-              </a:rPr>
-              <a:t>TO-BE</a:t>
-            </a:r>
-          </a:p>
-        </p:txBody>
-      </p:sp>
-      <p:sp>
-        <p:nvSpPr>
-          <p:cNvPr id="67" name="Rectangle 66"/>
-          <p:cNvSpPr/>
-          <p:nvPr/>
-        </p:nvSpPr>
-        <p:spPr>
-          <a:xfrm>
-            <a:off x="4549180" y="3343280"/>
-            <a:ext cx="5059521" cy="640080"/>
-          </a:xfrm>
-          <a:prstGeom prst="rect">
-            <a:avLst/>
-          </a:prstGeom>
-          <a:solidFill>
-            <a:srgbClr val="EAF0FA"/>
-          </a:solidFill>
-          <a:ln w="12700">
-            <a:solidFill>
-              <a:srgbClr val="3467B2"/>
-            </a:solidFill>
-          </a:ln>
-          <a:effectLst/>
-        </p:spPr>
-        <p:style>
-          <a:lnRef idx="1">
-            <a:schemeClr val="accent1"/>
-          </a:lnRef>
-          <a:fillRef idx="3">
-            <a:schemeClr val="accent1"/>
-          </a:fillRef>
-          <a:effectRef idx="2">
-            <a:schemeClr val="accent1"/>
-          </a:effectRef>
-          <a:fontRef idx="minor">
-            <a:schemeClr val="lt1"/>
-          </a:fontRef>
-        </p:style>
-        <p:txBody>
-          <a:bodyPr wrap="square" lIns="182880" tIns="54864" rIns="137160" bIns="54864" rtlCol="0" anchor="ctr"/>
-          <a:lstStyle/>
-          <a:p>
-            <a:pPr algn="ctr">
-              <a:lnSpc>
-                <a:spcPct val="110000"/>
-              </a:lnSpc>
-            </a:pPr>
-            <a:r>
-              <a:rPr sz="2200" b="1" dirty="0">
-                <a:solidFill>
-                  <a:srgbClr val="15133D"/>
-                </a:solidFill>
-                <a:latin typeface="メイリオ"/>
-              </a:rPr>
-              <a:t>特別プラン｜基本費用1,500万円</a:t>
-            </a:r>
-          </a:p>
-          <a:p>
-            <a:pPr>
-              <a:lnSpc>
-                <a:spcPct val="110000"/>
-              </a:lnSpc>
-              <a:spcBef>
-                <a:spcPts val="500"/>
-              </a:spcBef>
-            </a:pPr>
-            <a:r>
-              <a:rPr sz="1100" dirty="0">
-                <a:solidFill>
-                  <a:srgbClr val="333333"/>
-                </a:solidFill>
-                <a:latin typeface="メイリオ"/>
-              </a:rPr>
-              <a:t>掲載期間15日間・配信1,050万通に拡大</a:t>
-            </a:r>
-          </a:p>
-        </p:txBody>
-      </p:sp>
-      <p:sp>
-        <p:nvSpPr>
-          <p:cNvPr id="68" name="Rounded Rectangle 67"/>
-          <p:cNvSpPr/>
-          <p:nvPr/>
-        </p:nvSpPr>
-        <p:spPr>
-          <a:xfrm>
-            <a:off x="544108" y="4211960"/>
-            <a:ext cx="3547872" cy="1371600"/>
-          </a:xfrm>
-          <a:prstGeom prst="roundRect">
-            <a:avLst>
-              <a:gd name="adj" fmla="val 6000"/>
-            </a:avLst>
-          </a:prstGeom>
-          <a:solidFill>
-            <a:srgbClr val="EAF0FA"/>
-          </a:solidFill>
-          <a:ln w="12700">
-            <a:solidFill>
-              <a:srgbClr val="3467B2"/>
-            </a:solidFill>
-          </a:ln>
-          <a:effectLst/>
-        </p:spPr>
-        <p:style>
-          <a:lnRef idx="1">
-            <a:schemeClr val="accent1"/>
-          </a:lnRef>
-          <a:fillRef idx="3">
-            <a:schemeClr val="accent1"/>
-          </a:fillRef>
-          <a:effectRef idx="2">
-            <a:schemeClr val="accent1"/>
-          </a:effectRef>
-          <a:fontRef idx="minor">
-            <a:schemeClr val="lt1"/>
-          </a:fontRef>
-        </p:style>
-        <p:txBody>
-          <a:bodyPr wrap="square" lIns="228600" rIns="182880" rtlCol="0" anchor="ctr"/>
-          <a:lstStyle/>
-          <a:p>
-            <a:pPr algn="l"/>
-            <a:r>
-              <a:rPr sz="1800" b="1" dirty="0" err="1">
-                <a:solidFill>
-                  <a:srgbClr val="15133D"/>
-                </a:solidFill>
-                <a:latin typeface="メイリオ"/>
-              </a:rPr>
-              <a:t>特別価格で提案しやすい</a:t>
-            </a:r>
-            <a:endParaRPr sz="1800" b="1" dirty="0">
-              <a:solidFill>
-                <a:srgbClr val="15133D"/>
-              </a:solidFill>
-              <a:latin typeface="メイリオ"/>
-            </a:endParaRPr>
-          </a:p>
-          <a:p>
-            <a:pPr algn="l">
-              <a:lnSpc>
-                <a:spcPct val="115000"/>
-              </a:lnSpc>
-              <a:spcBef>
-                <a:spcPts val="600"/>
-              </a:spcBef>
-            </a:pPr>
-            <a:r>
-              <a:rPr sz="1200" dirty="0">
-                <a:solidFill>
-                  <a:srgbClr val="333333"/>
-                </a:solidFill>
-                <a:latin typeface="メイリオ"/>
-              </a:rPr>
-              <a:t>基本費用が1,800万円→1,500万円に。</a:t>
-            </a:r>
-            <a:endParaRPr lang="en-US" sz="1200" dirty="0">
-              <a:solidFill>
-                <a:srgbClr val="333333"/>
-              </a:solidFill>
-              <a:latin typeface="メイリオ"/>
-            </a:endParaRPr>
-          </a:p>
-          <a:p>
-            <a:pPr algn="l">
-              <a:lnSpc>
-                <a:spcPct val="115000"/>
-              </a:lnSpc>
-              <a:spcBef>
-                <a:spcPts val="600"/>
-              </a:spcBef>
-            </a:pPr>
-            <a:r>
-              <a:rPr sz="1200" dirty="0" err="1">
-                <a:solidFill>
-                  <a:srgbClr val="333333"/>
-                </a:solidFill>
-                <a:latin typeface="メイリオ"/>
-              </a:rPr>
-              <a:t>期間限定の特別プランとして提案の後押しになる</a:t>
-            </a:r>
-            <a:r>
-              <a:rPr sz="1200" dirty="0">
-                <a:solidFill>
-                  <a:srgbClr val="333333"/>
-                </a:solidFill>
-                <a:latin typeface="メイリオ"/>
-              </a:rPr>
-              <a:t>。</a:t>
-            </a:r>
-          </a:p>
-        </p:txBody>
-      </p:sp>
-      <p:sp>
-        <p:nvSpPr>
-          <p:cNvPr id="69" name="Rounded Rectangle 68"/>
-          <p:cNvSpPr/>
-          <p:nvPr/>
-        </p:nvSpPr>
-        <p:spPr>
-          <a:xfrm>
-            <a:off x="4549180" y="4211960"/>
-            <a:ext cx="5059521" cy="1371600"/>
-          </a:xfrm>
-          <a:prstGeom prst="roundRect">
-            <a:avLst>
-              <a:gd name="adj" fmla="val 6000"/>
-            </a:avLst>
-          </a:prstGeom>
-          <a:solidFill>
-            <a:srgbClr val="EAF0FA"/>
-          </a:solidFill>
-          <a:ln w="12700">
-            <a:solidFill>
-              <a:srgbClr val="3467B2"/>
-            </a:solidFill>
-          </a:ln>
-          <a:effectLst/>
-        </p:spPr>
-        <p:style>
-          <a:lnRef idx="1">
-            <a:schemeClr val="accent1"/>
-          </a:lnRef>
-          <a:fillRef idx="3">
-            <a:schemeClr val="accent1"/>
-          </a:fillRef>
-          <a:effectRef idx="2">
-            <a:schemeClr val="accent1"/>
-          </a:effectRef>
-          <a:fontRef idx="minor">
-            <a:schemeClr val="lt1"/>
-          </a:fontRef>
-        </p:style>
-        <p:txBody>
-          <a:bodyPr wrap="square" lIns="228600" rIns="182880" rtlCol="0" anchor="ctr"/>
-          <a:lstStyle/>
-          <a:p>
-            <a:pPr algn="l"/>
-            <a:r>
-              <a:rPr sz="1700" b="1" dirty="0">
-                <a:solidFill>
-                  <a:srgbClr val="15133D"/>
-                </a:solidFill>
-                <a:latin typeface="メイリオ"/>
-              </a:rPr>
-              <a:t>景品はLINEポイント2pt総付</a:t>
-            </a:r>
-          </a:p>
-          <a:p>
-            <a:pPr algn="l">
-              <a:lnSpc>
-                <a:spcPct val="115000"/>
-              </a:lnSpc>
-              <a:spcBef>
-                <a:spcPts val="600"/>
-              </a:spcBef>
-            </a:pPr>
-            <a:r>
-              <a:rPr sz="1100" dirty="0">
-                <a:solidFill>
-                  <a:srgbClr val="333333"/>
-                </a:solidFill>
-                <a:latin typeface="メイリオ"/>
-              </a:rPr>
-              <a:t>応募者全員にLINEポイント2ptを進呈するアンケート型キャンペーン。</a:t>
-            </a:r>
-            <a:endParaRPr lang="en-US" sz="1100" dirty="0">
-              <a:solidFill>
-                <a:srgbClr val="333333"/>
-              </a:solidFill>
-              <a:latin typeface="メイリオ"/>
-            </a:endParaRPr>
-          </a:p>
-          <a:p>
-            <a:pPr algn="l">
-              <a:lnSpc>
-                <a:spcPct val="115000"/>
-              </a:lnSpc>
-              <a:spcBef>
-                <a:spcPts val="600"/>
-              </a:spcBef>
-            </a:pPr>
-            <a:r>
-              <a:rPr sz="1100" dirty="0" err="1">
-                <a:solidFill>
-                  <a:srgbClr val="333333"/>
-                </a:solidFill>
-                <a:latin typeface="メイリオ"/>
-              </a:rPr>
-              <a:t>対象はLINE公式アカウント・Messaging</a:t>
-            </a:r>
-            <a:r>
-              <a:rPr sz="1100" dirty="0">
-                <a:solidFill>
-                  <a:srgbClr val="333333"/>
-                </a:solidFill>
-                <a:latin typeface="メイリオ"/>
-              </a:rPr>
-              <a:t> </a:t>
-            </a:r>
-            <a:r>
-              <a:rPr sz="1100" dirty="0" err="1">
-                <a:solidFill>
-                  <a:srgbClr val="333333"/>
-                </a:solidFill>
-                <a:latin typeface="メイリオ"/>
-              </a:rPr>
-              <a:t>API対応かつ認証プロバイダー必須</a:t>
-            </a:r>
-            <a:r>
-              <a:rPr sz="1100" dirty="0">
-                <a:solidFill>
-                  <a:srgbClr val="333333"/>
-                </a:solidFill>
-                <a:latin typeface="メイリオ"/>
-              </a:rPr>
-              <a:t>。</a:t>
-            </a:r>
-          </a:p>
-        </p:txBody>
-      </p:sp>
-      <p:sp>
-        <p:nvSpPr>
-          <p:cNvPr id="3" name="正方形/長方形 2">
-            <a:extLst>
-              <a:ext uri="{FF2B5EF4-FFF2-40B4-BE49-F238E27FC236}">
-                <a16:creationId xmlns:a16="http://schemas.microsoft.com/office/drawing/2014/main" id="{B4A2C5C5-23E7-72FD-079B-3C246572FE9A}"/>
-              </a:ext>
-            </a:extLst>
-          </p:cNvPr>
-          <p:cNvSpPr/>
-          <p:nvPr/>
-        </p:nvSpPr>
-        <p:spPr>
-          <a:xfrm>
-            <a:off x="7560840" y="730955"/>
-            <a:ext cx="829618" cy="435690"/>
-          </a:xfrm>
-          <a:prstGeom prst="rect">
-            <a:avLst/>
-          </a:prstGeom>
-          <a:solidFill>
-            <a:schemeClr val="bg1"/>
-          </a:solidFill>
-          <a:ln w="9525">
-            <a:solidFill>
-              <a:srgbClr val="4F81BD"/>
-            </a:solidFill>
-            <a:prstDash val="sysDash"/>
-          </a:ln>
-          <a:effectLst/>
-        </p:spPr>
-        <p:style>
-          <a:lnRef idx="1">
-            <a:schemeClr val="accent1"/>
-          </a:lnRef>
-          <a:fillRef idx="3">
-            <a:schemeClr val="accent1"/>
-          </a:fillRef>
-          <a:effectRef idx="2">
-            <a:schemeClr val="accent1"/>
-          </a:effectRef>
-          <a:fontRef idx="minor">
-            <a:schemeClr val="lt1"/>
-          </a:fontRef>
-        </p:style>
-        <p:txBody>
-          <a:bodyPr rtlCol="0" anchor="ctr"/>
-          <a:lstStyle/>
-          <a:p>
-            <a:pPr algn="ctr"/>
-            <a:r>
-              <a:rPr lang="ja-JP" altLang="en-US" sz="1200" dirty="0">
-                <a:solidFill>
-                  <a:schemeClr val="tx1"/>
-                </a:solidFill>
-                <a:latin typeface="メイリオ" panose="020B0604030504040204" pitchFamily="50" charset="-128"/>
-                <a:ea typeface="メイリオ" panose="020B0604030504040204" pitchFamily="50" charset="-128"/>
-              </a:rPr>
-              <a:t>その他</a:t>
-            </a:r>
-            <a:endParaRPr kumimoji="1" lang="ja-JP" altLang="en-US" sz="1200" dirty="0">
-              <a:solidFill>
-                <a:schemeClr val="tx1"/>
-              </a:solidFill>
-              <a:latin typeface="メイリオ" panose="020B0604030504040204" pitchFamily="50" charset="-128"/>
-              <a:ea typeface="メイリオ" panose="020B0604030504040204" pitchFamily="50" charset="-128"/>
-            </a:endParaRPr>
-          </a:p>
-        </p:txBody>
-      </p:sp>
-      <p:sp>
-        <p:nvSpPr>
-          <p:cNvPr id="5" name="正方形/長方形 4">
-            <a:extLst>
-              <a:ext uri="{FF2B5EF4-FFF2-40B4-BE49-F238E27FC236}">
-                <a16:creationId xmlns:a16="http://schemas.microsoft.com/office/drawing/2014/main" id="{2024E7FC-BCCF-EF5E-24E7-6708EA4D9CE6}"/>
-              </a:ext>
-            </a:extLst>
-          </p:cNvPr>
-          <p:cNvSpPr/>
-          <p:nvPr/>
-        </p:nvSpPr>
-        <p:spPr>
-          <a:xfrm>
-            <a:off x="5797260" y="730955"/>
-            <a:ext cx="829618" cy="435690"/>
-          </a:xfrm>
-          <a:prstGeom prst="rect">
-            <a:avLst/>
-          </a:prstGeom>
-          <a:solidFill>
-            <a:schemeClr val="bg1"/>
-          </a:solidFill>
-          <a:ln w="9525" cap="flat" cmpd="sng" algn="ctr">
-            <a:solidFill>
-              <a:srgbClr val="4F81BD"/>
-            </a:solidFill>
-            <a:prstDash val="sysDash"/>
-          </a:ln>
-          <a:effectLst/>
-        </p:spPr>
-        <p:txBody>
-          <a:bodyPr rtlCol="0" anchor="ctr"/>
-          <a:lstStyle/>
-          <a:p>
-            <a:pPr algn="ctr">
-              <a:buClrTx/>
-              <a:buFontTx/>
-              <a:buNone/>
-            </a:pPr>
-            <a:r>
-              <a:rPr kumimoji="1" lang="ja-JP" altLang="en-US" sz="1000" kern="1200" dirty="0">
-                <a:latin typeface="メイリオ" panose="020B0604030504040204" pitchFamily="50" charset="-128"/>
-                <a:ea typeface="メイリオ" panose="020B0604030504040204" pitchFamily="50" charset="-128"/>
-              </a:rPr>
-              <a:t>開発</a:t>
-            </a:r>
-            <a:endParaRPr kumimoji="1" lang="en-US" altLang="ja-JP" sz="1000" kern="1200" dirty="0">
-              <a:latin typeface="メイリオ" panose="020B0604030504040204" pitchFamily="50" charset="-128"/>
-              <a:ea typeface="メイリオ" panose="020B0604030504040204" pitchFamily="50" charset="-128"/>
-            </a:endParaRPr>
-          </a:p>
-          <a:p>
-            <a:pPr algn="ctr">
-              <a:buClrTx/>
-              <a:buFontTx/>
-              <a:buNone/>
-            </a:pPr>
-            <a:r>
-              <a:rPr lang="en-US" altLang="ja-JP" sz="1000" dirty="0">
-                <a:latin typeface="メイリオ" panose="020B0604030504040204" pitchFamily="50" charset="-128"/>
-                <a:ea typeface="メイリオ" panose="020B0604030504040204" pitchFamily="50" charset="-128"/>
-              </a:rPr>
-              <a:t>LINE</a:t>
-            </a:r>
-            <a:r>
-              <a:rPr lang="ja-JP" altLang="en-US" sz="1000" dirty="0">
-                <a:latin typeface="メイリオ" panose="020B0604030504040204" pitchFamily="50" charset="-128"/>
-                <a:ea typeface="メイリオ" panose="020B0604030504040204" pitchFamily="50" charset="-128"/>
-              </a:rPr>
-              <a:t> </a:t>
-            </a:r>
-            <a:r>
-              <a:rPr lang="en-US" altLang="ja-JP" sz="1000" dirty="0">
-                <a:latin typeface="メイリオ" panose="020B0604030504040204" pitchFamily="50" charset="-128"/>
-                <a:ea typeface="メイリオ" panose="020B0604030504040204" pitchFamily="50" charset="-128"/>
-              </a:rPr>
-              <a:t>API</a:t>
-            </a:r>
-            <a:endParaRPr kumimoji="1" lang="ja-JP" altLang="en-US" sz="1000" kern="1200" dirty="0">
-              <a:latin typeface="メイリオ" panose="020B0604030504040204" pitchFamily="50" charset="-128"/>
-              <a:ea typeface="メイリオ" panose="020B0604030504040204" pitchFamily="50" charset="-128"/>
-            </a:endParaRPr>
-          </a:p>
-        </p:txBody>
-      </p:sp>
-      <p:sp>
-        <p:nvSpPr>
-          <p:cNvPr id="7" name="正方形/長方形 6">
-            <a:extLst>
-              <a:ext uri="{FF2B5EF4-FFF2-40B4-BE49-F238E27FC236}">
-                <a16:creationId xmlns:a16="http://schemas.microsoft.com/office/drawing/2014/main" id="{F0E0E3F0-F17E-3F21-B751-96468BECEAD0}"/>
-              </a:ext>
-            </a:extLst>
-          </p:cNvPr>
-          <p:cNvSpPr/>
-          <p:nvPr/>
-        </p:nvSpPr>
-        <p:spPr>
-          <a:xfrm>
-            <a:off x="4915470" y="730955"/>
-            <a:ext cx="829618" cy="435690"/>
-          </a:xfrm>
-          <a:prstGeom prst="rect">
-            <a:avLst/>
-          </a:prstGeom>
-          <a:solidFill>
-            <a:schemeClr val="bg1"/>
-          </a:solidFill>
-          <a:ln w="9525">
-            <a:solidFill>
-              <a:schemeClr val="accent1"/>
-            </a:solidFill>
-            <a:prstDash val="solid"/>
-          </a:ln>
-          <a:effectLst/>
-        </p:spPr>
-        <p:style>
-          <a:lnRef idx="1">
-            <a:schemeClr val="accent1"/>
-          </a:lnRef>
-          <a:fillRef idx="3">
-            <a:schemeClr val="accent1"/>
-          </a:fillRef>
-          <a:effectRef idx="2">
-            <a:schemeClr val="accent1"/>
-          </a:effectRef>
-          <a:fontRef idx="minor">
-            <a:schemeClr val="lt1"/>
-          </a:fontRef>
-        </p:style>
-        <p:txBody>
-          <a:bodyPr rtlCol="0" anchor="ctr"/>
-          <a:lstStyle/>
-          <a:p>
-            <a:pPr algn="ctr"/>
-            <a:r>
-              <a:rPr lang="en-US" altLang="ja-JP" sz="1000" dirty="0">
-                <a:solidFill>
-                  <a:schemeClr val="tx1"/>
-                </a:solidFill>
-                <a:latin typeface="メイリオ" panose="020B0604030504040204" pitchFamily="50" charset="-128"/>
-                <a:ea typeface="メイリオ" panose="020B0604030504040204" pitchFamily="50" charset="-128"/>
-              </a:rPr>
-              <a:t>LINE</a:t>
-            </a:r>
-            <a:r>
-              <a:rPr lang="ja-JP" altLang="en-US" sz="1000" dirty="0">
-                <a:solidFill>
-                  <a:schemeClr val="tx1"/>
-                </a:solidFill>
-                <a:latin typeface="メイリオ" panose="020B0604030504040204" pitchFamily="50" charset="-128"/>
-                <a:ea typeface="メイリオ" panose="020B0604030504040204" pitchFamily="50" charset="-128"/>
-              </a:rPr>
-              <a:t>公式アカウント</a:t>
-            </a:r>
-            <a:endParaRPr kumimoji="1" lang="ja-JP" altLang="en-US" sz="1000" dirty="0">
-              <a:solidFill>
-                <a:schemeClr val="tx1"/>
-              </a:solidFill>
-              <a:latin typeface="メイリオ" panose="020B0604030504040204" pitchFamily="50" charset="-128"/>
-              <a:ea typeface="メイリオ" panose="020B0604030504040204" pitchFamily="50" charset="-128"/>
-            </a:endParaRPr>
-          </a:p>
-        </p:txBody>
-      </p:sp>
-      <p:graphicFrame>
-        <p:nvGraphicFramePr>
-          <p:cNvPr id="9" name="図表 8">
-            <a:extLst>
-              <a:ext uri="{FF2B5EF4-FFF2-40B4-BE49-F238E27FC236}">
-                <a16:creationId xmlns:a16="http://schemas.microsoft.com/office/drawing/2014/main" id="{C761A312-CBA2-643B-0133-3A448D5EB91C}"/>
-              </a:ext>
-            </a:extLst>
-          </p:cNvPr>
-          <p:cNvGraphicFramePr/>
-          <p:nvPr/>
-        </p:nvGraphicFramePr>
-        <p:xfrm>
-          <a:off x="8529759" y="688315"/>
-          <a:ext cx="1376241" cy="1131931"/>
-        </p:xfrm>
-        <a:graphic>
-          <a:graphicData uri="http://schemas.openxmlformats.org/drawingml/2006/diagram">
-            <dgm:relIds xmlns:dgm="http://schemas.openxmlformats.org/drawingml/2006/diagram" xmlns:r="http://schemas.openxmlformats.org/officeDocument/2006/relationships" r:dm="rId4" r:lo="rId5" r:qs="rId6" r:cs="rId7"/>
-          </a:graphicData>
-        </a:graphic>
-      </p:graphicFrame>
-      <p:sp>
-        <p:nvSpPr>
-          <p:cNvPr id="11" name="正方形/長方形 10">
-            <a:extLst>
-              <a:ext uri="{FF2B5EF4-FFF2-40B4-BE49-F238E27FC236}">
-                <a16:creationId xmlns:a16="http://schemas.microsoft.com/office/drawing/2014/main" id="{361304B1-F9A7-8DB6-7F0D-C4C8C50522F4}"/>
-              </a:ext>
-            </a:extLst>
-          </p:cNvPr>
-          <p:cNvSpPr/>
-          <p:nvPr/>
-        </p:nvSpPr>
-        <p:spPr>
-          <a:xfrm>
-            <a:off x="6679050" y="730955"/>
-            <a:ext cx="829618" cy="435690"/>
-          </a:xfrm>
-          <a:prstGeom prst="rect">
-            <a:avLst/>
-          </a:prstGeom>
-          <a:solidFill>
-            <a:schemeClr val="bg2">
-              <a:lumMod val="20000"/>
-              <a:lumOff val="80000"/>
-            </a:schemeClr>
-          </a:solidFill>
-          <a:ln w="9525">
-            <a:solidFill>
-              <a:srgbClr val="4F81BD"/>
-            </a:solidFill>
-            <a:prstDash val="sysDash"/>
-          </a:ln>
-          <a:effectLst/>
-        </p:spPr>
-        <p:style>
-          <a:lnRef idx="1">
-            <a:schemeClr val="accent1"/>
-          </a:lnRef>
-          <a:fillRef idx="3">
-            <a:schemeClr val="accent1"/>
-          </a:fillRef>
-          <a:effectRef idx="2">
-            <a:schemeClr val="accent1"/>
-          </a:effectRef>
-          <a:fontRef idx="minor">
-            <a:schemeClr val="lt1"/>
-          </a:fontRef>
-        </p:style>
-        <p:txBody>
-          <a:bodyPr rtlCol="0" anchor="ctr"/>
-          <a:lstStyle/>
-          <a:p>
-            <a:pPr algn="ctr"/>
-            <a:r>
-              <a:rPr kumimoji="1" lang="ja-JP" altLang="en-US" sz="1000" dirty="0">
-                <a:solidFill>
-                  <a:schemeClr val="tx1"/>
-                </a:solidFill>
-                <a:latin typeface="メイリオ" panose="020B0604030504040204" pitchFamily="50" charset="-128"/>
-                <a:ea typeface="メイリオ" panose="020B0604030504040204" pitchFamily="50" charset="-128"/>
-              </a:rPr>
-              <a:t>オプション</a:t>
-            </a:r>
-            <a:endParaRPr kumimoji="1" lang="en-US" altLang="ja-JP" sz="1000" dirty="0">
-              <a:solidFill>
-                <a:schemeClr val="tx1"/>
-              </a:solidFill>
-              <a:latin typeface="メイリオ" panose="020B0604030504040204" pitchFamily="50" charset="-128"/>
-              <a:ea typeface="メイリオ" panose="020B0604030504040204" pitchFamily="50" charset="-128"/>
-            </a:endParaRPr>
-          </a:p>
-          <a:p>
-            <a:pPr algn="ctr"/>
-            <a:r>
-              <a:rPr kumimoji="1" lang="ja-JP" altLang="en-US" sz="1000" dirty="0">
-                <a:solidFill>
-                  <a:schemeClr val="tx1"/>
-                </a:solidFill>
-                <a:latin typeface="メイリオ" panose="020B0604030504040204" pitchFamily="50" charset="-128"/>
-                <a:ea typeface="メイリオ" panose="020B0604030504040204" pitchFamily="50" charset="-128"/>
-              </a:rPr>
-              <a:t>商材</a:t>
-            </a:r>
-          </a:p>
-        </p:txBody>
-      </p:sp>
-      <p:sp>
-        <p:nvSpPr>
-          <p:cNvPr id="44" name="Google Shape;44;p3"/>
-          <p:cNvSpPr txBox="1"/>
-          <p:nvPr/>
-        </p:nvSpPr>
-        <p:spPr>
-          <a:xfrm>
-            <a:off x="3296816" y="6597352"/>
-            <a:ext cx="6209091" cy="215444"/>
-          </a:xfrm>
-          <a:prstGeom prst="rect">
-            <a:avLst/>
-          </a:prstGeom>
-          <a:noFill/>
-          <a:ln>
-            <a:noFill/>
-          </a:ln>
-        </p:spPr>
-        <p:txBody>
-          <a:bodyPr anchorCtr="0" anchor="t" bIns="45700" lIns="91425" spcFirstLastPara="1" rIns="91425" wrap="square" tIns="45700">
-            <a:spAutoFit/>
-          </a:bodyPr>
-          <a:lstStyle/>
-          <a:p>
-            <a:pPr indent="0" lvl="0" marL="0" marR="0" rtl="0" algn="l">
-              <a:spcBef>
-                <a:spcPts val="0"/>
-              </a:spcBef>
-              <a:spcAft>
-                <a:spcPts val="0"/>
-              </a:spcAft>
-              <a:buNone/>
-            </a:pPr>
-            <a:r>
-              <a:rPr b="0" i="0" lang="ja-JP" sz="800" u="none" cap="none" strike="noStrike">
-                <a:solidFill>
-                  <a:schemeClr val="lt1"/>
-                </a:solidFill>
-                <a:latin typeface="メイリオ"/>
-                <a:ea typeface="Meiryo"/>
-                <a:cs typeface="Meiryo"/>
-                <a:sym typeface="Meiryo"/>
-              </a:rPr>
-              <a:t>出典：https://www.lycbiz.com/jp/service/line-sales-promotion/</a:t>
-            </a:r>
-            <a:endParaRPr sz="800">
-              <a:solidFill>
-                <a:schemeClr val="lt1"/>
-              </a:solidFill>
-              <a:latin typeface="Meiryo"/>
-              <a:ea typeface="Meiryo"/>
-              <a:cs typeface="Meiryo"/>
-              <a:sym typeface="Meiryo"/>
-            </a:endParaRPr>
-          </a:p>
-        </p:txBody>
-      </p:sp>
-    </p:spTree>
-  </p:cSld>
-  <p:clrMapOvr>
-    <a:masterClrMapping/>
-  </p:clrMapOvr>
-</p:sld>
-</file>
-
-<file path=ppt/slides/slide11.xml><?xml version="1.0" encoding="utf-8"?>
-<p:sld xmlns:a="http://schemas.openxmlformats.org/drawingml/2006/main" xmlns:r="http://schemas.openxmlformats.org/officeDocument/2006/relationships" xmlns:p="http://schemas.openxmlformats.org/presentationml/2006/main">
-  <p:cSld>
-    <p:spTree>
-      <p:nvGrpSpPr>
-        <p:cNvPr id="1" name=""/>
-        <p:cNvGrpSpPr/>
-        <p:nvPr/>
-      </p:nvGrpSpPr>
-      <p:grpSpPr>
-        <a:xfrm>
-          <a:off x="0" y="0"/>
-          <a:ext cx="0" cy="0"/>
-          <a:chOff x="0" y="0"/>
-          <a:chExt cx="0" cy="0"/>
-        </a:xfrm>
-      </p:grpSpPr>
-      <p:sp>
-        <p:nvSpPr>
-          <p:cNvPr id="40" name="Google Shape;40;p3"/>
-          <p:cNvSpPr/>
-          <p:nvPr/>
-        </p:nvSpPr>
-        <p:spPr>
-          <a:xfrm>
-            <a:off x="292801" y="730955"/>
-            <a:ext cx="1296144" cy="435690"/>
-          </a:xfrm>
-          <a:prstGeom prst="rect">
-            <a:avLst/>
-          </a:prstGeom>
-          <a:solidFill>
-            <a:schemeClr val="dk2"/>
-          </a:solidFill>
-          <a:ln w="9525" cap="flat" cmpd="sng">
-            <a:solidFill>
-              <a:srgbClr val="4A7DBA"/>
-            </a:solidFill>
-            <a:prstDash val="solid"/>
-            <a:round/>
-            <a:headEnd type="none" w="sm" len="sm"/>
-            <a:tailEnd type="none" w="sm" len="sm"/>
-          </a:ln>
-        </p:spPr>
-        <p:txBody>
-          <a:bodyPr spcFirstLastPara="1" wrap="square" lIns="91425" tIns="45700" rIns="91425" bIns="45700" anchor="ctr" anchorCtr="0">
-            <a:noAutofit/>
-          </a:bodyPr>
-          <a:lstStyle/>
-          <a:p>
-            <a:pPr marL="0" marR="0" lvl="0" indent="0" algn="ctr" rtl="0">
-              <a:spcBef>
-                <a:spcPts val="0"/>
-              </a:spcBef>
-              <a:spcAft>
-                <a:spcPts val="0"/>
-              </a:spcAft>
-              <a:buNone/>
-            </a:pPr>
-            <a:r>
-              <a:rPr lang="ja-JP" sz="1800" b="0" i="0" u="none" strike="noStrike" cap="none">
-                <a:solidFill>
-                  <a:schemeClr val="lt1"/>
-                </a:solidFill>
-                <a:latin typeface="メイリオ"/>
-                <a:ea typeface="Meiryo"/>
-                <a:cs typeface="Meiryo"/>
-                <a:sym typeface="Meiryo"/>
-              </a:rPr>
-              <a:t>対象業界</a:t>
-            </a:r>
-            <a:endParaRPr/>
-          </a:p>
-        </p:txBody>
-      </p:sp>
-      <p:sp>
-        <p:nvSpPr>
-          <p:cNvPr id="43" name="Google Shape;43;p3"/>
-          <p:cNvSpPr/>
-          <p:nvPr/>
-        </p:nvSpPr>
-        <p:spPr>
-          <a:xfrm>
-            <a:off x="1594068" y="730955"/>
-            <a:ext cx="2926883" cy="435690"/>
-          </a:xfrm>
-          <a:prstGeom prst="rect">
-            <a:avLst/>
-          </a:prstGeom>
-          <a:noFill/>
-          <a:ln w="9525" cap="flat" cmpd="sng">
-            <a:solidFill>
-              <a:srgbClr val="4A7DBA"/>
-            </a:solidFill>
-            <a:prstDash val="solid"/>
-            <a:round/>
-            <a:headEnd type="none" w="sm" len="sm"/>
-            <a:tailEnd type="none" w="sm" len="sm"/>
-          </a:ln>
-        </p:spPr>
-        <p:txBody>
-          <a:bodyPr spcFirstLastPara="1" wrap="square" lIns="91425" tIns="45700" rIns="91425" bIns="45700" anchor="ctr" anchorCtr="0">
-            <a:noAutofit/>
-          </a:bodyPr>
-          <a:lstStyle/>
-          <a:p>
-            <a:pPr marL="0" marR="0" lvl="0" indent="0" algn="ctr" rtl="0">
-              <a:spcBef>
-                <a:spcPts val="0"/>
-              </a:spcBef>
-              <a:spcAft>
-                <a:spcPts val="0"/>
-              </a:spcAft>
-              <a:buNone/>
-            </a:pPr>
-            <a:r>
-              <a:rPr lang="ja-JP" sz="1300" b="0" i="0" u="none" strike="noStrike" cap="none">
-                <a:solidFill>
-                  <a:schemeClr val="dk1"/>
-                </a:solidFill>
-                <a:latin typeface="メイリオ"/>
-                <a:ea typeface="Meiryo"/>
-                <a:cs typeface="Meiryo"/>
-                <a:sym typeface="Meiryo"/>
-              </a:rPr>
-              <a:t>友だち獲得を強化したい全業種</a:t>
-            </a:r>
-            <a:endParaRPr/>
-          </a:p>
-        </p:txBody>
-      </p:sp>
-      <p:sp>
-        <p:nvSpPr>
-          <p:cNvPr id="45" name="Google Shape;45;p3"/>
-          <p:cNvSpPr/>
-          <p:nvPr/>
-        </p:nvSpPr>
-        <p:spPr>
-          <a:xfrm>
-            <a:off x="0" y="1234746"/>
-            <a:ext cx="9906000" cy="672259"/>
-          </a:xfrm>
-          <a:prstGeom prst="rect">
-            <a:avLst/>
-          </a:prstGeom>
-          <a:solidFill>
-            <a:srgbClr val="C5D8F1"/>
-          </a:solidFill>
-          <a:ln>
-            <a:noFill/>
-          </a:ln>
-        </p:spPr>
-        <p:txBody>
-          <a:bodyPr spcFirstLastPara="1" wrap="square" lIns="91425" tIns="45700" rIns="91425" bIns="45700" anchor="ctr" anchorCtr="0">
-            <a:noAutofit/>
-          </a:bodyPr>
-          <a:lstStyle/>
-          <a:p>
-            <a:pPr marL="0" marR="0" lvl="0" indent="0" algn="ctr" rtl="0">
-              <a:spcBef>
-                <a:spcPts val="0"/>
-              </a:spcBef>
-              <a:spcAft>
-                <a:spcPts val="0"/>
-              </a:spcAft>
-              <a:buNone/>
-            </a:pPr>
-            <a:r>
-              <a:rPr lang="ja-JP" sz="1600" b="1">
-                <a:solidFill>
-                  <a:srgbClr val="004DE6"/>
-                </a:solidFill>
-                <a:latin typeface="メイリオ"/>
-                <a:ea typeface="Meiryo"/>
-                <a:cs typeface="Meiryo"/>
-                <a:sym typeface="Meiryo"/>
-              </a:rPr>
-              <a:t>　　　　　　</a:t>
-            </a:r>
-            <a:endParaRPr sz="1800" b="1">
-              <a:solidFill>
-                <a:srgbClr val="004DE6"/>
-              </a:solidFill>
-              <a:latin typeface="Meiryo"/>
-              <a:ea typeface="Meiryo"/>
-              <a:cs typeface="Meiryo"/>
-              <a:sym typeface="Meiryo"/>
-            </a:endParaRPr>
-          </a:p>
-        </p:txBody>
-      </p:sp>
-      <p:sp>
-        <p:nvSpPr>
-          <p:cNvPr id="46" name="Google Shape;46;p3"/>
-          <p:cNvSpPr/>
-          <p:nvPr/>
-        </p:nvSpPr>
-        <p:spPr>
-          <a:xfrm>
-            <a:off x="1089832" y="1437370"/>
-            <a:ext cx="7031520" cy="338554"/>
-          </a:xfrm>
-          <a:prstGeom prst="rect">
-            <a:avLst/>
-          </a:prstGeom>
-          <a:noFill/>
-          <a:ln>
-            <a:noFill/>
-          </a:ln>
-        </p:spPr>
-        <p:txBody>
-          <a:bodyPr spcFirstLastPara="1" wrap="square" lIns="91425" tIns="45700" rIns="91425" bIns="45700" anchor="t" anchorCtr="0">
-            <a:spAutoFit/>
-          </a:bodyPr>
-          <a:lstStyle/>
-          <a:p>
-            <a:pPr lvl="0"/>
-            <a:r>
-              <a:rPr lang="en-US" altLang="ja-JP" sz="1600" b="1" dirty="0">
-                <a:solidFill>
-                  <a:srgbClr val="004DE6"/>
-                </a:solidFill>
-                <a:latin typeface="メイリオ"/>
-                <a:ea typeface="Meiryo"/>
-                <a:cs typeface="Meiryo"/>
-                <a:sym typeface="Meiryo"/>
-              </a:rPr>
-              <a:t>【LINE</a:t>
-            </a:r>
-            <a:r>
-              <a:rPr lang="ja-JP" altLang="en-US" sz="1600" b="1" dirty="0">
-                <a:solidFill>
-                  <a:srgbClr val="004DE6"/>
-                </a:solidFill>
-                <a:latin typeface="メイリオ"/>
-                <a:ea typeface="Meiryo"/>
-                <a:cs typeface="Meiryo"/>
-                <a:sym typeface="Meiryo"/>
-              </a:rPr>
-              <a:t>オープンキャンペーン</a:t>
-            </a:r>
-            <a:r>
-              <a:rPr lang="en-US" altLang="ja-JP" sz="1600" b="1" dirty="0">
-                <a:solidFill>
-                  <a:srgbClr val="004DE6"/>
-                </a:solidFill>
-                <a:latin typeface="メイリオ"/>
-                <a:ea typeface="Meiryo"/>
-                <a:cs typeface="Meiryo"/>
-                <a:sym typeface="Meiryo"/>
-              </a:rPr>
-              <a:t>】26</a:t>
-            </a:r>
-            <a:r>
-              <a:rPr lang="ja-JP" altLang="en-US" sz="1600" b="1" dirty="0">
-                <a:solidFill>
-                  <a:srgbClr val="004DE6"/>
-                </a:solidFill>
-                <a:latin typeface="メイリオ"/>
-                <a:ea typeface="Meiryo"/>
-                <a:cs typeface="Meiryo"/>
-                <a:sym typeface="Meiryo"/>
-              </a:rPr>
-              <a:t>年</a:t>
-            </a:r>
-            <a:r>
-              <a:rPr lang="en-US" altLang="ja-JP" sz="1600" b="1" dirty="0">
-                <a:solidFill>
-                  <a:srgbClr val="004DE6"/>
-                </a:solidFill>
-                <a:latin typeface="メイリオ"/>
-                <a:ea typeface="Meiryo"/>
-                <a:cs typeface="Meiryo"/>
-                <a:sym typeface="Meiryo"/>
-              </a:rPr>
-              <a:t>10-12</a:t>
-            </a:r>
-            <a:r>
-              <a:rPr lang="ja-JP" altLang="en-US" sz="1600" b="1" dirty="0">
-                <a:solidFill>
-                  <a:srgbClr val="004DE6"/>
-                </a:solidFill>
-                <a:latin typeface="メイリオ"/>
-                <a:ea typeface="Meiryo"/>
-                <a:cs typeface="Meiryo"/>
-                <a:sym typeface="Meiryo"/>
-              </a:rPr>
-              <a:t>月 期間限定キャンペーン</a:t>
-            </a:r>
-            <a:endParaRPr lang="ja-JP" altLang="en-US" sz="1600" b="1" dirty="0">
-              <a:solidFill>
-                <a:srgbClr val="004DE6"/>
-              </a:solidFill>
-              <a:latin typeface="Meiryo"/>
-              <a:ea typeface="Meiryo"/>
-              <a:cs typeface="Meiryo"/>
-              <a:sym typeface="Meiryo"/>
-            </a:endParaRPr>
-          </a:p>
-        </p:txBody>
-      </p:sp>
-      <p:sp>
-        <p:nvSpPr>
-          <p:cNvPr id="47" name="Google Shape;47;p3"/>
-          <p:cNvSpPr txBox="1"/>
-          <p:nvPr/>
-        </p:nvSpPr>
-        <p:spPr>
-          <a:xfrm>
-            <a:off x="182880" y="88175"/>
-            <a:ext cx="7512385" cy="365091"/>
-          </a:xfrm>
-          <a:prstGeom prst="rect">
-            <a:avLst/>
-          </a:prstGeom>
-          <a:noFill/>
-          <a:ln>
-            <a:noFill/>
-          </a:ln>
-        </p:spPr>
-        <p:txBody>
-          <a:bodyPr spcFirstLastPara="1" wrap="square" lIns="91425" tIns="72000" rIns="91425" bIns="45700" anchor="t" anchorCtr="0">
-            <a:spAutoFit/>
-          </a:bodyPr>
-          <a:lstStyle/>
-          <a:p>
-            <a:pPr marL="0" marR="0" lvl="0" indent="0" algn="l" rtl="0">
-              <a:spcBef>
-                <a:spcPts val="0"/>
-              </a:spcBef>
-              <a:spcAft>
-                <a:spcPts val="0"/>
-              </a:spcAft>
-              <a:buClr>
-                <a:schemeClr val="dk1"/>
-              </a:buClr>
-              <a:buSzPts val="1600"/>
-              <a:buFont typeface="Arial"/>
-              <a:buNone/>
-            </a:pPr>
-            <a:r>
-              <a:rPr lang="ja-JP" sz="1600" b="0" u="none">
-                <a:solidFill>
-                  <a:schemeClr val="dk1"/>
-                </a:solidFill>
-                <a:latin typeface="メイリオ"/>
-                <a:ea typeface="Meiryo"/>
-                <a:cs typeface="Meiryo"/>
-                <a:sym typeface="Meiryo"/>
-              </a:rPr>
-              <a:t>    今後のアップデート情報</a:t>
-            </a:r>
-            <a:endParaRPr sz="1600" b="0" u="none">
-              <a:solidFill>
-                <a:schemeClr val="dk1"/>
-              </a:solidFill>
-              <a:latin typeface="Meiryo"/>
-              <a:ea typeface="Meiryo"/>
-              <a:cs typeface="Meiryo"/>
-              <a:sym typeface="Meiryo"/>
-            </a:endParaRPr>
-          </a:p>
-        </p:txBody>
-      </p:sp>
-      <p:sp>
-        <p:nvSpPr>
-          <p:cNvPr id="50" name="Google Shape;50;p3"/>
-          <p:cNvSpPr/>
-          <p:nvPr/>
-        </p:nvSpPr>
-        <p:spPr>
-          <a:xfrm>
-            <a:off x="0" y="1890267"/>
-            <a:ext cx="9906000" cy="733579"/>
-          </a:xfrm>
-          <a:prstGeom prst="rect">
-            <a:avLst/>
-          </a:prstGeom>
-          <a:solidFill>
-            <a:srgbClr val="F2F2F2"/>
-          </a:solidFill>
-          <a:ln>
-            <a:noFill/>
-          </a:ln>
-        </p:spPr>
-        <p:txBody>
-          <a:bodyPr spcFirstLastPara="1" wrap="square" lIns="91425" tIns="45700" rIns="91425" bIns="45700" anchor="ctr" anchorCtr="0">
-            <a:noAutofit/>
-          </a:bodyPr>
-          <a:lstStyle/>
-          <a:p>
-            <a:pPr marL="0" marR="0" lvl="0" indent="0" algn="ctr" rtl="0">
-              <a:spcBef>
-                <a:spcPts val="0"/>
-              </a:spcBef>
-              <a:spcAft>
-                <a:spcPts val="0"/>
-              </a:spcAft>
-              <a:buNone/>
-            </a:pPr>
-            <a:endParaRPr sz="1200">
-              <a:solidFill>
-                <a:schemeClr val="dk1"/>
-              </a:solidFill>
-              <a:latin typeface="Meiryo"/>
-              <a:ea typeface="Meiryo"/>
-              <a:cs typeface="Meiryo"/>
-              <a:sym typeface="Meiryo"/>
-            </a:endParaRPr>
-          </a:p>
-        </p:txBody>
-      </p:sp>
-      <p:sp>
-        <p:nvSpPr>
-          <p:cNvPr id="51" name="Google Shape;51;p3"/>
-          <p:cNvSpPr/>
-          <p:nvPr/>
-        </p:nvSpPr>
-        <p:spPr>
-          <a:xfrm>
-            <a:off x="544108" y="1961282"/>
-            <a:ext cx="8817783" cy="646331"/>
-          </a:xfrm>
-          <a:prstGeom prst="rect">
-            <a:avLst/>
-          </a:prstGeom>
-          <a:noFill/>
-          <a:ln>
-            <a:noFill/>
-          </a:ln>
-        </p:spPr>
-        <p:txBody>
-          <a:bodyPr spcFirstLastPara="1" wrap="square" lIns="91425" tIns="45700" rIns="91425" bIns="45700" anchor="t" anchorCtr="0">
-            <a:spAutoFit/>
-          </a:bodyPr>
-          <a:lstStyle/>
-          <a:p>
-            <a:pPr marL="0" marR="0" lvl="0" indent="0" algn="ctr" rtl="0">
-              <a:spcBef>
-                <a:spcPts val="0"/>
-              </a:spcBef>
-              <a:spcAft>
-                <a:spcPts val="0"/>
-              </a:spcAft>
-              <a:buNone/>
-            </a:pPr>
-            <a:r>
-              <a:rPr lang="ja-JP" sz="1200" b="1">
-                <a:solidFill>
-                  <a:schemeClr val="dk1"/>
-                </a:solidFill>
-                <a:latin typeface="メイリオ"/>
-                <a:ea typeface="Meiryo"/>
-                <a:cs typeface="Meiryo"/>
-                <a:sym typeface="Meiryo"/>
-              </a:rPr>
-              <a:t>申込みから掲載開始まで、審査・枠おさえ・入稿の3段階を経る。</a:t>
-            </a:r>
-            <a:endParaRPr sz="1200" b="1">
-              <a:solidFill>
-                <a:schemeClr val="dk1"/>
-              </a:solidFill>
-              <a:latin typeface="Meiryo"/>
-              <a:ea typeface="Meiryo"/>
-              <a:cs typeface="Meiryo"/>
-              <a:sym typeface="Meiryo"/>
-            </a:endParaRPr>
-          </a:p>
-          <a:p>
-            <a:pPr marL="0" marR="0" lvl="0" indent="0" algn="ctr" rtl="0">
-              <a:spcBef>
-                <a:spcPts val="0"/>
-              </a:spcBef>
-              <a:spcAft>
-                <a:spcPts val="0"/>
-              </a:spcAft>
-              <a:buNone/>
-            </a:pPr>
-            <a:r>
-              <a:rPr lang="ja-JP" sz="1200" b="1">
-                <a:solidFill>
-                  <a:schemeClr val="dk1"/>
-                </a:solidFill>
-                <a:latin typeface="メイリオ"/>
-                <a:ea typeface="Meiryo"/>
-                <a:cs typeface="Meiryo"/>
-                <a:sym typeface="Meiryo"/>
-              </a:rPr>
-              <a:t>配信枠は早い者勝ちのため、各締切の厳守が前提条件になる。</a:t>
-            </a:r>
-            <a:endParaRPr/>
-          </a:p>
-          <a:p>
-            <a:pPr marL="0" marR="0" lvl="0" indent="0" algn="ctr" rtl="0">
-              <a:spcBef>
-                <a:spcPts val="0"/>
-              </a:spcBef>
-              <a:spcAft>
-                <a:spcPts val="0"/>
-              </a:spcAft>
-              <a:buNone/>
-            </a:pPr>
-            <a:r>
-              <a:rPr lang="ja-JP" sz="1200" b="1">
-                <a:solidFill>
-                  <a:schemeClr val="dk1"/>
-                </a:solidFill>
-                <a:latin typeface="メイリオ"/>
-                <a:ea typeface="Meiryo"/>
-                <a:cs typeface="Meiryo"/>
-                <a:sym typeface="Meiryo"/>
-              </a:rPr>
-              <a:t>土日祝日の掲載開始は不可なので、平日での日程調整が必要。</a:t>
-            </a:r>
-            <a:endParaRPr sz="1400" b="1">
-              <a:solidFill>
-                <a:schemeClr val="dk1"/>
-              </a:solidFill>
-              <a:latin typeface="Meiryo"/>
-              <a:ea typeface="Meiryo"/>
-              <a:cs typeface="Meiryo"/>
-              <a:sym typeface="Meiryo"/>
-            </a:endParaRPr>
-          </a:p>
-        </p:txBody>
-      </p:sp>
-      <p:sp>
-        <p:nvSpPr>
-          <p:cNvPr id="52" name="Google Shape;52;p3"/>
-          <p:cNvSpPr/>
-          <p:nvPr/>
-        </p:nvSpPr>
-        <p:spPr>
-          <a:xfrm>
-            <a:off x="351381" y="2714173"/>
-            <a:ext cx="5200000" cy="338554"/>
-          </a:xfrm>
-          <a:prstGeom prst="rect">
-            <a:avLst/>
-          </a:prstGeom>
-          <a:noFill/>
-          <a:ln>
-            <a:noFill/>
-          </a:ln>
-        </p:spPr>
-        <p:txBody>
-          <a:bodyPr spcFirstLastPara="1" wrap="square" lIns="91425" tIns="45700" rIns="91425" bIns="45700" anchor="t" anchorCtr="0">
-            <a:noAutofit/>
-          </a:bodyPr>
-          <a:lstStyle/>
-          <a:p>
-            <a:pPr marL="0" marR="0" lvl="0" indent="0" algn="l" rtl="0">
-              <a:spcBef>
-                <a:spcPts val="0"/>
-              </a:spcBef>
-              <a:spcAft>
-                <a:spcPts val="0"/>
-              </a:spcAft>
-              <a:buNone/>
-            </a:pPr>
-            <a:r>
-              <a:rPr lang="ja-JP" sz="1400" b="1">
-                <a:solidFill>
-                  <a:srgbClr val="15133D"/>
-                </a:solidFill>
-                <a:latin typeface="メイリオ"/>
-                <a:ea typeface="Meiryo"/>
-                <a:cs typeface="Meiryo"/>
-                <a:sym typeface="Meiryo"/>
-              </a:rPr>
-              <a:t>■ 詳細</a:t>
-            </a:r>
-            <a:endParaRPr/>
-          </a:p>
-        </p:txBody>
-      </p:sp>
-      <p:pic>
-        <p:nvPicPr>
-          <p:cNvPr id="62" name="Google Shape;62;p3" descr="LINE公式アカウントのロゴの使用方法とは？種類やダウンロード方法、利用時の注意点を紹介 | Mico（ミコ）"/>
-          <p:cNvPicPr preferRelativeResize="0"/>
-          <p:nvPr/>
-        </p:nvPicPr>
-        <p:blipFill rotWithShape="1">
-          <a:blip r:embed="rId2">
-            <a:alphaModFix/>
-          </a:blip>
-          <a:srcRect/>
-          <a:stretch/>
-        </p:blipFill>
-        <p:spPr>
-          <a:xfrm>
-            <a:off x="351381" y="1234746"/>
-            <a:ext cx="656177" cy="655521"/>
-          </a:xfrm>
-          <a:prstGeom prst="rect">
-            <a:avLst/>
-          </a:prstGeom>
-          <a:noFill/>
-          <a:ln>
-            <a:noFill/>
-          </a:ln>
-        </p:spPr>
-      </p:pic>
-      <p:sp>
-        <p:nvSpPr>
-          <p:cNvPr id="63" name="Rectangle 62"/>
-          <p:cNvSpPr/>
-          <p:nvPr/>
-        </p:nvSpPr>
-        <p:spPr>
-          <a:xfrm>
-            <a:off x="544108" y="3068960"/>
-            <a:ext cx="1730462" cy="365760"/>
-          </a:xfrm>
-          <a:prstGeom prst="rect">
-            <a:avLst/>
-          </a:prstGeom>
-          <a:solidFill>
-            <a:srgbClr val="15133D"/>
-          </a:solidFill>
-          <a:ln>
-            <a:noFill/>
-          </a:ln>
-          <a:effectLst/>
-        </p:spPr>
-        <p:style>
-          <a:lnRef idx="1">
-            <a:schemeClr val="accent1"/>
-          </a:lnRef>
-          <a:fillRef idx="3">
-            <a:schemeClr val="accent1"/>
-          </a:fillRef>
-          <a:effectRef idx="2">
-            <a:schemeClr val="accent1"/>
-          </a:effectRef>
-          <a:fontRef idx="minor">
-            <a:schemeClr val="lt1"/>
-          </a:fontRef>
-        </p:style>
-        <p:txBody>
-          <a:bodyPr wrap="square" rIns="45720" rtlCol="0" anchor="ctr"/>
-          <a:lstStyle/>
-          <a:p>
-            <a:pPr algn="ctr"/>
-            <a:r>
-              <a:rPr sz="1300" b="1">
-                <a:solidFill>
-                  <a:srgbClr val="FFFFFF"/>
-                </a:solidFill>
-                <a:latin typeface="メイリオ"/>
-              </a:rPr>
-              <a:t>30営業日前</a:t>
-            </a:r>
-          </a:p>
-        </p:txBody>
-      </p:sp>
-      <p:sp>
-        <p:nvSpPr>
-          <p:cNvPr id="64" name="Rectangle 63"/>
-          <p:cNvSpPr/>
-          <p:nvPr/>
-        </p:nvSpPr>
-        <p:spPr>
-          <a:xfrm>
-            <a:off x="544108" y="3434720"/>
-            <a:ext cx="1730462" cy="1005840"/>
-          </a:xfrm>
-          <a:prstGeom prst="rect">
-            <a:avLst/>
-          </a:prstGeom>
-          <a:solidFill>
-            <a:srgbClr val="EAF0FA"/>
-          </a:solidFill>
-          <a:ln w="12700">
-            <a:solidFill>
-              <a:srgbClr val="3467B2"/>
-            </a:solidFill>
-          </a:ln>
-          <a:effectLst/>
-        </p:spPr>
-        <p:style>
-          <a:lnRef idx="1">
-            <a:schemeClr val="accent1"/>
-          </a:lnRef>
-          <a:fillRef idx="3">
-            <a:schemeClr val="accent1"/>
-          </a:fillRef>
-          <a:effectRef idx="2">
-            <a:schemeClr val="accent1"/>
-          </a:effectRef>
-          <a:fontRef idx="minor">
-            <a:schemeClr val="lt1"/>
-          </a:fontRef>
-        </p:style>
-        <p:txBody>
-          <a:bodyPr wrap="square" lIns="182880" tIns="54864" rIns="137160" bIns="54864" rtlCol="0" anchor="ctr"/>
-          <a:lstStyle/>
-          <a:p>
-            <a:pPr algn="ctr">
-              <a:lnSpc>
-                <a:spcPct val="110000"/>
-              </a:lnSpc>
-            </a:pPr>
-            <a:r>
-              <a:rPr sz="1200" dirty="0" err="1">
-                <a:solidFill>
-                  <a:srgbClr val="333333"/>
-                </a:solidFill>
-                <a:latin typeface="メイリオ"/>
-              </a:rPr>
-              <a:t>企業・商材審査</a:t>
-            </a:r>
-            <a:endParaRPr lang="en-US" sz="1200" dirty="0">
-              <a:solidFill>
-                <a:srgbClr val="333333"/>
-              </a:solidFill>
-              <a:latin typeface="メイリオ"/>
-            </a:endParaRPr>
-          </a:p>
-          <a:p>
-            <a:pPr algn="ctr">
-              <a:lnSpc>
-                <a:spcPct val="110000"/>
-              </a:lnSpc>
-            </a:pPr>
-            <a:r>
-              <a:rPr sz="1200" dirty="0" err="1">
-                <a:solidFill>
-                  <a:srgbClr val="333333"/>
-                </a:solidFill>
-                <a:latin typeface="メイリオ"/>
-              </a:rPr>
-              <a:t>企画審査</a:t>
-            </a:r>
-            <a:endParaRPr sz="1200" dirty="0">
-              <a:solidFill>
-                <a:srgbClr val="333333"/>
-              </a:solidFill>
-              <a:latin typeface="メイリオ"/>
-            </a:endParaRPr>
-          </a:p>
-        </p:txBody>
-      </p:sp>
-      <p:sp>
-        <p:nvSpPr>
-          <p:cNvPr id="65" name="TextBox 64"/>
-          <p:cNvSpPr txBox="1"/>
-          <p:nvPr/>
-        </p:nvSpPr>
-        <p:spPr>
-          <a:xfrm>
-            <a:off x="2477677" y="3693842"/>
-            <a:ext cx="264770" cy="338554"/>
-          </a:xfrm>
-          <a:prstGeom prst="rect">
-            <a:avLst/>
-          </a:prstGeom>
-          <a:noFill/>
-        </p:spPr>
-        <p:txBody>
-          <a:bodyPr wrap="square" anchor="ctr">
-            <a:spAutoFit/>
-          </a:bodyPr>
-          <a:lstStyle/>
-          <a:p>
-            <a:pPr algn="ctr"/>
-            <a:r>
-              <a:rPr sz="1600" b="1">
-                <a:solidFill>
-                  <a:srgbClr val="3467B2"/>
-                </a:solidFill>
-                <a:latin typeface="メイリオ"/>
-              </a:rPr>
-              <a:t>▶</a:t>
-            </a:r>
-          </a:p>
-        </p:txBody>
-      </p:sp>
-      <p:sp>
-        <p:nvSpPr>
-          <p:cNvPr id="66" name="Rectangle 65"/>
-          <p:cNvSpPr/>
-          <p:nvPr/>
-        </p:nvSpPr>
-        <p:spPr>
-          <a:xfrm>
-            <a:off x="2955838" y="3068960"/>
-            <a:ext cx="1730462" cy="365760"/>
-          </a:xfrm>
-          <a:prstGeom prst="rect">
-            <a:avLst/>
-          </a:prstGeom>
-          <a:solidFill>
-            <a:srgbClr val="15133D"/>
-          </a:solidFill>
-          <a:ln>
-            <a:noFill/>
-          </a:ln>
-          <a:effectLst/>
-        </p:spPr>
-        <p:style>
-          <a:lnRef idx="1">
-            <a:schemeClr val="accent1"/>
-          </a:lnRef>
-          <a:fillRef idx="3">
-            <a:schemeClr val="accent1"/>
-          </a:fillRef>
-          <a:effectRef idx="2">
-            <a:schemeClr val="accent1"/>
-          </a:effectRef>
-          <a:fontRef idx="minor">
-            <a:schemeClr val="lt1"/>
-          </a:fontRef>
-        </p:style>
-        <p:txBody>
-          <a:bodyPr wrap="square" rIns="45720" rtlCol="0" anchor="ctr"/>
-          <a:lstStyle/>
-          <a:p>
-            <a:pPr algn="ctr"/>
-            <a:r>
-              <a:rPr sz="1300" b="1">
-                <a:solidFill>
-                  <a:srgbClr val="FFFFFF"/>
-                </a:solidFill>
-                <a:latin typeface="メイリオ"/>
-              </a:rPr>
-              <a:t>25営業日前 17時</a:t>
-            </a:r>
-          </a:p>
-        </p:txBody>
-      </p:sp>
-      <p:sp>
-        <p:nvSpPr>
-          <p:cNvPr id="67" name="Rectangle 66"/>
-          <p:cNvSpPr/>
-          <p:nvPr/>
-        </p:nvSpPr>
-        <p:spPr>
-          <a:xfrm>
-            <a:off x="2955838" y="3434720"/>
-            <a:ext cx="1730462" cy="1005840"/>
-          </a:xfrm>
-          <a:prstGeom prst="rect">
-            <a:avLst/>
-          </a:prstGeom>
-          <a:solidFill>
-            <a:srgbClr val="EAF0FA"/>
-          </a:solidFill>
-          <a:ln w="12700">
-            <a:solidFill>
-              <a:srgbClr val="3467B2"/>
-            </a:solidFill>
-          </a:ln>
-          <a:effectLst/>
-        </p:spPr>
-        <p:style>
-          <a:lnRef idx="1">
-            <a:schemeClr val="accent1"/>
-          </a:lnRef>
-          <a:fillRef idx="3">
-            <a:schemeClr val="accent1"/>
-          </a:fillRef>
-          <a:effectRef idx="2">
-            <a:schemeClr val="accent1"/>
-          </a:effectRef>
-          <a:fontRef idx="minor">
-            <a:schemeClr val="lt1"/>
-          </a:fontRef>
-        </p:style>
-        <p:txBody>
-          <a:bodyPr wrap="square" lIns="182880" tIns="54864" rIns="137160" bIns="54864" rtlCol="0" anchor="ctr"/>
-          <a:lstStyle/>
-          <a:p>
-            <a:pPr algn="ctr">
-              <a:lnSpc>
-                <a:spcPct val="110000"/>
-              </a:lnSpc>
-            </a:pPr>
-            <a:r>
-              <a:rPr sz="1200" dirty="0" err="1">
-                <a:solidFill>
-                  <a:srgbClr val="333333"/>
-                </a:solidFill>
-                <a:latin typeface="メイリオ"/>
-              </a:rPr>
-              <a:t>配信枠おさえ</a:t>
-            </a:r>
-            <a:endParaRPr lang="en-US" sz="1200" dirty="0">
-              <a:solidFill>
-                <a:srgbClr val="333333"/>
-              </a:solidFill>
-              <a:latin typeface="メイリオ"/>
-            </a:endParaRPr>
-          </a:p>
-          <a:p>
-            <a:pPr algn="ctr">
-              <a:lnSpc>
-                <a:spcPct val="110000"/>
-              </a:lnSpc>
-            </a:pPr>
-            <a:r>
-              <a:rPr sz="1200" dirty="0" err="1">
-                <a:solidFill>
-                  <a:srgbClr val="333333"/>
-                </a:solidFill>
-                <a:latin typeface="メイリオ"/>
-              </a:rPr>
-              <a:t>申込み</a:t>
-            </a:r>
-            <a:endParaRPr sz="1200" dirty="0">
-              <a:solidFill>
-                <a:srgbClr val="333333"/>
-              </a:solidFill>
-              <a:latin typeface="メイリオ"/>
-            </a:endParaRPr>
-          </a:p>
-        </p:txBody>
-      </p:sp>
-      <p:sp>
-        <p:nvSpPr>
-          <p:cNvPr id="68" name="TextBox 67"/>
-          <p:cNvSpPr txBox="1"/>
-          <p:nvPr/>
-        </p:nvSpPr>
-        <p:spPr>
-          <a:xfrm>
-            <a:off x="4899691" y="3699414"/>
-            <a:ext cx="264770" cy="338554"/>
-          </a:xfrm>
-          <a:prstGeom prst="rect">
-            <a:avLst/>
-          </a:prstGeom>
-          <a:noFill/>
-        </p:spPr>
-        <p:txBody>
-          <a:bodyPr wrap="square" anchor="ctr">
-            <a:spAutoFit/>
-          </a:bodyPr>
-          <a:lstStyle/>
-          <a:p>
-            <a:pPr algn="ctr"/>
-            <a:r>
-              <a:rPr sz="1600" b="1" dirty="0">
-                <a:solidFill>
-                  <a:srgbClr val="3467B2"/>
-                </a:solidFill>
-                <a:latin typeface="メイリオ"/>
-              </a:rPr>
-              <a:t>▶</a:t>
-            </a:r>
-          </a:p>
-        </p:txBody>
-      </p:sp>
-      <p:sp>
-        <p:nvSpPr>
-          <p:cNvPr id="69" name="Rectangle 68"/>
-          <p:cNvSpPr/>
-          <p:nvPr/>
-        </p:nvSpPr>
-        <p:spPr>
-          <a:xfrm>
-            <a:off x="5367568" y="3068960"/>
-            <a:ext cx="1730462" cy="365760"/>
-          </a:xfrm>
-          <a:prstGeom prst="rect">
-            <a:avLst/>
-          </a:prstGeom>
-          <a:solidFill>
-            <a:srgbClr val="15133D"/>
-          </a:solidFill>
-          <a:ln>
-            <a:noFill/>
-          </a:ln>
-          <a:effectLst/>
-        </p:spPr>
-        <p:style>
-          <a:lnRef idx="1">
-            <a:schemeClr val="accent1"/>
-          </a:lnRef>
-          <a:fillRef idx="3">
-            <a:schemeClr val="accent1"/>
-          </a:fillRef>
-          <a:effectRef idx="2">
-            <a:schemeClr val="accent1"/>
-          </a:effectRef>
-          <a:fontRef idx="minor">
-            <a:schemeClr val="lt1"/>
-          </a:fontRef>
-        </p:style>
-        <p:txBody>
-          <a:bodyPr wrap="square" rIns="45720" rtlCol="0" anchor="ctr"/>
-          <a:lstStyle/>
-          <a:p>
-            <a:pPr algn="ctr"/>
-            <a:r>
-              <a:rPr sz="1300" b="1">
-                <a:solidFill>
-                  <a:srgbClr val="FFFFFF"/>
-                </a:solidFill>
-                <a:latin typeface="メイリオ"/>
-              </a:rPr>
-              <a:t>20営業日前 17時</a:t>
-            </a:r>
-          </a:p>
-        </p:txBody>
-      </p:sp>
-      <p:sp>
-        <p:nvSpPr>
-          <p:cNvPr id="70" name="Rectangle 69"/>
-          <p:cNvSpPr/>
-          <p:nvPr/>
-        </p:nvSpPr>
-        <p:spPr>
-          <a:xfrm>
-            <a:off x="5367568" y="3434720"/>
-            <a:ext cx="1730462" cy="1005840"/>
-          </a:xfrm>
-          <a:prstGeom prst="rect">
-            <a:avLst/>
-          </a:prstGeom>
-          <a:solidFill>
-            <a:srgbClr val="EAF0FA"/>
-          </a:solidFill>
-          <a:ln w="12700">
-            <a:solidFill>
-              <a:srgbClr val="3467B2"/>
-            </a:solidFill>
-          </a:ln>
-          <a:effectLst/>
-        </p:spPr>
-        <p:style>
-          <a:lnRef idx="1">
-            <a:schemeClr val="accent1"/>
-          </a:lnRef>
-          <a:fillRef idx="3">
-            <a:schemeClr val="accent1"/>
-          </a:fillRef>
-          <a:effectRef idx="2">
-            <a:schemeClr val="accent1"/>
-          </a:effectRef>
-          <a:fontRef idx="minor">
-            <a:schemeClr val="lt1"/>
-          </a:fontRef>
-        </p:style>
-        <p:txBody>
-          <a:bodyPr wrap="square" lIns="182880" tIns="54864" rIns="137160" bIns="54864" rtlCol="0" anchor="ctr"/>
-          <a:lstStyle/>
-          <a:p>
-            <a:pPr algn="ctr">
-              <a:lnSpc>
-                <a:spcPct val="110000"/>
-              </a:lnSpc>
-            </a:pPr>
-            <a:r>
-              <a:rPr sz="1200">
-                <a:solidFill>
-                  <a:srgbClr val="333333"/>
-                </a:solidFill>
-                <a:latin typeface="メイリオ"/>
-              </a:rPr>
-              <a:t>入稿物の提出</a:t>
-            </a:r>
-          </a:p>
-        </p:txBody>
-      </p:sp>
-      <p:sp>
-        <p:nvSpPr>
-          <p:cNvPr id="71" name="TextBox 70"/>
-          <p:cNvSpPr txBox="1"/>
-          <p:nvPr/>
-        </p:nvSpPr>
-        <p:spPr>
-          <a:xfrm>
-            <a:off x="7194082" y="3693842"/>
-            <a:ext cx="264770" cy="338554"/>
-          </a:xfrm>
-          <a:prstGeom prst="rect">
-            <a:avLst/>
-          </a:prstGeom>
-          <a:noFill/>
-        </p:spPr>
-        <p:txBody>
-          <a:bodyPr wrap="square" anchor="ctr">
-            <a:spAutoFit/>
-          </a:bodyPr>
-          <a:lstStyle/>
-          <a:p>
-            <a:pPr algn="ctr"/>
-            <a:r>
-              <a:rPr sz="1600" b="1" dirty="0">
-                <a:solidFill>
-                  <a:srgbClr val="3467B2"/>
-                </a:solidFill>
-                <a:latin typeface="メイリオ"/>
-              </a:rPr>
-              <a:t>▶</a:t>
-            </a:r>
-          </a:p>
-        </p:txBody>
-      </p:sp>
-      <p:sp>
-        <p:nvSpPr>
-          <p:cNvPr id="72" name="Rectangle 71"/>
-          <p:cNvSpPr/>
-          <p:nvPr/>
-        </p:nvSpPr>
-        <p:spPr>
-          <a:xfrm>
-            <a:off x="7554904" y="3068960"/>
-            <a:ext cx="1730462" cy="365760"/>
-          </a:xfrm>
-          <a:prstGeom prst="rect">
-            <a:avLst/>
-          </a:prstGeom>
-          <a:solidFill>
-            <a:srgbClr val="15133D"/>
-          </a:solidFill>
-          <a:ln>
-            <a:noFill/>
-          </a:ln>
-          <a:effectLst/>
-        </p:spPr>
-        <p:style>
-          <a:lnRef idx="1">
-            <a:schemeClr val="accent1"/>
-          </a:lnRef>
-          <a:fillRef idx="3">
-            <a:schemeClr val="accent1"/>
-          </a:fillRef>
-          <a:effectRef idx="2">
-            <a:schemeClr val="accent1"/>
-          </a:effectRef>
-          <a:fontRef idx="minor">
-            <a:schemeClr val="lt1"/>
-          </a:fontRef>
-        </p:style>
-        <p:txBody>
-          <a:bodyPr wrap="square" rIns="45720" rtlCol="0" anchor="ctr"/>
-          <a:lstStyle/>
-          <a:p>
-            <a:pPr algn="ctr"/>
-            <a:r>
-              <a:rPr sz="1300" b="1">
-                <a:solidFill>
-                  <a:srgbClr val="FFFFFF"/>
-                </a:solidFill>
-                <a:latin typeface="メイリオ"/>
-              </a:rPr>
-              <a:t>開始日</a:t>
-            </a:r>
-          </a:p>
-        </p:txBody>
-      </p:sp>
-      <p:sp>
-        <p:nvSpPr>
-          <p:cNvPr id="73" name="Rectangle 72"/>
-          <p:cNvSpPr/>
-          <p:nvPr/>
-        </p:nvSpPr>
-        <p:spPr>
-          <a:xfrm>
-            <a:off x="7554904" y="3434720"/>
-            <a:ext cx="1730462" cy="1005840"/>
-          </a:xfrm>
-          <a:prstGeom prst="rect">
-            <a:avLst/>
-          </a:prstGeom>
-          <a:solidFill>
-            <a:srgbClr val="EAF0FA"/>
-          </a:solidFill>
-          <a:ln w="12700">
-            <a:solidFill>
-              <a:srgbClr val="3467B2"/>
-            </a:solidFill>
-          </a:ln>
-          <a:effectLst/>
-        </p:spPr>
-        <p:style>
-          <a:lnRef idx="1">
-            <a:schemeClr val="accent1"/>
-          </a:lnRef>
-          <a:fillRef idx="3">
-            <a:schemeClr val="accent1"/>
-          </a:fillRef>
-          <a:effectRef idx="2">
-            <a:schemeClr val="accent1"/>
-          </a:effectRef>
-          <a:fontRef idx="minor">
-            <a:schemeClr val="lt1"/>
-          </a:fontRef>
-        </p:style>
-        <p:txBody>
-          <a:bodyPr wrap="square" lIns="182880" tIns="54864" rIns="137160" bIns="54864" rtlCol="0" anchor="ctr"/>
-          <a:lstStyle/>
-          <a:p>
-            <a:pPr algn="ctr">
-              <a:lnSpc>
-                <a:spcPct val="110000"/>
-              </a:lnSpc>
-            </a:pPr>
-            <a:r>
-              <a:rPr sz="1200" dirty="0" err="1">
-                <a:solidFill>
-                  <a:srgbClr val="333333"/>
-                </a:solidFill>
-                <a:latin typeface="メイリオ"/>
-              </a:rPr>
-              <a:t>掲載開始</a:t>
-            </a:r>
-            <a:endParaRPr lang="en-US" sz="1200" dirty="0">
-              <a:solidFill>
-                <a:srgbClr val="333333"/>
-              </a:solidFill>
-              <a:latin typeface="メイリオ"/>
-            </a:endParaRPr>
-          </a:p>
-          <a:p>
-            <a:pPr algn="ctr">
-              <a:lnSpc>
-                <a:spcPct val="110000"/>
-              </a:lnSpc>
-            </a:pPr>
-            <a:r>
-              <a:rPr sz="1200" dirty="0">
-                <a:solidFill>
-                  <a:srgbClr val="333333"/>
-                </a:solidFill>
-                <a:latin typeface="メイリオ"/>
-              </a:rPr>
-              <a:t>（</a:t>
-            </a:r>
-            <a:r>
-              <a:rPr sz="1200" dirty="0" err="1">
-                <a:solidFill>
-                  <a:srgbClr val="333333"/>
-                </a:solidFill>
-                <a:latin typeface="メイリオ"/>
-              </a:rPr>
-              <a:t>土日祝日不可</a:t>
-            </a:r>
-            <a:r>
-              <a:rPr sz="1200" dirty="0">
-                <a:solidFill>
-                  <a:srgbClr val="333333"/>
-                </a:solidFill>
-                <a:latin typeface="メイリオ"/>
-              </a:rPr>
-              <a:t>）</a:t>
-            </a:r>
-          </a:p>
-        </p:txBody>
-      </p:sp>
-      <p:sp>
-        <p:nvSpPr>
-          <p:cNvPr id="74" name="Rounded Rectangle 73"/>
-          <p:cNvSpPr/>
-          <p:nvPr/>
-        </p:nvSpPr>
-        <p:spPr>
-          <a:xfrm>
-            <a:off x="544108" y="4669160"/>
-            <a:ext cx="8737052" cy="1005840"/>
-          </a:xfrm>
-          <a:prstGeom prst="roundRect">
-            <a:avLst>
-              <a:gd name="adj" fmla="val 6000"/>
-            </a:avLst>
-          </a:prstGeom>
-          <a:solidFill>
-            <a:srgbClr val="EAF0FA"/>
-          </a:solidFill>
-          <a:ln w="12700">
-            <a:solidFill>
-              <a:srgbClr val="3467B2"/>
-            </a:solidFill>
-          </a:ln>
-          <a:effectLst/>
-        </p:spPr>
-        <p:style>
-          <a:lnRef idx="1">
-            <a:schemeClr val="accent1"/>
-          </a:lnRef>
-          <a:fillRef idx="3">
-            <a:schemeClr val="accent1"/>
-          </a:fillRef>
-          <a:effectRef idx="2">
-            <a:schemeClr val="accent1"/>
-          </a:effectRef>
-          <a:fontRef idx="minor">
-            <a:schemeClr val="lt1"/>
-          </a:fontRef>
-        </p:style>
-        <p:txBody>
-          <a:bodyPr wrap="square" lIns="228600" rIns="182880" rtlCol="0" anchor="ctr"/>
-          <a:lstStyle/>
-          <a:p>
-            <a:pPr algn="l"/>
-            <a:r>
-              <a:rPr sz="2000" b="1" dirty="0" err="1">
-                <a:solidFill>
-                  <a:srgbClr val="15133D"/>
-                </a:solidFill>
-                <a:latin typeface="メイリオ"/>
-              </a:rPr>
-              <a:t>早めの申込みが必須</a:t>
-            </a:r>
-            <a:endParaRPr sz="2000" b="1" dirty="0">
-              <a:solidFill>
-                <a:srgbClr val="15133D"/>
-              </a:solidFill>
-              <a:latin typeface="メイリオ"/>
-            </a:endParaRPr>
-          </a:p>
-          <a:p>
-            <a:pPr algn="l">
-              <a:lnSpc>
-                <a:spcPct val="115000"/>
-              </a:lnSpc>
-              <a:spcBef>
-                <a:spcPts val="600"/>
-              </a:spcBef>
-            </a:pPr>
-            <a:r>
-              <a:rPr dirty="0" err="1">
-                <a:solidFill>
-                  <a:srgbClr val="333333"/>
-                </a:solidFill>
-                <a:latin typeface="メイリオ"/>
-              </a:rPr>
-              <a:t>期間・条件限定のキャンペーンのため、早めの提案・申込み誘導がカギ</a:t>
-            </a:r>
-            <a:r>
-              <a:rPr dirty="0">
-                <a:solidFill>
-                  <a:srgbClr val="333333"/>
-                </a:solidFill>
-                <a:latin typeface="メイリオ"/>
-              </a:rPr>
-              <a:t>。</a:t>
-            </a:r>
-            <a:endParaRPr lang="en-US" dirty="0">
-              <a:solidFill>
-                <a:srgbClr val="333333"/>
-              </a:solidFill>
-              <a:latin typeface="メイリオ"/>
-            </a:endParaRPr>
-          </a:p>
-          <a:p>
-            <a:pPr algn="l">
-              <a:lnSpc>
-                <a:spcPct val="115000"/>
-              </a:lnSpc>
-              <a:spcBef>
-                <a:spcPts val="600"/>
-              </a:spcBef>
-            </a:pPr>
-            <a:r>
-              <a:rPr dirty="0" err="1">
-                <a:solidFill>
-                  <a:srgbClr val="333333"/>
-                </a:solidFill>
-                <a:latin typeface="メイリオ"/>
-              </a:rPr>
-              <a:t>配信枠は先着で埋まるため、審査期間も見込んだ逆算スケジュールを組む</a:t>
-            </a:r>
-            <a:r>
-              <a:rPr dirty="0">
-                <a:solidFill>
-                  <a:srgbClr val="333333"/>
-                </a:solidFill>
-                <a:latin typeface="メイリオ"/>
-              </a:rPr>
-              <a:t>。</a:t>
-            </a:r>
-          </a:p>
-        </p:txBody>
-      </p:sp>
-      <p:graphicFrame>
-        <p:nvGraphicFramePr>
-          <p:cNvPr id="9" name="図表 8">
-            <a:extLst>
-              <a:ext uri="{FF2B5EF4-FFF2-40B4-BE49-F238E27FC236}">
-                <a16:creationId xmlns:a16="http://schemas.microsoft.com/office/drawing/2014/main" id="{FB91556C-B694-7FDD-BAA5-4D6F5B361174}"/>
-              </a:ext>
-            </a:extLst>
-          </p:cNvPr>
-          <p:cNvGraphicFramePr/>
-          <p:nvPr/>
-        </p:nvGraphicFramePr>
-        <p:xfrm>
-          <a:off x="8529759" y="688315"/>
-          <a:ext cx="1376241" cy="1131931"/>
-        </p:xfrm>
-        <a:graphic>
-          <a:graphicData uri="http://schemas.openxmlformats.org/drawingml/2006/diagram">
-            <dgm:relIds xmlns:dgm="http://schemas.openxmlformats.org/drawingml/2006/diagram" xmlns:r="http://schemas.openxmlformats.org/officeDocument/2006/relationships" r:dm="rId3" r:lo="rId4" r:qs="rId5" r:cs="rId6"/>
-          </a:graphicData>
-        </a:graphic>
-      </p:graphicFrame>
-      <p:sp>
-        <p:nvSpPr>
-          <p:cNvPr id="13" name="正方形/長方形 12">
-            <a:extLst>
-              <a:ext uri="{FF2B5EF4-FFF2-40B4-BE49-F238E27FC236}">
-                <a16:creationId xmlns:a16="http://schemas.microsoft.com/office/drawing/2014/main" id="{AC20BBD9-4A18-AAE8-35A2-AE112AFF738F}"/>
-              </a:ext>
-            </a:extLst>
-          </p:cNvPr>
-          <p:cNvSpPr/>
-          <p:nvPr/>
-        </p:nvSpPr>
-        <p:spPr>
-          <a:xfrm>
-            <a:off x="7560840" y="730955"/>
-            <a:ext cx="829618" cy="435690"/>
-          </a:xfrm>
-          <a:prstGeom prst="rect">
-            <a:avLst/>
-          </a:prstGeom>
-          <a:solidFill>
-            <a:schemeClr val="bg1"/>
-          </a:solidFill>
-          <a:ln w="9525">
-            <a:solidFill>
-              <a:srgbClr val="4F81BD"/>
-            </a:solidFill>
-            <a:prstDash val="sysDash"/>
-          </a:ln>
-          <a:effectLst/>
-        </p:spPr>
-        <p:style>
-          <a:lnRef idx="1">
-            <a:schemeClr val="accent1"/>
-          </a:lnRef>
-          <a:fillRef idx="3">
-            <a:schemeClr val="accent1"/>
-          </a:fillRef>
-          <a:effectRef idx="2">
-            <a:schemeClr val="accent1"/>
-          </a:effectRef>
-          <a:fontRef idx="minor">
-            <a:schemeClr val="lt1"/>
-          </a:fontRef>
-        </p:style>
-        <p:txBody>
-          <a:bodyPr rtlCol="0" anchor="ctr"/>
-          <a:lstStyle/>
-          <a:p>
-            <a:pPr algn="ctr"/>
-            <a:r>
-              <a:rPr lang="ja-JP" altLang="en-US" sz="1200" dirty="0">
-                <a:solidFill>
-                  <a:schemeClr val="tx1"/>
-                </a:solidFill>
-                <a:latin typeface="メイリオ" panose="020B0604030504040204" pitchFamily="50" charset="-128"/>
-                <a:ea typeface="メイリオ" panose="020B0604030504040204" pitchFamily="50" charset="-128"/>
-              </a:rPr>
-              <a:t>その他</a:t>
-            </a:r>
-            <a:endParaRPr kumimoji="1" lang="ja-JP" altLang="en-US" sz="1200" dirty="0">
-              <a:solidFill>
-                <a:schemeClr val="tx1"/>
-              </a:solidFill>
-              <a:latin typeface="メイリオ" panose="020B0604030504040204" pitchFamily="50" charset="-128"/>
-              <a:ea typeface="メイリオ" panose="020B0604030504040204" pitchFamily="50" charset="-128"/>
-            </a:endParaRPr>
-          </a:p>
-        </p:txBody>
-      </p:sp>
-      <p:sp>
-        <p:nvSpPr>
-          <p:cNvPr id="15" name="正方形/長方形 14">
-            <a:extLst>
-              <a:ext uri="{FF2B5EF4-FFF2-40B4-BE49-F238E27FC236}">
-                <a16:creationId xmlns:a16="http://schemas.microsoft.com/office/drawing/2014/main" id="{40F3355E-080B-0A5A-34B5-42D33EF674CE}"/>
-              </a:ext>
-            </a:extLst>
-          </p:cNvPr>
-          <p:cNvSpPr/>
-          <p:nvPr/>
-        </p:nvSpPr>
-        <p:spPr>
-          <a:xfrm>
-            <a:off x="5797260" y="730955"/>
-            <a:ext cx="829618" cy="435690"/>
-          </a:xfrm>
-          <a:prstGeom prst="rect">
-            <a:avLst/>
-          </a:prstGeom>
-          <a:solidFill>
-            <a:schemeClr val="bg1"/>
-          </a:solidFill>
-          <a:ln w="9525" cap="flat" cmpd="sng" algn="ctr">
-            <a:solidFill>
-              <a:srgbClr val="4F81BD"/>
-            </a:solidFill>
-            <a:prstDash val="sysDash"/>
-          </a:ln>
-          <a:effectLst/>
-        </p:spPr>
-        <p:txBody>
-          <a:bodyPr rtlCol="0" anchor="ctr"/>
-          <a:lstStyle/>
-          <a:p>
-            <a:pPr algn="ctr">
-              <a:buClrTx/>
-              <a:buFontTx/>
-              <a:buNone/>
-            </a:pPr>
-            <a:r>
-              <a:rPr kumimoji="1" lang="ja-JP" altLang="en-US" sz="1000" kern="1200" dirty="0">
-                <a:latin typeface="メイリオ" panose="020B0604030504040204" pitchFamily="50" charset="-128"/>
-                <a:ea typeface="メイリオ" panose="020B0604030504040204" pitchFamily="50" charset="-128"/>
-              </a:rPr>
-              <a:t>開発</a:t>
-            </a:r>
-            <a:endParaRPr kumimoji="1" lang="en-US" altLang="ja-JP" sz="1000" kern="1200" dirty="0">
-              <a:latin typeface="メイリオ" panose="020B0604030504040204" pitchFamily="50" charset="-128"/>
-              <a:ea typeface="メイリオ" panose="020B0604030504040204" pitchFamily="50" charset="-128"/>
-            </a:endParaRPr>
-          </a:p>
-          <a:p>
-            <a:pPr algn="ctr">
-              <a:buClrTx/>
-              <a:buFontTx/>
-              <a:buNone/>
-            </a:pPr>
-            <a:r>
-              <a:rPr lang="en-US" altLang="ja-JP" sz="1000" dirty="0">
-                <a:latin typeface="メイリオ" panose="020B0604030504040204" pitchFamily="50" charset="-128"/>
-                <a:ea typeface="メイリオ" panose="020B0604030504040204" pitchFamily="50" charset="-128"/>
-              </a:rPr>
-              <a:t>LINE</a:t>
-            </a:r>
-            <a:r>
-              <a:rPr lang="ja-JP" altLang="en-US" sz="1000" dirty="0">
-                <a:latin typeface="メイリオ" panose="020B0604030504040204" pitchFamily="50" charset="-128"/>
-                <a:ea typeface="メイリオ" panose="020B0604030504040204" pitchFamily="50" charset="-128"/>
-              </a:rPr>
-              <a:t> </a:t>
-            </a:r>
-            <a:r>
-              <a:rPr lang="en-US" altLang="ja-JP" sz="1000" dirty="0">
-                <a:latin typeface="メイリオ" panose="020B0604030504040204" pitchFamily="50" charset="-128"/>
-                <a:ea typeface="メイリオ" panose="020B0604030504040204" pitchFamily="50" charset="-128"/>
-              </a:rPr>
-              <a:t>API</a:t>
-            </a:r>
-            <a:endParaRPr kumimoji="1" lang="ja-JP" altLang="en-US" sz="1000" kern="1200" dirty="0">
-              <a:latin typeface="メイリオ" panose="020B0604030504040204" pitchFamily="50" charset="-128"/>
-              <a:ea typeface="メイリオ" panose="020B0604030504040204" pitchFamily="50" charset="-128"/>
-            </a:endParaRPr>
-          </a:p>
-        </p:txBody>
-      </p:sp>
-      <p:sp>
-        <p:nvSpPr>
-          <p:cNvPr id="17" name="正方形/長方形 16">
-            <a:extLst>
-              <a:ext uri="{FF2B5EF4-FFF2-40B4-BE49-F238E27FC236}">
-                <a16:creationId xmlns:a16="http://schemas.microsoft.com/office/drawing/2014/main" id="{CD3D93BD-8423-CC15-ADA5-9715DA4FA257}"/>
-              </a:ext>
-            </a:extLst>
-          </p:cNvPr>
-          <p:cNvSpPr/>
-          <p:nvPr/>
-        </p:nvSpPr>
-        <p:spPr>
-          <a:xfrm>
-            <a:off x="4915470" y="730955"/>
-            <a:ext cx="829618" cy="435690"/>
-          </a:xfrm>
-          <a:prstGeom prst="rect">
-            <a:avLst/>
-          </a:prstGeom>
-          <a:solidFill>
-            <a:schemeClr val="bg1"/>
-          </a:solidFill>
-          <a:ln w="9525">
-            <a:solidFill>
-              <a:schemeClr val="accent1"/>
-            </a:solidFill>
-            <a:prstDash val="solid"/>
-          </a:ln>
-          <a:effectLst/>
-        </p:spPr>
-        <p:style>
-          <a:lnRef idx="1">
-            <a:schemeClr val="accent1"/>
-          </a:lnRef>
-          <a:fillRef idx="3">
-            <a:schemeClr val="accent1"/>
-          </a:fillRef>
-          <a:effectRef idx="2">
-            <a:schemeClr val="accent1"/>
-          </a:effectRef>
-          <a:fontRef idx="minor">
-            <a:schemeClr val="lt1"/>
-          </a:fontRef>
-        </p:style>
-        <p:txBody>
-          <a:bodyPr rtlCol="0" anchor="ctr"/>
-          <a:lstStyle/>
-          <a:p>
-            <a:pPr algn="ctr"/>
-            <a:r>
-              <a:rPr lang="en-US" altLang="ja-JP" sz="1000" dirty="0">
-                <a:solidFill>
-                  <a:schemeClr val="tx1"/>
-                </a:solidFill>
-                <a:latin typeface="メイリオ" panose="020B0604030504040204" pitchFamily="50" charset="-128"/>
-                <a:ea typeface="メイリオ" panose="020B0604030504040204" pitchFamily="50" charset="-128"/>
-              </a:rPr>
-              <a:t>LINE</a:t>
-            </a:r>
-            <a:r>
-              <a:rPr lang="ja-JP" altLang="en-US" sz="1000" dirty="0">
-                <a:solidFill>
-                  <a:schemeClr val="tx1"/>
-                </a:solidFill>
-                <a:latin typeface="メイリオ" panose="020B0604030504040204" pitchFamily="50" charset="-128"/>
-                <a:ea typeface="メイリオ" panose="020B0604030504040204" pitchFamily="50" charset="-128"/>
-              </a:rPr>
-              <a:t>公式アカウント</a:t>
-            </a:r>
-            <a:endParaRPr kumimoji="1" lang="ja-JP" altLang="en-US" sz="1000" dirty="0">
-              <a:solidFill>
-                <a:schemeClr val="tx1"/>
-              </a:solidFill>
-              <a:latin typeface="メイリオ" panose="020B0604030504040204" pitchFamily="50" charset="-128"/>
-              <a:ea typeface="メイリオ" panose="020B0604030504040204" pitchFamily="50" charset="-128"/>
-            </a:endParaRPr>
-          </a:p>
-        </p:txBody>
-      </p:sp>
-      <p:sp>
-        <p:nvSpPr>
-          <p:cNvPr id="19" name="正方形/長方形 18">
-            <a:extLst>
-              <a:ext uri="{FF2B5EF4-FFF2-40B4-BE49-F238E27FC236}">
-                <a16:creationId xmlns:a16="http://schemas.microsoft.com/office/drawing/2014/main" id="{603EFA71-D6B2-4EAF-80D9-77D6A4FC03BB}"/>
-              </a:ext>
-            </a:extLst>
-          </p:cNvPr>
-          <p:cNvSpPr/>
-          <p:nvPr/>
-        </p:nvSpPr>
-        <p:spPr>
-          <a:xfrm>
-            <a:off x="6679050" y="730955"/>
-            <a:ext cx="829618" cy="435690"/>
-          </a:xfrm>
-          <a:prstGeom prst="rect">
-            <a:avLst/>
-          </a:prstGeom>
-          <a:solidFill>
-            <a:schemeClr val="bg2">
-              <a:lumMod val="20000"/>
-              <a:lumOff val="80000"/>
-            </a:schemeClr>
-          </a:solidFill>
-          <a:ln w="9525">
-            <a:solidFill>
-              <a:srgbClr val="4F81BD"/>
-            </a:solidFill>
-            <a:prstDash val="sysDash"/>
-          </a:ln>
-          <a:effectLst/>
-        </p:spPr>
-        <p:style>
-          <a:lnRef idx="1">
-            <a:schemeClr val="accent1"/>
-          </a:lnRef>
-          <a:fillRef idx="3">
-            <a:schemeClr val="accent1"/>
-          </a:fillRef>
-          <a:effectRef idx="2">
-            <a:schemeClr val="accent1"/>
-          </a:effectRef>
-          <a:fontRef idx="minor">
-            <a:schemeClr val="lt1"/>
-          </a:fontRef>
-        </p:style>
-        <p:txBody>
-          <a:bodyPr rtlCol="0" anchor="ctr"/>
-          <a:lstStyle/>
-          <a:p>
-            <a:pPr algn="ctr"/>
-            <a:r>
-              <a:rPr kumimoji="1" lang="ja-JP" altLang="en-US" sz="1000" dirty="0">
-                <a:solidFill>
-                  <a:schemeClr val="tx1"/>
-                </a:solidFill>
-                <a:latin typeface="メイリオ" panose="020B0604030504040204" pitchFamily="50" charset="-128"/>
-                <a:ea typeface="メイリオ" panose="020B0604030504040204" pitchFamily="50" charset="-128"/>
-              </a:rPr>
-              <a:t>オプション</a:t>
-            </a:r>
-            <a:endParaRPr kumimoji="1" lang="en-US" altLang="ja-JP" sz="1000" dirty="0">
-              <a:solidFill>
-                <a:schemeClr val="tx1"/>
-              </a:solidFill>
-              <a:latin typeface="メイリオ" panose="020B0604030504040204" pitchFamily="50" charset="-128"/>
-              <a:ea typeface="メイリオ" panose="020B0604030504040204" pitchFamily="50" charset="-128"/>
-            </a:endParaRPr>
-          </a:p>
-          <a:p>
-            <a:pPr algn="ctr"/>
-            <a:r>
-              <a:rPr kumimoji="1" lang="ja-JP" altLang="en-US" sz="1000" dirty="0">
-                <a:solidFill>
-                  <a:schemeClr val="tx1"/>
-                </a:solidFill>
-                <a:latin typeface="メイリオ" panose="020B0604030504040204" pitchFamily="50" charset="-128"/>
-                <a:ea typeface="メイリオ" panose="020B0604030504040204" pitchFamily="50" charset="-128"/>
-              </a:rPr>
-              <a:t>商材</a:t>
-            </a:r>
-          </a:p>
-        </p:txBody>
-      </p:sp>
-      <p:sp>
-        <p:nvSpPr>
-          <p:cNvPr id="44" name="Google Shape;44;p3"/>
-          <p:cNvSpPr txBox="1"/>
-          <p:nvPr/>
-        </p:nvSpPr>
-        <p:spPr>
-          <a:xfrm>
-            <a:off x="3296816" y="6597352"/>
-            <a:ext cx="6209091" cy="215444"/>
-          </a:xfrm>
-          <a:prstGeom prst="rect">
-            <a:avLst/>
-          </a:prstGeom>
-          <a:noFill/>
-          <a:ln>
-            <a:noFill/>
-          </a:ln>
-        </p:spPr>
-        <p:txBody>
-          <a:bodyPr anchorCtr="0" anchor="t" bIns="45700" lIns="91425" spcFirstLastPara="1" rIns="91425" wrap="square" tIns="45700">
-            <a:spAutoFit/>
-          </a:bodyPr>
-          <a:lstStyle/>
-          <a:p>
-            <a:pPr indent="0" lvl="0" marL="0" marR="0" rtl="0" algn="l">
-              <a:spcBef>
-                <a:spcPts val="0"/>
-              </a:spcBef>
-              <a:spcAft>
-                <a:spcPts val="0"/>
-              </a:spcAft>
-              <a:buNone/>
-            </a:pPr>
-            <a:r>
-              <a:rPr b="0" i="0" lang="ja-JP" sz="800" u="none" cap="none" strike="noStrike">
-                <a:solidFill>
-                  <a:schemeClr val="lt1"/>
-                </a:solidFill>
-                <a:latin typeface="メイリオ"/>
-                <a:ea typeface="Meiryo"/>
-                <a:cs typeface="Meiryo"/>
-                <a:sym typeface="Meiryo"/>
-              </a:rPr>
-              <a:t>出典：https://www.lycbiz.com/jp/service/line-sales-promotion/</a:t>
-            </a:r>
-            <a:endParaRPr sz="800">
-              <a:solidFill>
-                <a:schemeClr val="lt1"/>
-              </a:solidFill>
-              <a:latin typeface="Meiryo"/>
-              <a:ea typeface="Meiryo"/>
-              <a:cs typeface="Meiryo"/>
-              <a:sym typeface="Meiryo"/>
-            </a:endParaRPr>
-          </a:p>
-        </p:txBody>
-      </p:sp>
-    </p:spTree>
-  </p:cSld>
-  <p:clrMapOvr>
-    <a:masterClrMapping/>
-  </p:clrMapOvr>
-</p:sld>
-</file>
-
-<file path=ppt/slides/slide12.xml><?xml version="1.0" encoding="utf-8"?>
-<p:sld xmlns:a="http://schemas.openxmlformats.org/drawingml/2006/main" xmlns:r="http://schemas.openxmlformats.org/officeDocument/2006/relationships" xmlns:p="http://schemas.openxmlformats.org/presentationml/2006/main">
-  <p:cSld>
-    <p:spTree>
-      <p:nvGrpSpPr>
         <p:cNvPr id="1" name=""/>
         <p:cNvGrpSpPr/>
         <p:nvPr/>
@@ -38778,6 +35434,2322 @@
 </p:sld>
 </file>
 
+<file path=ppt/slides/slide11.xml><?xml version="1.0" encoding="utf-8"?>
+<p:sld xmlns:a="http://schemas.openxmlformats.org/drawingml/2006/main" xmlns:r="http://schemas.openxmlformats.org/officeDocument/2006/relationships" xmlns:p="http://schemas.openxmlformats.org/presentationml/2006/main" show="0">
+  <p:cSld>
+    <p:spTree>
+      <p:nvGrpSpPr>
+        <p:cNvPr id="1" name=""/>
+        <p:cNvGrpSpPr/>
+        <p:nvPr/>
+      </p:nvGrpSpPr>
+      <p:grpSpPr>
+        <a:xfrm>
+          <a:off x="0" y="0"/>
+          <a:ext cx="0" cy="0"/>
+          <a:chOff x="0" y="0"/>
+          <a:chExt cx="0" cy="0"/>
+        </a:xfrm>
+      </p:grpSpPr>
+      <p:sp>
+        <p:nvSpPr>
+          <p:cNvPr id="40" name="Google Shape;40;p3"/>
+          <p:cNvSpPr/>
+          <p:nvPr/>
+        </p:nvSpPr>
+        <p:spPr>
+          <a:xfrm>
+            <a:off x="292801" y="730955"/>
+            <a:ext cx="1296144" cy="435690"/>
+          </a:xfrm>
+          <a:prstGeom prst="rect">
+            <a:avLst/>
+          </a:prstGeom>
+          <a:solidFill>
+            <a:schemeClr val="dk2"/>
+          </a:solidFill>
+          <a:ln w="9525" cap="flat" cmpd="sng">
+            <a:solidFill>
+              <a:srgbClr val="4A7DBA"/>
+            </a:solidFill>
+            <a:prstDash val="solid"/>
+            <a:round/>
+            <a:headEnd type="none" w="sm" len="sm"/>
+            <a:tailEnd type="none" w="sm" len="sm"/>
+          </a:ln>
+        </p:spPr>
+        <p:txBody>
+          <a:bodyPr spcFirstLastPara="1" wrap="square" lIns="91425" tIns="45700" rIns="91425" bIns="45700" anchor="ctr" anchorCtr="0">
+            <a:noAutofit/>
+          </a:bodyPr>
+          <a:lstStyle/>
+          <a:p>
+            <a:pPr marL="0" marR="0" lvl="0" indent="0" algn="ctr" rtl="0">
+              <a:spcBef>
+                <a:spcPts val="0"/>
+              </a:spcBef>
+              <a:spcAft>
+                <a:spcPts val="0"/>
+              </a:spcAft>
+              <a:buNone/>
+            </a:pPr>
+            <a:r>
+              <a:rPr lang="ja-JP" sz="1800" b="0" i="0" u="none" strike="noStrike" cap="none">
+                <a:solidFill>
+                  <a:schemeClr val="lt1"/>
+                </a:solidFill>
+                <a:latin typeface="メイリオ"/>
+                <a:ea typeface="Meiryo"/>
+                <a:cs typeface="Meiryo"/>
+                <a:sym typeface="Meiryo"/>
+              </a:rPr>
+              <a:t>対象業界</a:t>
+            </a:r>
+            <a:endParaRPr/>
+          </a:p>
+        </p:txBody>
+      </p:sp>
+      <p:sp>
+        <p:nvSpPr>
+          <p:cNvPr id="43" name="Google Shape;43;p3"/>
+          <p:cNvSpPr/>
+          <p:nvPr/>
+        </p:nvSpPr>
+        <p:spPr>
+          <a:xfrm>
+            <a:off x="1594068" y="730955"/>
+            <a:ext cx="2926883" cy="435690"/>
+          </a:xfrm>
+          <a:prstGeom prst="rect">
+            <a:avLst/>
+          </a:prstGeom>
+          <a:noFill/>
+          <a:ln w="9525" cap="flat" cmpd="sng">
+            <a:solidFill>
+              <a:srgbClr val="4A7DBA"/>
+            </a:solidFill>
+            <a:prstDash val="solid"/>
+            <a:round/>
+            <a:headEnd type="none" w="sm" len="sm"/>
+            <a:tailEnd type="none" w="sm" len="sm"/>
+          </a:ln>
+        </p:spPr>
+        <p:txBody>
+          <a:bodyPr spcFirstLastPara="1" wrap="square" lIns="91425" tIns="45700" rIns="91425" bIns="45700" anchor="ctr" anchorCtr="0">
+            <a:noAutofit/>
+          </a:bodyPr>
+          <a:lstStyle/>
+          <a:p>
+            <a:pPr marL="0" marR="0" lvl="0" indent="0" algn="ctr" rtl="0">
+              <a:spcBef>
+                <a:spcPts val="0"/>
+              </a:spcBef>
+              <a:spcAft>
+                <a:spcPts val="0"/>
+              </a:spcAft>
+              <a:buNone/>
+            </a:pPr>
+            <a:r>
+              <a:rPr lang="ja-JP" sz="1300" b="0" i="0" u="none" strike="noStrike" cap="none">
+                <a:solidFill>
+                  <a:schemeClr val="dk1"/>
+                </a:solidFill>
+                <a:latin typeface="メイリオ"/>
+                <a:ea typeface="Meiryo"/>
+                <a:cs typeface="Meiryo"/>
+                <a:sym typeface="Meiryo"/>
+              </a:rPr>
+              <a:t>友だち獲得を強化したい全業種</a:t>
+            </a:r>
+            <a:endParaRPr/>
+          </a:p>
+        </p:txBody>
+      </p:sp>
+      <p:sp>
+        <p:nvSpPr>
+          <p:cNvPr id="44" name="Google Shape;44;p3"/>
+          <p:cNvSpPr txBox="1"/>
+          <p:nvPr/>
+        </p:nvSpPr>
+        <p:spPr>
+          <a:xfrm>
+            <a:off x="3296816" y="6597352"/>
+            <a:ext cx="6209091" cy="215444"/>
+          </a:xfrm>
+          <a:prstGeom prst="rect">
+            <a:avLst/>
+          </a:prstGeom>
+          <a:noFill/>
+          <a:ln>
+            <a:noFill/>
+          </a:ln>
+        </p:spPr>
+        <p:txBody>
+          <a:bodyPr spcFirstLastPara="1" wrap="square" lIns="91425" tIns="45700" rIns="91425" bIns="45700" anchor="t" anchorCtr="0">
+            <a:spAutoFit/>
+          </a:bodyPr>
+          <a:lstStyle/>
+          <a:p>
+            <a:pPr marL="0" marR="0" lvl="0" indent="0" algn="l" rtl="0">
+              <a:spcBef>
+                <a:spcPts val="0"/>
+              </a:spcBef>
+              <a:spcAft>
+                <a:spcPts val="0"/>
+              </a:spcAft>
+              <a:buNone/>
+            </a:pPr>
+            <a:r>
+              <a:rPr lang="ja-JP" sz="800" b="0" i="0" u="none" strike="noStrike" cap="none">
+                <a:solidFill>
+                  <a:schemeClr val="lt1"/>
+                </a:solidFill>
+                <a:latin typeface="メイリオ"/>
+                <a:ea typeface="Meiryo"/>
+                <a:cs typeface="Meiryo"/>
+                <a:sym typeface="Meiryo"/>
+              </a:rPr>
+              <a:t>出典：https://workers-hub.box.com/s/rgfhp6hxyusj7domi1irjx68jld23k9r</a:t>
+            </a:r>
+            <a:endParaRPr sz="800">
+              <a:solidFill>
+                <a:schemeClr val="lt1"/>
+              </a:solidFill>
+              <a:latin typeface="Meiryo"/>
+              <a:ea typeface="Meiryo"/>
+              <a:cs typeface="Meiryo"/>
+              <a:sym typeface="Meiryo"/>
+            </a:endParaRPr>
+          </a:p>
+        </p:txBody>
+      </p:sp>
+      <p:sp>
+        <p:nvSpPr>
+          <p:cNvPr id="45" name="Google Shape;45;p3"/>
+          <p:cNvSpPr/>
+          <p:nvPr/>
+        </p:nvSpPr>
+        <p:spPr>
+          <a:xfrm>
+            <a:off x="0" y="1234746"/>
+            <a:ext cx="9906000" cy="672259"/>
+          </a:xfrm>
+          <a:prstGeom prst="rect">
+            <a:avLst/>
+          </a:prstGeom>
+          <a:solidFill>
+            <a:srgbClr val="C5D8F1"/>
+          </a:solidFill>
+          <a:ln>
+            <a:noFill/>
+          </a:ln>
+        </p:spPr>
+        <p:txBody>
+          <a:bodyPr spcFirstLastPara="1" wrap="square" lIns="91425" tIns="45700" rIns="91425" bIns="45700" anchor="ctr" anchorCtr="0">
+            <a:noAutofit/>
+          </a:bodyPr>
+          <a:lstStyle/>
+          <a:p>
+            <a:pPr marL="0" marR="0" lvl="0" indent="0" algn="ctr" rtl="0">
+              <a:spcBef>
+                <a:spcPts val="0"/>
+              </a:spcBef>
+              <a:spcAft>
+                <a:spcPts val="0"/>
+              </a:spcAft>
+              <a:buNone/>
+            </a:pPr>
+            <a:r>
+              <a:rPr lang="ja-JP" sz="1600" b="1">
+                <a:solidFill>
+                  <a:srgbClr val="004DE6"/>
+                </a:solidFill>
+                <a:latin typeface="メイリオ"/>
+                <a:ea typeface="Meiryo"/>
+                <a:cs typeface="Meiryo"/>
+                <a:sym typeface="Meiryo"/>
+              </a:rPr>
+              <a:t>　　　　　　</a:t>
+            </a:r>
+            <a:endParaRPr sz="1800" b="1">
+              <a:solidFill>
+                <a:srgbClr val="004DE6"/>
+              </a:solidFill>
+              <a:latin typeface="Meiryo"/>
+              <a:ea typeface="Meiryo"/>
+              <a:cs typeface="Meiryo"/>
+              <a:sym typeface="Meiryo"/>
+            </a:endParaRPr>
+          </a:p>
+        </p:txBody>
+      </p:sp>
+      <p:sp>
+        <p:nvSpPr>
+          <p:cNvPr id="46" name="Google Shape;46;p3"/>
+          <p:cNvSpPr/>
+          <p:nvPr/>
+        </p:nvSpPr>
+        <p:spPr>
+          <a:xfrm>
+            <a:off x="1089832" y="1437370"/>
+            <a:ext cx="7031520" cy="338554"/>
+          </a:xfrm>
+          <a:prstGeom prst="rect">
+            <a:avLst/>
+          </a:prstGeom>
+          <a:noFill/>
+          <a:ln>
+            <a:noFill/>
+          </a:ln>
+        </p:spPr>
+        <p:txBody>
+          <a:bodyPr spcFirstLastPara="1" wrap="square" lIns="91425" tIns="45700" rIns="91425" bIns="45700" anchor="t" anchorCtr="0">
+            <a:spAutoFit/>
+          </a:bodyPr>
+          <a:lstStyle/>
+          <a:p>
+            <a:pPr marL="0" marR="0" lvl="0" indent="0" algn="l" rtl="0">
+              <a:spcBef>
+                <a:spcPts val="0"/>
+              </a:spcBef>
+              <a:spcAft>
+                <a:spcPts val="0"/>
+              </a:spcAft>
+              <a:buNone/>
+            </a:pPr>
+            <a:r>
+              <a:rPr lang="ja-JP" sz="1600" b="1" dirty="0">
+                <a:solidFill>
+                  <a:srgbClr val="004DE6"/>
+                </a:solidFill>
+                <a:latin typeface="メイリオ"/>
+                <a:ea typeface="Meiryo"/>
+                <a:cs typeface="Meiryo"/>
+                <a:sym typeface="Meiryo"/>
+              </a:rPr>
+              <a:t>【LINEプロモーションスタンプ】ダウンロード機会拡大のご案内</a:t>
+            </a:r>
+            <a:endParaRPr sz="1600" b="1" dirty="0">
+              <a:solidFill>
+                <a:srgbClr val="004DE6"/>
+              </a:solidFill>
+              <a:latin typeface="Meiryo"/>
+              <a:ea typeface="Meiryo"/>
+              <a:cs typeface="Meiryo"/>
+              <a:sym typeface="Meiryo"/>
+            </a:endParaRPr>
+          </a:p>
+        </p:txBody>
+      </p:sp>
+      <p:sp>
+        <p:nvSpPr>
+          <p:cNvPr id="47" name="Google Shape;47;p3"/>
+          <p:cNvSpPr txBox="1"/>
+          <p:nvPr/>
+        </p:nvSpPr>
+        <p:spPr>
+          <a:xfrm>
+            <a:off x="182880" y="88175"/>
+            <a:ext cx="7512385" cy="365091"/>
+          </a:xfrm>
+          <a:prstGeom prst="rect">
+            <a:avLst/>
+          </a:prstGeom>
+          <a:noFill/>
+          <a:ln>
+            <a:noFill/>
+          </a:ln>
+        </p:spPr>
+        <p:txBody>
+          <a:bodyPr spcFirstLastPara="1" wrap="square" lIns="91425" tIns="72000" rIns="91425" bIns="45700" anchor="t" anchorCtr="0">
+            <a:spAutoFit/>
+          </a:bodyPr>
+          <a:lstStyle/>
+          <a:p>
+            <a:pPr marL="0" marR="0" lvl="0" indent="0" algn="l" rtl="0">
+              <a:spcBef>
+                <a:spcPts val="0"/>
+              </a:spcBef>
+              <a:spcAft>
+                <a:spcPts val="0"/>
+              </a:spcAft>
+              <a:buClr>
+                <a:schemeClr val="dk1"/>
+              </a:buClr>
+              <a:buSzPts val="1600"/>
+              <a:buFont typeface="Arial"/>
+              <a:buNone/>
+            </a:pPr>
+            <a:r>
+              <a:rPr lang="ja-JP" sz="1600" b="0" u="none">
+                <a:solidFill>
+                  <a:schemeClr val="dk1"/>
+                </a:solidFill>
+                <a:latin typeface="メイリオ"/>
+                <a:ea typeface="Meiryo"/>
+                <a:cs typeface="Meiryo"/>
+                <a:sym typeface="Meiryo"/>
+              </a:rPr>
+              <a:t>    今後のアップデート情報</a:t>
+            </a:r>
+            <a:endParaRPr sz="1600" b="0" u="none">
+              <a:solidFill>
+                <a:schemeClr val="dk1"/>
+              </a:solidFill>
+              <a:latin typeface="Meiryo"/>
+              <a:ea typeface="Meiryo"/>
+              <a:cs typeface="Meiryo"/>
+              <a:sym typeface="Meiryo"/>
+            </a:endParaRPr>
+          </a:p>
+        </p:txBody>
+      </p:sp>
+      <p:sp>
+        <p:nvSpPr>
+          <p:cNvPr id="50" name="Google Shape;50;p3"/>
+          <p:cNvSpPr/>
+          <p:nvPr/>
+        </p:nvSpPr>
+        <p:spPr>
+          <a:xfrm>
+            <a:off x="0" y="1890267"/>
+            <a:ext cx="9906000" cy="733579"/>
+          </a:xfrm>
+          <a:prstGeom prst="rect">
+            <a:avLst/>
+          </a:prstGeom>
+          <a:solidFill>
+            <a:srgbClr val="F2F2F2"/>
+          </a:solidFill>
+          <a:ln>
+            <a:noFill/>
+          </a:ln>
+        </p:spPr>
+        <p:txBody>
+          <a:bodyPr spcFirstLastPara="1" wrap="square" lIns="91425" tIns="45700" rIns="91425" bIns="45700" anchor="ctr" anchorCtr="0">
+            <a:noAutofit/>
+          </a:bodyPr>
+          <a:lstStyle/>
+          <a:p>
+            <a:pPr marL="0" marR="0" lvl="0" indent="0" algn="ctr" rtl="0">
+              <a:spcBef>
+                <a:spcPts val="0"/>
+              </a:spcBef>
+              <a:spcAft>
+                <a:spcPts val="0"/>
+              </a:spcAft>
+              <a:buNone/>
+            </a:pPr>
+            <a:endParaRPr sz="1200">
+              <a:solidFill>
+                <a:schemeClr val="dk1"/>
+              </a:solidFill>
+              <a:latin typeface="Meiryo"/>
+              <a:ea typeface="Meiryo"/>
+              <a:cs typeface="Meiryo"/>
+              <a:sym typeface="Meiryo"/>
+            </a:endParaRPr>
+          </a:p>
+        </p:txBody>
+      </p:sp>
+      <p:sp>
+        <p:nvSpPr>
+          <p:cNvPr id="51" name="Google Shape;51;p3"/>
+          <p:cNvSpPr/>
+          <p:nvPr/>
+        </p:nvSpPr>
+        <p:spPr>
+          <a:xfrm>
+            <a:off x="544108" y="1961282"/>
+            <a:ext cx="8817783" cy="646331"/>
+          </a:xfrm>
+          <a:prstGeom prst="rect">
+            <a:avLst/>
+          </a:prstGeom>
+          <a:noFill/>
+          <a:ln>
+            <a:noFill/>
+          </a:ln>
+        </p:spPr>
+        <p:txBody>
+          <a:bodyPr spcFirstLastPara="1" wrap="square" lIns="91425" tIns="45700" rIns="91425" bIns="45700" anchor="t" anchorCtr="0">
+            <a:spAutoFit/>
+          </a:bodyPr>
+          <a:lstStyle/>
+          <a:p>
+            <a:pPr marL="0" marR="0" lvl="0" indent="0" algn="ctr" rtl="0">
+              <a:spcBef>
+                <a:spcPts val="0"/>
+              </a:spcBef>
+              <a:spcAft>
+                <a:spcPts val="0"/>
+              </a:spcAft>
+              <a:buNone/>
+            </a:pPr>
+            <a:r>
+              <a:rPr lang="ja-JP" sz="1200" b="1">
+                <a:solidFill>
+                  <a:schemeClr val="dk1"/>
+                </a:solidFill>
+                <a:latin typeface="メイリオ"/>
+                <a:ea typeface="Meiryo"/>
+                <a:cs typeface="Meiryo"/>
+                <a:sym typeface="Meiryo"/>
+              </a:rPr>
+              <a:t>LINEキーボードのサジェスト機能で無料スタンプが表示される条件を緩和し、</a:t>
+            </a:r>
+            <a:endParaRPr sz="1200" b="1">
+              <a:solidFill>
+                <a:schemeClr val="dk1"/>
+              </a:solidFill>
+              <a:latin typeface="Meiryo"/>
+              <a:ea typeface="Meiryo"/>
+              <a:cs typeface="Meiryo"/>
+              <a:sym typeface="Meiryo"/>
+            </a:endParaRPr>
+          </a:p>
+          <a:p>
+            <a:pPr marL="0" marR="0" lvl="0" indent="0" algn="ctr" rtl="0">
+              <a:spcBef>
+                <a:spcPts val="0"/>
+              </a:spcBef>
+              <a:spcAft>
+                <a:spcPts val="0"/>
+              </a:spcAft>
+              <a:buNone/>
+            </a:pPr>
+            <a:r>
+              <a:rPr lang="ja-JP" sz="1200" b="1">
+                <a:solidFill>
+                  <a:schemeClr val="dk1"/>
+                </a:solidFill>
+                <a:latin typeface="メイリオ"/>
+                <a:ea typeface="Meiryo"/>
+                <a:cs typeface="Meiryo"/>
+                <a:sym typeface="Meiryo"/>
+              </a:rPr>
+              <a:t>これまで一部だったユーザー表示が全ユーザーに拡大された。</a:t>
+            </a:r>
+            <a:endParaRPr/>
+          </a:p>
+          <a:p>
+            <a:pPr marL="0" marR="0" lvl="0" indent="0" algn="ctr" rtl="0">
+              <a:spcBef>
+                <a:spcPts val="0"/>
+              </a:spcBef>
+              <a:spcAft>
+                <a:spcPts val="0"/>
+              </a:spcAft>
+              <a:buNone/>
+            </a:pPr>
+            <a:r>
+              <a:rPr lang="ja-JP" sz="1200" b="1">
+                <a:solidFill>
+                  <a:schemeClr val="dk1"/>
+                </a:solidFill>
+                <a:latin typeface="メイリオ"/>
+                <a:ea typeface="Meiryo"/>
+                <a:cs typeface="Meiryo"/>
+                <a:sym typeface="Meiryo"/>
+              </a:rPr>
+              <a:t>適用開始は2026年8月28日、DL数は平均+5.63%増加している。</a:t>
+            </a:r>
+            <a:endParaRPr sz="1400" b="1">
+              <a:solidFill>
+                <a:schemeClr val="dk1"/>
+              </a:solidFill>
+              <a:latin typeface="Meiryo"/>
+              <a:ea typeface="Meiryo"/>
+              <a:cs typeface="Meiryo"/>
+              <a:sym typeface="Meiryo"/>
+            </a:endParaRPr>
+          </a:p>
+        </p:txBody>
+      </p:sp>
+      <p:sp>
+        <p:nvSpPr>
+          <p:cNvPr id="52" name="Google Shape;52;p3"/>
+          <p:cNvSpPr/>
+          <p:nvPr/>
+        </p:nvSpPr>
+        <p:spPr>
+          <a:xfrm>
+            <a:off x="351381" y="2714173"/>
+            <a:ext cx="5200000" cy="338554"/>
+          </a:xfrm>
+          <a:prstGeom prst="rect">
+            <a:avLst/>
+          </a:prstGeom>
+          <a:noFill/>
+          <a:ln>
+            <a:noFill/>
+          </a:ln>
+        </p:spPr>
+        <p:txBody>
+          <a:bodyPr spcFirstLastPara="1" wrap="square" lIns="91425" tIns="45700" rIns="91425" bIns="45700" anchor="t" anchorCtr="0">
+            <a:noAutofit/>
+          </a:bodyPr>
+          <a:lstStyle/>
+          <a:p>
+            <a:pPr marL="0" marR="0" lvl="0" indent="0" algn="l" rtl="0">
+              <a:spcBef>
+                <a:spcPts val="0"/>
+              </a:spcBef>
+              <a:spcAft>
+                <a:spcPts val="0"/>
+              </a:spcAft>
+              <a:buNone/>
+            </a:pPr>
+            <a:r>
+              <a:rPr lang="ja-JP" sz="1400" b="1">
+                <a:solidFill>
+                  <a:srgbClr val="15133D"/>
+                </a:solidFill>
+                <a:latin typeface="メイリオ"/>
+                <a:ea typeface="Meiryo"/>
+                <a:cs typeface="Meiryo"/>
+                <a:sym typeface="Meiryo"/>
+              </a:rPr>
+              <a:t>■ 詳細</a:t>
+            </a:r>
+            <a:endParaRPr/>
+          </a:p>
+        </p:txBody>
+      </p:sp>
+      <p:pic>
+        <p:nvPicPr>
+          <p:cNvPr id="62" name="Google Shape;62;p3" descr="LINE公式アカウントのロゴの使用方法とは？種類やダウンロード方法、利用時の注意点を紹介 | Mico（ミコ）"/>
+          <p:cNvPicPr preferRelativeResize="0"/>
+          <p:nvPr/>
+        </p:nvPicPr>
+        <p:blipFill rotWithShape="1">
+          <a:blip r:embed="rId2">
+            <a:alphaModFix/>
+          </a:blip>
+          <a:srcRect/>
+          <a:stretch/>
+        </p:blipFill>
+        <p:spPr>
+          <a:xfrm>
+            <a:off x="351381" y="1234746"/>
+            <a:ext cx="656177" cy="655521"/>
+          </a:xfrm>
+          <a:prstGeom prst="rect">
+            <a:avLst/>
+          </a:prstGeom>
+          <a:noFill/>
+          <a:ln>
+            <a:noFill/>
+          </a:ln>
+        </p:spPr>
+      </p:pic>
+      <p:graphicFrame>
+        <p:nvGraphicFramePr>
+          <p:cNvPr id="63" name="Table 62"/>
+          <p:cNvGraphicFramePr>
+            <a:graphicFrameLocks noGrp="1"/>
+          </p:cNvGraphicFramePr>
+          <p:nvPr>
+            <p:extLst>
+              <p:ext uri="{D42A27DB-BD31-4B8C-83A1-F6EECF244321}">
+                <p14:modId xmlns:p14="http://schemas.microsoft.com/office/powerpoint/2010/main" val="1178564674"/>
+              </p:ext>
+            </p:extLst>
+          </p:nvPr>
+        </p:nvGraphicFramePr>
+        <p:xfrm>
+          <a:off x="429808" y="3052727"/>
+          <a:ext cx="8387555" cy="2811046"/>
+        </p:xfrm>
+        <a:graphic>
+          <a:graphicData uri="http://schemas.openxmlformats.org/drawingml/2006/table">
+            <a:tbl>
+              <a:tblPr firstRow="1" bandRow="1">
+                <a:tableStyleId>{5C22544A-7EE6-4342-B048-85BDC9FD1C3A}</a:tableStyleId>
+              </a:tblPr>
+              <a:tblGrid>
+                <a:gridCol w="2168211">
+                  <a:extLst>
+                    <a:ext uri="{9D8B030D-6E8A-4147-A177-3AD203B41FA5}">
+                      <a16:colId xmlns:a16="http://schemas.microsoft.com/office/drawing/2014/main" val="20000"/>
+                    </a:ext>
+                  </a:extLst>
+                </a:gridCol>
+                <a:gridCol w="6219344">
+                  <a:extLst>
+                    <a:ext uri="{9D8B030D-6E8A-4147-A177-3AD203B41FA5}">
+                      <a16:colId xmlns:a16="http://schemas.microsoft.com/office/drawing/2014/main" val="20001"/>
+                    </a:ext>
+                  </a:extLst>
+                </a:gridCol>
+              </a:tblGrid>
+              <a:tr h="1290397">
+                <a:tc>
+                  <a:txBody>
+                    <a:bodyPr/>
+                    <a:lstStyle/>
+                    <a:p>
+                      <a:r>
+                        <a:rPr sz="1050" b="1" dirty="0" err="1">
+                          <a:solidFill>
+                            <a:srgbClr val="FFFFFF"/>
+                          </a:solidFill>
+                          <a:latin typeface="メイリオ"/>
+                        </a:rPr>
+                        <a:t>概要・変更点</a:t>
+                      </a:r>
+                      <a:endParaRPr sz="1050" b="1" dirty="0">
+                        <a:solidFill>
+                          <a:srgbClr val="FFFFFF"/>
+                        </a:solidFill>
+                        <a:latin typeface="メイリオ"/>
+                      </a:endParaRPr>
+                    </a:p>
+                  </a:txBody>
+                  <a:tcPr marL="73152" marR="45720" anchor="ctr">
+                    <a:solidFill>
+                      <a:srgbClr val="15133D"/>
+                    </a:solidFill>
+                  </a:tcPr>
+                </a:tc>
+                <a:tc>
+                  <a:txBody>
+                    <a:bodyPr/>
+                    <a:lstStyle/>
+                    <a:p>
+                      <a:pPr>
+                        <a:lnSpc>
+                          <a:spcPct val="105000"/>
+                        </a:lnSpc>
+                        <a:spcAft>
+                          <a:spcPts val="150"/>
+                        </a:spcAft>
+                      </a:pPr>
+                      <a:r>
+                        <a:rPr sz="1200" dirty="0">
+                          <a:solidFill>
+                            <a:srgbClr val="333333"/>
+                          </a:solidFill>
+                          <a:latin typeface="メイリオ"/>
+                        </a:rPr>
+                        <a:t>・</a:t>
+                      </a:r>
+                      <a:r>
+                        <a:rPr sz="1200" dirty="0" err="1">
+                          <a:solidFill>
+                            <a:srgbClr val="333333"/>
+                          </a:solidFill>
+                          <a:latin typeface="メイリオ"/>
+                        </a:rPr>
+                        <a:t>サジェスト面（ユーザーの入力内容に応じてスタンプを提案する機能）での</a:t>
+                      </a:r>
+                      <a:endParaRPr lang="en-US" sz="1200" dirty="0">
+                        <a:solidFill>
+                          <a:srgbClr val="333333"/>
+                        </a:solidFill>
+                        <a:latin typeface="メイリオ"/>
+                      </a:endParaRPr>
+                    </a:p>
+                    <a:p>
+                      <a:pPr>
+                        <a:lnSpc>
+                          <a:spcPct val="105000"/>
+                        </a:lnSpc>
+                        <a:spcAft>
+                          <a:spcPts val="150"/>
+                        </a:spcAft>
+                      </a:pPr>
+                      <a:r>
+                        <a:rPr sz="1200" dirty="0" err="1">
+                          <a:solidFill>
+                            <a:srgbClr val="333333"/>
+                          </a:solidFill>
+                          <a:latin typeface="メイリオ"/>
+                        </a:rPr>
+                        <a:t>無料スタンプ表示ユーザー条件を緩和</a:t>
+                      </a:r>
+                      <a:endParaRPr sz="1200" dirty="0">
+                        <a:solidFill>
+                          <a:srgbClr val="333333"/>
+                        </a:solidFill>
+                        <a:latin typeface="メイリオ"/>
+                      </a:endParaRPr>
+                    </a:p>
+                    <a:p>
+                      <a:pPr>
+                        <a:lnSpc>
+                          <a:spcPct val="105000"/>
+                        </a:lnSpc>
+                        <a:spcAft>
+                          <a:spcPts val="150"/>
+                        </a:spcAft>
+                      </a:pPr>
+                      <a:r>
+                        <a:rPr sz="1200" dirty="0">
+                          <a:solidFill>
+                            <a:srgbClr val="333333"/>
+                          </a:solidFill>
+                          <a:latin typeface="メイリオ"/>
+                        </a:rPr>
+                        <a:t>・</a:t>
+                      </a:r>
+                      <a:r>
+                        <a:rPr sz="1200" dirty="0" err="1">
+                          <a:solidFill>
+                            <a:srgbClr val="333333"/>
+                          </a:solidFill>
+                          <a:latin typeface="メイリオ"/>
+                        </a:rPr>
+                        <a:t>AS-IS：一部のユーザーにのみ表示</a:t>
+                      </a:r>
+                      <a:r>
+                        <a:rPr sz="1200" dirty="0">
+                          <a:solidFill>
+                            <a:srgbClr val="333333"/>
+                          </a:solidFill>
+                          <a:latin typeface="メイリオ"/>
+                        </a:rPr>
+                        <a:t> </a:t>
+                      </a:r>
+                      <a:endParaRPr lang="en-US" sz="1200" dirty="0">
+                        <a:solidFill>
+                          <a:srgbClr val="333333"/>
+                        </a:solidFill>
+                        <a:latin typeface="メイリオ"/>
+                      </a:endParaRPr>
+                    </a:p>
+                    <a:p>
+                      <a:pPr>
+                        <a:lnSpc>
+                          <a:spcPct val="105000"/>
+                        </a:lnSpc>
+                        <a:spcAft>
+                          <a:spcPts val="150"/>
+                        </a:spcAft>
+                      </a:pPr>
+                      <a:r>
+                        <a:rPr sz="1200" dirty="0">
+                          <a:solidFill>
+                            <a:srgbClr val="333333"/>
+                          </a:solidFill>
+                          <a:latin typeface="メイリオ"/>
+                        </a:rPr>
+                        <a:t>→ </a:t>
+                      </a:r>
+                      <a:r>
+                        <a:rPr sz="1200" dirty="0" err="1">
+                          <a:solidFill>
+                            <a:srgbClr val="333333"/>
+                          </a:solidFill>
+                          <a:latin typeface="メイリオ"/>
+                        </a:rPr>
+                        <a:t>TO-BE：すべてのユーザーに表示（これまで対象外だった層にもリーチ可能</a:t>
+                      </a:r>
+                      <a:r>
+                        <a:rPr sz="1200" dirty="0">
+                          <a:solidFill>
+                            <a:srgbClr val="333333"/>
+                          </a:solidFill>
+                          <a:latin typeface="メイリオ"/>
+                        </a:rPr>
+                        <a:t>）</a:t>
+                      </a:r>
+                    </a:p>
+                    <a:p>
+                      <a:pPr>
+                        <a:lnSpc>
+                          <a:spcPct val="105000"/>
+                        </a:lnSpc>
+                        <a:spcAft>
+                          <a:spcPts val="150"/>
+                        </a:spcAft>
+                      </a:pPr>
+                      <a:r>
+                        <a:rPr sz="1200" dirty="0">
+                          <a:solidFill>
+                            <a:srgbClr val="333333"/>
+                          </a:solidFill>
+                          <a:latin typeface="メイリオ"/>
+                        </a:rPr>
+                        <a:t>・</a:t>
+                      </a:r>
+                      <a:r>
+                        <a:rPr sz="1200" dirty="0" err="1">
+                          <a:solidFill>
+                            <a:srgbClr val="333333"/>
+                          </a:solidFill>
+                          <a:latin typeface="メイリオ"/>
+                        </a:rPr>
+                        <a:t>配信中の案件を含む全案件に自動適用（広告主・案件側の対応は不要</a:t>
+                      </a:r>
+                      <a:r>
+                        <a:rPr sz="1200" dirty="0">
+                          <a:solidFill>
+                            <a:srgbClr val="333333"/>
+                          </a:solidFill>
+                          <a:latin typeface="メイリオ"/>
+                        </a:rPr>
+                        <a:t>）</a:t>
+                      </a:r>
+                    </a:p>
+                  </a:txBody>
+                  <a:tcPr marT="36576" marB="36576" anchor="ctr">
+                    <a:solidFill>
+                      <a:srgbClr val="FFFFFF"/>
+                    </a:solidFill>
+                  </a:tcPr>
+                </a:tc>
+                <a:extLst>
+                  <a:ext uri="{0D108BD9-81ED-4DB2-BD59-A6C34878D82A}">
+                    <a16:rowId xmlns:a16="http://schemas.microsoft.com/office/drawing/2014/main" val="10000"/>
+                  </a:ext>
+                </a:extLst>
+              </a:tr>
+              <a:tr h="1520649">
+                <a:tc>
+                  <a:txBody>
+                    <a:bodyPr/>
+                    <a:lstStyle/>
+                    <a:p>
+                      <a:r>
+                        <a:rPr sz="1100" b="1" dirty="0" err="1">
+                          <a:solidFill>
+                            <a:srgbClr val="FFFFFF"/>
+                          </a:solidFill>
+                          <a:latin typeface="メイリオ"/>
+                        </a:rPr>
+                        <a:t>注意点・影響</a:t>
+                      </a:r>
+                      <a:endParaRPr sz="1100" b="1" dirty="0">
+                        <a:solidFill>
+                          <a:srgbClr val="FFFFFF"/>
+                        </a:solidFill>
+                        <a:latin typeface="メイリオ"/>
+                      </a:endParaRPr>
+                    </a:p>
+                  </a:txBody>
+                  <a:tcPr marL="73152" marR="45720" anchor="ctr">
+                    <a:solidFill>
+                      <a:srgbClr val="15133D"/>
+                    </a:solidFill>
+                  </a:tcPr>
+                </a:tc>
+                <a:tc>
+                  <a:txBody>
+                    <a:bodyPr/>
+                    <a:lstStyle/>
+                    <a:p>
+                      <a:pPr>
+                        <a:lnSpc>
+                          <a:spcPct val="100000"/>
+                        </a:lnSpc>
+                        <a:spcAft>
+                          <a:spcPts val="100"/>
+                        </a:spcAft>
+                      </a:pPr>
+                      <a:r>
+                        <a:rPr sz="1200" dirty="0">
+                          <a:solidFill>
+                            <a:srgbClr val="333333"/>
+                          </a:solidFill>
+                          <a:latin typeface="メイリオ"/>
+                        </a:rPr>
+                        <a:t>・DL数+5.63%増</a:t>
+                      </a:r>
+                      <a:br>
+                        <a:rPr lang="en-US" sz="1200" dirty="0">
+                          <a:solidFill>
+                            <a:srgbClr val="333333"/>
+                          </a:solidFill>
+                          <a:latin typeface="メイリオ"/>
+                        </a:rPr>
+                      </a:br>
+                      <a:r>
+                        <a:rPr sz="1200" dirty="0">
+                          <a:solidFill>
+                            <a:srgbClr val="333333"/>
+                          </a:solidFill>
+                          <a:latin typeface="メイリオ"/>
+                        </a:rPr>
+                        <a:t>・サジェスト経由は友だち追加率74.6%・当日ブロック率9.53%（平均約60%・約22%より好水準）</a:t>
+                      </a:r>
+                    </a:p>
+                    <a:p>
+                      <a:pPr>
+                        <a:lnSpc>
+                          <a:spcPct val="100000"/>
+                        </a:lnSpc>
+                        <a:spcAft>
+                          <a:spcPts val="100"/>
+                        </a:spcAft>
+                      </a:pPr>
+                      <a:r>
+                        <a:rPr sz="1200" dirty="0">
+                          <a:solidFill>
+                            <a:srgbClr val="333333"/>
+                          </a:solidFill>
+                          <a:latin typeface="メイリオ"/>
+                        </a:rPr>
+                        <a:t>・過去6〜18ヶ月DLなし層で約3.0倍</a:t>
+                      </a:r>
+                    </a:p>
+                    <a:p>
+                      <a:pPr>
+                        <a:lnSpc>
+                          <a:spcPct val="100000"/>
+                        </a:lnSpc>
+                        <a:spcAft>
+                          <a:spcPts val="100"/>
+                        </a:spcAft>
+                      </a:pPr>
+                      <a:r>
+                        <a:rPr sz="1200" dirty="0">
+                          <a:solidFill>
+                            <a:srgbClr val="333333"/>
+                          </a:solidFill>
+                          <a:latin typeface="メイリオ"/>
+                        </a:rPr>
+                        <a:t>・</a:t>
+                      </a:r>
+                      <a:r>
+                        <a:rPr sz="1200" dirty="0" err="1">
+                          <a:solidFill>
+                            <a:srgbClr val="333333"/>
+                          </a:solidFill>
+                          <a:latin typeface="メイリオ"/>
+                        </a:rPr>
+                        <a:t>運用中クライアントへの実績報告・追加提案の材料に使える</a:t>
+                      </a:r>
+                      <a:endParaRPr sz="1200" dirty="0">
+                        <a:solidFill>
+                          <a:srgbClr val="333333"/>
+                        </a:solidFill>
+                        <a:latin typeface="メイリオ"/>
+                      </a:endParaRPr>
+                    </a:p>
+                  </a:txBody>
+                  <a:tcPr marT="36576" marB="36576" anchor="ctr">
+                    <a:solidFill>
+                      <a:srgbClr val="FFFFFF"/>
+                    </a:solidFill>
+                  </a:tcPr>
+                </a:tc>
+                <a:extLst>
+                  <a:ext uri="{0D108BD9-81ED-4DB2-BD59-A6C34878D82A}">
+                    <a16:rowId xmlns:a16="http://schemas.microsoft.com/office/drawing/2014/main" val="10003"/>
+                  </a:ext>
+                </a:extLst>
+              </a:tr>
+            </a:tbl>
+          </a:graphicData>
+        </a:graphic>
+      </p:graphicFrame>
+      <p:sp>
+        <p:nvSpPr>
+          <p:cNvPr id="3" name="正方形/長方形 2">
+            <a:extLst>
+              <a:ext uri="{FF2B5EF4-FFF2-40B4-BE49-F238E27FC236}">
+                <a16:creationId xmlns:a16="http://schemas.microsoft.com/office/drawing/2014/main" id="{BA15A3E1-1B15-2AB4-7BD5-31104F3AF764}"/>
+              </a:ext>
+            </a:extLst>
+          </p:cNvPr>
+          <p:cNvSpPr/>
+          <p:nvPr/>
+        </p:nvSpPr>
+        <p:spPr>
+          <a:xfrm>
+            <a:off x="7560840" y="730955"/>
+            <a:ext cx="829618" cy="435690"/>
+          </a:xfrm>
+          <a:prstGeom prst="rect">
+            <a:avLst/>
+          </a:prstGeom>
+          <a:solidFill>
+            <a:schemeClr val="bg1"/>
+          </a:solidFill>
+          <a:ln w="9525">
+            <a:solidFill>
+              <a:srgbClr val="4F81BD"/>
+            </a:solidFill>
+            <a:prstDash val="sysDash"/>
+          </a:ln>
+          <a:effectLst/>
+        </p:spPr>
+        <p:style>
+          <a:lnRef idx="1">
+            <a:schemeClr val="accent1"/>
+          </a:lnRef>
+          <a:fillRef idx="3">
+            <a:schemeClr val="accent1"/>
+          </a:fillRef>
+          <a:effectRef idx="2">
+            <a:schemeClr val="accent1"/>
+          </a:effectRef>
+          <a:fontRef idx="minor">
+            <a:schemeClr val="lt1"/>
+          </a:fontRef>
+        </p:style>
+        <p:txBody>
+          <a:bodyPr rtlCol="0" anchor="ctr"/>
+          <a:lstStyle/>
+          <a:p>
+            <a:pPr algn="ctr"/>
+            <a:r>
+              <a:rPr lang="ja-JP" altLang="en-US" sz="1200" dirty="0">
+                <a:solidFill>
+                  <a:schemeClr val="tx1"/>
+                </a:solidFill>
+                <a:latin typeface="メイリオ" panose="020B0604030504040204" pitchFamily="50" charset="-128"/>
+                <a:ea typeface="メイリオ" panose="020B0604030504040204" pitchFamily="50" charset="-128"/>
+              </a:rPr>
+              <a:t>その他</a:t>
+            </a:r>
+            <a:endParaRPr kumimoji="1" lang="ja-JP" altLang="en-US" sz="1200" dirty="0">
+              <a:solidFill>
+                <a:schemeClr val="tx1"/>
+              </a:solidFill>
+              <a:latin typeface="メイリオ" panose="020B0604030504040204" pitchFamily="50" charset="-128"/>
+              <a:ea typeface="メイリオ" panose="020B0604030504040204" pitchFamily="50" charset="-128"/>
+            </a:endParaRPr>
+          </a:p>
+        </p:txBody>
+      </p:sp>
+      <p:sp>
+        <p:nvSpPr>
+          <p:cNvPr id="5" name="正方形/長方形 4">
+            <a:extLst>
+              <a:ext uri="{FF2B5EF4-FFF2-40B4-BE49-F238E27FC236}">
+                <a16:creationId xmlns:a16="http://schemas.microsoft.com/office/drawing/2014/main" id="{4A8B2DD9-FE56-61EE-61D3-B56499FEDF42}"/>
+              </a:ext>
+            </a:extLst>
+          </p:cNvPr>
+          <p:cNvSpPr/>
+          <p:nvPr/>
+        </p:nvSpPr>
+        <p:spPr>
+          <a:xfrm>
+            <a:off x="5797260" y="730955"/>
+            <a:ext cx="829618" cy="435690"/>
+          </a:xfrm>
+          <a:prstGeom prst="rect">
+            <a:avLst/>
+          </a:prstGeom>
+          <a:solidFill>
+            <a:schemeClr val="bg1"/>
+          </a:solidFill>
+          <a:ln w="9525" cap="flat" cmpd="sng" algn="ctr">
+            <a:solidFill>
+              <a:srgbClr val="4F81BD"/>
+            </a:solidFill>
+            <a:prstDash val="sysDash"/>
+          </a:ln>
+          <a:effectLst/>
+        </p:spPr>
+        <p:txBody>
+          <a:bodyPr rtlCol="0" anchor="ctr"/>
+          <a:lstStyle/>
+          <a:p>
+            <a:pPr algn="ctr">
+              <a:buClrTx/>
+              <a:buFontTx/>
+              <a:buNone/>
+            </a:pPr>
+            <a:r>
+              <a:rPr kumimoji="1" lang="ja-JP" altLang="en-US" sz="1000" kern="1200" dirty="0">
+                <a:latin typeface="メイリオ" panose="020B0604030504040204" pitchFamily="50" charset="-128"/>
+                <a:ea typeface="メイリオ" panose="020B0604030504040204" pitchFamily="50" charset="-128"/>
+              </a:rPr>
+              <a:t>開発</a:t>
+            </a:r>
+            <a:endParaRPr kumimoji="1" lang="en-US" altLang="ja-JP" sz="1000" kern="1200" dirty="0">
+              <a:latin typeface="メイリオ" panose="020B0604030504040204" pitchFamily="50" charset="-128"/>
+              <a:ea typeface="メイリオ" panose="020B0604030504040204" pitchFamily="50" charset="-128"/>
+            </a:endParaRPr>
+          </a:p>
+          <a:p>
+            <a:pPr algn="ctr">
+              <a:buClrTx/>
+              <a:buFontTx/>
+              <a:buNone/>
+            </a:pPr>
+            <a:r>
+              <a:rPr lang="en-US" altLang="ja-JP" sz="1000" dirty="0">
+                <a:latin typeface="メイリオ" panose="020B0604030504040204" pitchFamily="50" charset="-128"/>
+                <a:ea typeface="メイリオ" panose="020B0604030504040204" pitchFamily="50" charset="-128"/>
+              </a:rPr>
+              <a:t>LINE</a:t>
+            </a:r>
+            <a:r>
+              <a:rPr lang="ja-JP" altLang="en-US" sz="1000" dirty="0">
+                <a:latin typeface="メイリオ" panose="020B0604030504040204" pitchFamily="50" charset="-128"/>
+                <a:ea typeface="メイリオ" panose="020B0604030504040204" pitchFamily="50" charset="-128"/>
+              </a:rPr>
+              <a:t> </a:t>
+            </a:r>
+            <a:r>
+              <a:rPr lang="en-US" altLang="ja-JP" sz="1000" dirty="0">
+                <a:latin typeface="メイリオ" panose="020B0604030504040204" pitchFamily="50" charset="-128"/>
+                <a:ea typeface="メイリオ" panose="020B0604030504040204" pitchFamily="50" charset="-128"/>
+              </a:rPr>
+              <a:t>API</a:t>
+            </a:r>
+            <a:endParaRPr kumimoji="1" lang="ja-JP" altLang="en-US" sz="1000" kern="1200" dirty="0">
+              <a:latin typeface="メイリオ" panose="020B0604030504040204" pitchFamily="50" charset="-128"/>
+              <a:ea typeface="メイリオ" panose="020B0604030504040204" pitchFamily="50" charset="-128"/>
+            </a:endParaRPr>
+          </a:p>
+        </p:txBody>
+      </p:sp>
+      <p:sp>
+        <p:nvSpPr>
+          <p:cNvPr id="7" name="正方形/長方形 6">
+            <a:extLst>
+              <a:ext uri="{FF2B5EF4-FFF2-40B4-BE49-F238E27FC236}">
+                <a16:creationId xmlns:a16="http://schemas.microsoft.com/office/drawing/2014/main" id="{BFE878AF-9155-C011-C36E-3107D1F6B04E}"/>
+              </a:ext>
+            </a:extLst>
+          </p:cNvPr>
+          <p:cNvSpPr/>
+          <p:nvPr/>
+        </p:nvSpPr>
+        <p:spPr>
+          <a:xfrm>
+            <a:off x="4915470" y="730955"/>
+            <a:ext cx="829618" cy="435690"/>
+          </a:xfrm>
+          <a:prstGeom prst="rect">
+            <a:avLst/>
+          </a:prstGeom>
+          <a:solidFill>
+            <a:srgbClr val="C6D9F1"/>
+          </a:solidFill>
+          <a:ln w="9525">
+            <a:solidFill>
+              <a:schemeClr val="accent1"/>
+            </a:solidFill>
+            <a:prstDash val="solid"/>
+          </a:ln>
+          <a:effectLst/>
+        </p:spPr>
+        <p:style>
+          <a:lnRef idx="1">
+            <a:schemeClr val="accent1"/>
+          </a:lnRef>
+          <a:fillRef idx="3">
+            <a:schemeClr val="accent1"/>
+          </a:fillRef>
+          <a:effectRef idx="2">
+            <a:schemeClr val="accent1"/>
+          </a:effectRef>
+          <a:fontRef idx="minor">
+            <a:schemeClr val="lt1"/>
+          </a:fontRef>
+        </p:style>
+        <p:txBody>
+          <a:bodyPr rtlCol="0" anchor="ctr"/>
+          <a:lstStyle/>
+          <a:p>
+            <a:pPr algn="ctr"/>
+            <a:r>
+              <a:rPr lang="en-US" altLang="ja-JP" sz="1000" dirty="0">
+                <a:solidFill>
+                  <a:schemeClr val="tx1"/>
+                </a:solidFill>
+                <a:latin typeface="メイリオ" panose="020B0604030504040204" pitchFamily="50" charset="-128"/>
+                <a:ea typeface="メイリオ" panose="020B0604030504040204" pitchFamily="50" charset="-128"/>
+              </a:rPr>
+              <a:t>LINE</a:t>
+            </a:r>
+            <a:r>
+              <a:rPr lang="ja-JP" altLang="en-US" sz="1000" dirty="0">
+                <a:solidFill>
+                  <a:schemeClr val="tx1"/>
+                </a:solidFill>
+                <a:latin typeface="メイリオ" panose="020B0604030504040204" pitchFamily="50" charset="-128"/>
+                <a:ea typeface="メイリオ" panose="020B0604030504040204" pitchFamily="50" charset="-128"/>
+              </a:rPr>
+              <a:t>公式アカウント</a:t>
+            </a:r>
+            <a:endParaRPr kumimoji="1" lang="ja-JP" altLang="en-US" sz="1000" dirty="0">
+              <a:solidFill>
+                <a:schemeClr val="tx1"/>
+              </a:solidFill>
+              <a:latin typeface="メイリオ" panose="020B0604030504040204" pitchFamily="50" charset="-128"/>
+              <a:ea typeface="メイリオ" panose="020B0604030504040204" pitchFamily="50" charset="-128"/>
+            </a:endParaRPr>
+          </a:p>
+        </p:txBody>
+      </p:sp>
+      <p:graphicFrame>
+        <p:nvGraphicFramePr>
+          <p:cNvPr id="9" name="図表 8">
+            <a:extLst>
+              <a:ext uri="{FF2B5EF4-FFF2-40B4-BE49-F238E27FC236}">
+                <a16:creationId xmlns:a16="http://schemas.microsoft.com/office/drawing/2014/main" id="{070F1D99-B035-C902-8074-181C1632DB64}"/>
+              </a:ext>
+            </a:extLst>
+          </p:cNvPr>
+          <p:cNvGraphicFramePr/>
+          <p:nvPr>
+            <p:extLst>
+              <p:ext uri="{D42A27DB-BD31-4B8C-83A1-F6EECF244321}">
+                <p14:modId xmlns:p14="http://schemas.microsoft.com/office/powerpoint/2010/main" val="558520007"/>
+              </p:ext>
+            </p:extLst>
+          </p:nvPr>
+        </p:nvGraphicFramePr>
+        <p:xfrm>
+          <a:off x="8529759" y="688315"/>
+          <a:ext cx="1376241" cy="1131931"/>
+        </p:xfrm>
+        <a:graphic>
+          <a:graphicData uri="http://schemas.openxmlformats.org/drawingml/2006/diagram">
+            <dgm:relIds xmlns:dgm="http://schemas.openxmlformats.org/drawingml/2006/diagram" xmlns:r="http://schemas.openxmlformats.org/officeDocument/2006/relationships" r:dm="rId3" r:lo="rId4" r:qs="rId5" r:cs="rId6"/>
+          </a:graphicData>
+        </a:graphic>
+      </p:graphicFrame>
+      <p:sp>
+        <p:nvSpPr>
+          <p:cNvPr id="11" name="正方形/長方形 10">
+            <a:extLst>
+              <a:ext uri="{FF2B5EF4-FFF2-40B4-BE49-F238E27FC236}">
+                <a16:creationId xmlns:a16="http://schemas.microsoft.com/office/drawing/2014/main" id="{03058F07-2A81-9D7D-4421-E80EB6D98CB7}"/>
+              </a:ext>
+            </a:extLst>
+          </p:cNvPr>
+          <p:cNvSpPr/>
+          <p:nvPr/>
+        </p:nvSpPr>
+        <p:spPr>
+          <a:xfrm>
+            <a:off x="6679050" y="730955"/>
+            <a:ext cx="829618" cy="435690"/>
+          </a:xfrm>
+          <a:prstGeom prst="rect">
+            <a:avLst/>
+          </a:prstGeom>
+          <a:noFill/>
+          <a:ln w="9525">
+            <a:solidFill>
+              <a:srgbClr val="4F81BD"/>
+            </a:solidFill>
+            <a:prstDash val="sysDash"/>
+          </a:ln>
+          <a:effectLst/>
+        </p:spPr>
+        <p:style>
+          <a:lnRef idx="1">
+            <a:schemeClr val="accent1"/>
+          </a:lnRef>
+          <a:fillRef idx="3">
+            <a:schemeClr val="accent1"/>
+          </a:fillRef>
+          <a:effectRef idx="2">
+            <a:schemeClr val="accent1"/>
+          </a:effectRef>
+          <a:fontRef idx="minor">
+            <a:schemeClr val="lt1"/>
+          </a:fontRef>
+        </p:style>
+        <p:txBody>
+          <a:bodyPr rtlCol="0" anchor="ctr"/>
+          <a:lstStyle/>
+          <a:p>
+            <a:pPr algn="ctr"/>
+            <a:r>
+              <a:rPr kumimoji="1" lang="ja-JP" altLang="en-US" sz="1000" dirty="0">
+                <a:solidFill>
+                  <a:schemeClr val="tx1"/>
+                </a:solidFill>
+                <a:latin typeface="メイリオ" panose="020B0604030504040204" pitchFamily="50" charset="-128"/>
+                <a:ea typeface="メイリオ" panose="020B0604030504040204" pitchFamily="50" charset="-128"/>
+              </a:rPr>
+              <a:t>オプション</a:t>
+            </a:r>
+            <a:endParaRPr kumimoji="1" lang="en-US" altLang="ja-JP" sz="1000" dirty="0">
+              <a:solidFill>
+                <a:schemeClr val="tx1"/>
+              </a:solidFill>
+              <a:latin typeface="メイリオ" panose="020B0604030504040204" pitchFamily="50" charset="-128"/>
+              <a:ea typeface="メイリオ" panose="020B0604030504040204" pitchFamily="50" charset="-128"/>
+            </a:endParaRPr>
+          </a:p>
+          <a:p>
+            <a:pPr algn="ctr"/>
+            <a:r>
+              <a:rPr kumimoji="1" lang="ja-JP" altLang="en-US" sz="1000" dirty="0">
+                <a:solidFill>
+                  <a:schemeClr val="tx1"/>
+                </a:solidFill>
+                <a:latin typeface="メイリオ" panose="020B0604030504040204" pitchFamily="50" charset="-128"/>
+                <a:ea typeface="メイリオ" panose="020B0604030504040204" pitchFamily="50" charset="-128"/>
+              </a:rPr>
+              <a:t>商材</a:t>
+            </a:r>
+          </a:p>
+        </p:txBody>
+      </p:sp>
+      <p:sp>
+        <p:nvSpPr>
+          <p:cNvPr id="13" name="テキスト ボックス 12">
+            <a:extLst>
+              <a:ext uri="{FF2B5EF4-FFF2-40B4-BE49-F238E27FC236}">
+                <a16:creationId xmlns:a16="http://schemas.microsoft.com/office/drawing/2014/main" id="{AC603382-2AAB-8564-CC3B-DF58099DC1DC}"/>
+              </a:ext>
+            </a:extLst>
+          </p:cNvPr>
+          <p:cNvSpPr txBox="1"/>
+          <p:nvPr/>
+        </p:nvSpPr>
+        <p:spPr>
+          <a:xfrm>
+            <a:off x="8473303" y="6597352"/>
+            <a:ext cx="1032604" cy="215444"/>
+          </a:xfrm>
+          <a:prstGeom prst="rect">
+            <a:avLst/>
+          </a:prstGeom>
+          <a:noFill/>
+        </p:spPr>
+        <p:txBody>
+          <a:bodyPr wrap="square">
+            <a:spAutoFit/>
+          </a:bodyPr>
+          <a:lstStyle/>
+          <a:p>
+            <a:r>
+              <a:rPr lang="ja-JP" altLang="en-US" sz="800" dirty="0">
+                <a:solidFill>
+                  <a:schemeClr val="bg1"/>
+                </a:solidFill>
+                <a:latin typeface="メイリオ" panose="020B0604030504040204" pitchFamily="50" charset="-128"/>
+                <a:ea typeface="メイリオ" panose="020B0604030504040204" pitchFamily="50" charset="-128"/>
+              </a:rPr>
+              <a:t>出典：代理店情報</a:t>
+            </a:r>
+          </a:p>
+        </p:txBody>
+      </p:sp>
+    </p:spTree>
+  </p:cSld>
+  <p:clrMapOvr>
+    <a:masterClrMapping/>
+  </p:clrMapOvr>
+</p:sld>
+</file>
+
+<file path=ppt/slides/slide12.xml><?xml version="1.0" encoding="utf-8"?>
+<p:sld xmlns:a="http://schemas.openxmlformats.org/drawingml/2006/main" xmlns:r="http://schemas.openxmlformats.org/officeDocument/2006/relationships" xmlns:p="http://schemas.openxmlformats.org/presentationml/2006/main" show="0">
+  <p:cSld>
+    <p:spTree>
+      <p:nvGrpSpPr>
+        <p:cNvPr id="1" name=""/>
+        <p:cNvGrpSpPr/>
+        <p:nvPr/>
+      </p:nvGrpSpPr>
+      <p:grpSpPr>
+        <a:xfrm>
+          <a:off x="0" y="0"/>
+          <a:ext cx="0" cy="0"/>
+          <a:chOff x="0" y="0"/>
+          <a:chExt cx="0" cy="0"/>
+        </a:xfrm>
+      </p:grpSpPr>
+      <p:sp>
+        <p:nvSpPr>
+          <p:cNvPr id="40" name="Google Shape;40;p3"/>
+          <p:cNvSpPr/>
+          <p:nvPr/>
+        </p:nvSpPr>
+        <p:spPr>
+          <a:xfrm>
+            <a:off x="292801" y="730955"/>
+            <a:ext cx="1296144" cy="435690"/>
+          </a:xfrm>
+          <a:prstGeom prst="rect">
+            <a:avLst/>
+          </a:prstGeom>
+          <a:solidFill>
+            <a:schemeClr val="dk2"/>
+          </a:solidFill>
+          <a:ln w="9525" cap="flat" cmpd="sng">
+            <a:solidFill>
+              <a:srgbClr val="4A7DBA"/>
+            </a:solidFill>
+            <a:prstDash val="solid"/>
+            <a:round/>
+            <a:headEnd type="none" w="sm" len="sm"/>
+            <a:tailEnd type="none" w="sm" len="sm"/>
+          </a:ln>
+        </p:spPr>
+        <p:txBody>
+          <a:bodyPr spcFirstLastPara="1" wrap="square" lIns="91425" tIns="45700" rIns="91425" bIns="45700" anchor="ctr" anchorCtr="0">
+            <a:noAutofit/>
+          </a:bodyPr>
+          <a:lstStyle/>
+          <a:p>
+            <a:pPr marL="0" marR="0" lvl="0" indent="0" algn="ctr" rtl="0">
+              <a:spcBef>
+                <a:spcPts val="0"/>
+              </a:spcBef>
+              <a:spcAft>
+                <a:spcPts val="0"/>
+              </a:spcAft>
+              <a:buNone/>
+            </a:pPr>
+            <a:r>
+              <a:rPr lang="ja-JP" sz="1800" b="0" i="0" u="none" strike="noStrike" cap="none">
+                <a:solidFill>
+                  <a:schemeClr val="lt1"/>
+                </a:solidFill>
+                <a:latin typeface="メイリオ"/>
+                <a:ea typeface="Meiryo"/>
+                <a:cs typeface="Meiryo"/>
+                <a:sym typeface="Meiryo"/>
+              </a:rPr>
+              <a:t>対象業界</a:t>
+            </a:r>
+            <a:endParaRPr/>
+          </a:p>
+        </p:txBody>
+      </p:sp>
+      <p:sp>
+        <p:nvSpPr>
+          <p:cNvPr id="43" name="Google Shape;43;p3"/>
+          <p:cNvSpPr/>
+          <p:nvPr/>
+        </p:nvSpPr>
+        <p:spPr>
+          <a:xfrm>
+            <a:off x="1594068" y="730955"/>
+            <a:ext cx="2926883" cy="435690"/>
+          </a:xfrm>
+          <a:prstGeom prst="rect">
+            <a:avLst/>
+          </a:prstGeom>
+          <a:noFill/>
+          <a:ln w="9525" cap="flat" cmpd="sng">
+            <a:solidFill>
+              <a:srgbClr val="4A7DBA"/>
+            </a:solidFill>
+            <a:prstDash val="solid"/>
+            <a:round/>
+            <a:headEnd type="none" w="sm" len="sm"/>
+            <a:tailEnd type="none" w="sm" len="sm"/>
+          </a:ln>
+        </p:spPr>
+        <p:txBody>
+          <a:bodyPr spcFirstLastPara="1" wrap="square" lIns="91425" tIns="45700" rIns="91425" bIns="45700" anchor="ctr" anchorCtr="0">
+            <a:noAutofit/>
+          </a:bodyPr>
+          <a:lstStyle/>
+          <a:p>
+            <a:pPr marL="0" marR="0" lvl="0" indent="0" algn="ctr" rtl="0">
+              <a:spcBef>
+                <a:spcPts val="0"/>
+              </a:spcBef>
+              <a:spcAft>
+                <a:spcPts val="0"/>
+              </a:spcAft>
+              <a:buNone/>
+            </a:pPr>
+            <a:r>
+              <a:rPr lang="ja-JP" sz="1300" b="0" i="0" u="none" strike="noStrike" cap="none">
+                <a:solidFill>
+                  <a:schemeClr val="dk1"/>
+                </a:solidFill>
+                <a:latin typeface="メイリオ"/>
+                <a:ea typeface="Meiryo"/>
+                <a:cs typeface="Meiryo"/>
+                <a:sym typeface="Meiryo"/>
+              </a:rPr>
+              <a:t>友だち獲得を強化したい全業種</a:t>
+            </a:r>
+            <a:endParaRPr/>
+          </a:p>
+        </p:txBody>
+      </p:sp>
+      <p:sp>
+        <p:nvSpPr>
+          <p:cNvPr id="44" name="Google Shape;44;p3"/>
+          <p:cNvSpPr txBox="1"/>
+          <p:nvPr/>
+        </p:nvSpPr>
+        <p:spPr>
+          <a:xfrm>
+            <a:off x="3296816" y="6597352"/>
+            <a:ext cx="6209091" cy="215444"/>
+          </a:xfrm>
+          <a:prstGeom prst="rect">
+            <a:avLst/>
+          </a:prstGeom>
+          <a:noFill/>
+          <a:ln>
+            <a:noFill/>
+          </a:ln>
+        </p:spPr>
+        <p:txBody>
+          <a:bodyPr spcFirstLastPara="1" wrap="square" lIns="91425" tIns="45700" rIns="91425" bIns="45700" anchor="t" anchorCtr="0">
+            <a:spAutoFit/>
+          </a:bodyPr>
+          <a:lstStyle/>
+          <a:p>
+            <a:pPr marL="0" marR="0" lvl="0" indent="0" algn="l" rtl="0">
+              <a:spcBef>
+                <a:spcPts val="0"/>
+              </a:spcBef>
+              <a:spcAft>
+                <a:spcPts val="0"/>
+              </a:spcAft>
+              <a:buNone/>
+            </a:pPr>
+            <a:r>
+              <a:rPr lang="ja-JP" sz="800" b="0" i="0" u="none" strike="noStrike" cap="none">
+                <a:solidFill>
+                  <a:schemeClr val="lt1"/>
+                </a:solidFill>
+                <a:latin typeface="メイリオ"/>
+                <a:ea typeface="Meiryo"/>
+                <a:cs typeface="Meiryo"/>
+                <a:sym typeface="Meiryo"/>
+              </a:rPr>
+              <a:t>出典：https://workers-hub.box.com/s/odilqpe44tp398zlfko148yggcgj68ny</a:t>
+            </a:r>
+            <a:endParaRPr sz="800">
+              <a:solidFill>
+                <a:schemeClr val="lt1"/>
+              </a:solidFill>
+              <a:latin typeface="Meiryo"/>
+              <a:ea typeface="Meiryo"/>
+              <a:cs typeface="Meiryo"/>
+              <a:sym typeface="Meiryo"/>
+            </a:endParaRPr>
+          </a:p>
+        </p:txBody>
+      </p:sp>
+      <p:sp>
+        <p:nvSpPr>
+          <p:cNvPr id="45" name="Google Shape;45;p3"/>
+          <p:cNvSpPr/>
+          <p:nvPr/>
+        </p:nvSpPr>
+        <p:spPr>
+          <a:xfrm>
+            <a:off x="0" y="1234746"/>
+            <a:ext cx="9906000" cy="672259"/>
+          </a:xfrm>
+          <a:prstGeom prst="rect">
+            <a:avLst/>
+          </a:prstGeom>
+          <a:solidFill>
+            <a:srgbClr val="C5D8F1"/>
+          </a:solidFill>
+          <a:ln>
+            <a:noFill/>
+          </a:ln>
+        </p:spPr>
+        <p:txBody>
+          <a:bodyPr spcFirstLastPara="1" wrap="square" lIns="91425" tIns="45700" rIns="91425" bIns="45700" anchor="ctr" anchorCtr="0">
+            <a:noAutofit/>
+          </a:bodyPr>
+          <a:lstStyle/>
+          <a:p>
+            <a:pPr marL="0" marR="0" lvl="0" indent="0" algn="ctr" rtl="0">
+              <a:spcBef>
+                <a:spcPts val="0"/>
+              </a:spcBef>
+              <a:spcAft>
+                <a:spcPts val="0"/>
+              </a:spcAft>
+              <a:buNone/>
+            </a:pPr>
+            <a:r>
+              <a:rPr lang="ja-JP" sz="1600" b="1">
+                <a:solidFill>
+                  <a:srgbClr val="004DE6"/>
+                </a:solidFill>
+                <a:latin typeface="メイリオ"/>
+                <a:ea typeface="Meiryo"/>
+                <a:cs typeface="Meiryo"/>
+                <a:sym typeface="Meiryo"/>
+              </a:rPr>
+              <a:t>　　　　　　</a:t>
+            </a:r>
+            <a:endParaRPr sz="1800" b="1">
+              <a:solidFill>
+                <a:srgbClr val="004DE6"/>
+              </a:solidFill>
+              <a:latin typeface="Meiryo"/>
+              <a:ea typeface="Meiryo"/>
+              <a:cs typeface="Meiryo"/>
+              <a:sym typeface="Meiryo"/>
+            </a:endParaRPr>
+          </a:p>
+        </p:txBody>
+      </p:sp>
+      <p:sp>
+        <p:nvSpPr>
+          <p:cNvPr id="46" name="Google Shape;46;p3"/>
+          <p:cNvSpPr/>
+          <p:nvPr/>
+        </p:nvSpPr>
+        <p:spPr>
+          <a:xfrm>
+            <a:off x="1089832" y="1437370"/>
+            <a:ext cx="7031520" cy="338554"/>
+          </a:xfrm>
+          <a:prstGeom prst="rect">
+            <a:avLst/>
+          </a:prstGeom>
+          <a:noFill/>
+          <a:ln>
+            <a:noFill/>
+          </a:ln>
+        </p:spPr>
+        <p:txBody>
+          <a:bodyPr spcFirstLastPara="1" wrap="square" lIns="91425" tIns="45700" rIns="91425" bIns="45700" anchor="t" anchorCtr="0">
+            <a:spAutoFit/>
+          </a:bodyPr>
+          <a:lstStyle/>
+          <a:p>
+            <a:pPr marL="0" marR="0" lvl="0" indent="0" algn="l" rtl="0">
+              <a:spcBef>
+                <a:spcPts val="0"/>
+              </a:spcBef>
+              <a:spcAft>
+                <a:spcPts val="0"/>
+              </a:spcAft>
+              <a:buNone/>
+            </a:pPr>
+            <a:r>
+              <a:rPr lang="ja-JP" sz="1600" b="1" dirty="0">
+                <a:solidFill>
+                  <a:srgbClr val="004DE6"/>
+                </a:solidFill>
+                <a:latin typeface="メイリオ"/>
+                <a:ea typeface="Meiryo"/>
+                <a:cs typeface="Meiryo"/>
+                <a:sym typeface="Meiryo"/>
+              </a:rPr>
+              <a:t>【LINEオープンキャンペーン】26年10-12月 期間限定キャンペーン</a:t>
+            </a:r>
+            <a:endParaRPr sz="1600" b="1" dirty="0">
+              <a:solidFill>
+                <a:srgbClr val="004DE6"/>
+              </a:solidFill>
+              <a:latin typeface="Meiryo"/>
+              <a:ea typeface="Meiryo"/>
+              <a:cs typeface="Meiryo"/>
+              <a:sym typeface="Meiryo"/>
+            </a:endParaRPr>
+          </a:p>
+        </p:txBody>
+      </p:sp>
+      <p:sp>
+        <p:nvSpPr>
+          <p:cNvPr id="47" name="Google Shape;47;p3"/>
+          <p:cNvSpPr txBox="1"/>
+          <p:nvPr/>
+        </p:nvSpPr>
+        <p:spPr>
+          <a:xfrm>
+            <a:off x="182880" y="88175"/>
+            <a:ext cx="7512385" cy="365091"/>
+          </a:xfrm>
+          <a:prstGeom prst="rect">
+            <a:avLst/>
+          </a:prstGeom>
+          <a:noFill/>
+          <a:ln>
+            <a:noFill/>
+          </a:ln>
+        </p:spPr>
+        <p:txBody>
+          <a:bodyPr spcFirstLastPara="1" wrap="square" lIns="91425" tIns="72000" rIns="91425" bIns="45700" anchor="t" anchorCtr="0">
+            <a:spAutoFit/>
+          </a:bodyPr>
+          <a:lstStyle/>
+          <a:p>
+            <a:pPr marL="0" marR="0" lvl="0" indent="0" algn="l" rtl="0">
+              <a:spcBef>
+                <a:spcPts val="0"/>
+              </a:spcBef>
+              <a:spcAft>
+                <a:spcPts val="0"/>
+              </a:spcAft>
+              <a:buClr>
+                <a:schemeClr val="dk1"/>
+              </a:buClr>
+              <a:buSzPts val="1600"/>
+              <a:buFont typeface="Arial"/>
+              <a:buNone/>
+            </a:pPr>
+            <a:r>
+              <a:rPr lang="ja-JP" sz="1600" b="0" u="none">
+                <a:solidFill>
+                  <a:schemeClr val="dk1"/>
+                </a:solidFill>
+                <a:latin typeface="メイリオ"/>
+                <a:ea typeface="Meiryo"/>
+                <a:cs typeface="Meiryo"/>
+                <a:sym typeface="Meiryo"/>
+              </a:rPr>
+              <a:t>    今後のアップデート情報</a:t>
+            </a:r>
+            <a:endParaRPr sz="1600" b="0" u="none">
+              <a:solidFill>
+                <a:schemeClr val="dk1"/>
+              </a:solidFill>
+              <a:latin typeface="Meiryo"/>
+              <a:ea typeface="Meiryo"/>
+              <a:cs typeface="Meiryo"/>
+              <a:sym typeface="Meiryo"/>
+            </a:endParaRPr>
+          </a:p>
+        </p:txBody>
+      </p:sp>
+      <p:sp>
+        <p:nvSpPr>
+          <p:cNvPr id="50" name="Google Shape;50;p3"/>
+          <p:cNvSpPr/>
+          <p:nvPr/>
+        </p:nvSpPr>
+        <p:spPr>
+          <a:xfrm>
+            <a:off x="0" y="1890267"/>
+            <a:ext cx="9906000" cy="733579"/>
+          </a:xfrm>
+          <a:prstGeom prst="rect">
+            <a:avLst/>
+          </a:prstGeom>
+          <a:solidFill>
+            <a:srgbClr val="F2F2F2"/>
+          </a:solidFill>
+          <a:ln>
+            <a:noFill/>
+          </a:ln>
+        </p:spPr>
+        <p:txBody>
+          <a:bodyPr spcFirstLastPara="1" wrap="square" lIns="91425" tIns="45700" rIns="91425" bIns="45700" anchor="ctr" anchorCtr="0">
+            <a:noAutofit/>
+          </a:bodyPr>
+          <a:lstStyle/>
+          <a:p>
+            <a:pPr marL="0" marR="0" lvl="0" indent="0" algn="ctr" rtl="0">
+              <a:spcBef>
+                <a:spcPts val="0"/>
+              </a:spcBef>
+              <a:spcAft>
+                <a:spcPts val="0"/>
+              </a:spcAft>
+              <a:buNone/>
+            </a:pPr>
+            <a:endParaRPr sz="1200">
+              <a:solidFill>
+                <a:schemeClr val="dk1"/>
+              </a:solidFill>
+              <a:latin typeface="Meiryo"/>
+              <a:ea typeface="Meiryo"/>
+              <a:cs typeface="Meiryo"/>
+              <a:sym typeface="Meiryo"/>
+            </a:endParaRPr>
+          </a:p>
+        </p:txBody>
+      </p:sp>
+      <p:sp>
+        <p:nvSpPr>
+          <p:cNvPr id="51" name="Google Shape;51;p3"/>
+          <p:cNvSpPr/>
+          <p:nvPr/>
+        </p:nvSpPr>
+        <p:spPr>
+          <a:xfrm>
+            <a:off x="544108" y="1961282"/>
+            <a:ext cx="8817783" cy="646331"/>
+          </a:xfrm>
+          <a:prstGeom prst="rect">
+            <a:avLst/>
+          </a:prstGeom>
+          <a:noFill/>
+          <a:ln>
+            <a:noFill/>
+          </a:ln>
+        </p:spPr>
+        <p:txBody>
+          <a:bodyPr spcFirstLastPara="1" wrap="square" lIns="91425" tIns="45700" rIns="91425" bIns="45700" anchor="t" anchorCtr="0">
+            <a:spAutoFit/>
+          </a:bodyPr>
+          <a:lstStyle/>
+          <a:p>
+            <a:pPr marL="0" marR="0" lvl="0" indent="0" algn="ctr" rtl="0">
+              <a:spcBef>
+                <a:spcPts val="0"/>
+              </a:spcBef>
+              <a:spcAft>
+                <a:spcPts val="0"/>
+              </a:spcAft>
+              <a:buNone/>
+            </a:pPr>
+            <a:r>
+              <a:rPr lang="ja-JP" sz="1200" b="1" dirty="0">
+                <a:solidFill>
+                  <a:schemeClr val="dk1"/>
+                </a:solidFill>
+                <a:latin typeface="メイリオ"/>
+                <a:ea typeface="Meiryo"/>
+                <a:cs typeface="Meiryo"/>
+                <a:sym typeface="Meiryo"/>
+              </a:rPr>
+              <a:t>2026年10月20日開始〜12月25日までに終了する案件限定で、</a:t>
+            </a:r>
+            <a:endParaRPr sz="1200" b="1" dirty="0">
+              <a:solidFill>
+                <a:schemeClr val="dk1"/>
+              </a:solidFill>
+              <a:latin typeface="Meiryo"/>
+              <a:ea typeface="Meiryo"/>
+              <a:cs typeface="Meiryo"/>
+              <a:sym typeface="Meiryo"/>
+            </a:endParaRPr>
+          </a:p>
+          <a:p>
+            <a:pPr marL="0" marR="0" lvl="0" indent="0" algn="ctr" rtl="0">
+              <a:spcBef>
+                <a:spcPts val="0"/>
+              </a:spcBef>
+              <a:spcAft>
+                <a:spcPts val="0"/>
+              </a:spcAft>
+              <a:buNone/>
+            </a:pPr>
+            <a:r>
+              <a:rPr lang="ja-JP" sz="1200" b="1" dirty="0">
+                <a:solidFill>
+                  <a:schemeClr val="dk1"/>
+                </a:solidFill>
+                <a:latin typeface="メイリオ"/>
+                <a:ea typeface="Meiryo"/>
+                <a:cs typeface="Meiryo"/>
+                <a:sym typeface="Meiryo"/>
+              </a:rPr>
+              <a:t>特別価格・特別掲載期間・特別通数の3特典が適用される期間限定キャンペーン。</a:t>
+            </a:r>
+            <a:endParaRPr dirty="0"/>
+          </a:p>
+          <a:p>
+            <a:pPr marL="0" marR="0" lvl="0" indent="0" algn="ctr" rtl="0">
+              <a:spcBef>
+                <a:spcPts val="0"/>
+              </a:spcBef>
+              <a:spcAft>
+                <a:spcPts val="0"/>
+              </a:spcAft>
+              <a:buNone/>
+            </a:pPr>
+            <a:r>
+              <a:rPr lang="ja-JP" sz="1200" b="1" dirty="0">
+                <a:solidFill>
+                  <a:schemeClr val="dk1"/>
+                </a:solidFill>
+                <a:latin typeface="メイリオ"/>
+                <a:ea typeface="Meiryo"/>
+                <a:cs typeface="Meiryo"/>
+                <a:sym typeface="Meiryo"/>
+              </a:rPr>
+              <a:t>友だち獲得を一気に伸ばしたいクライアントへの提案材料になる。</a:t>
+            </a:r>
+            <a:endParaRPr sz="1400" b="1" dirty="0">
+              <a:solidFill>
+                <a:schemeClr val="dk1"/>
+              </a:solidFill>
+              <a:latin typeface="Meiryo"/>
+              <a:ea typeface="Meiryo"/>
+              <a:cs typeface="Meiryo"/>
+              <a:sym typeface="Meiryo"/>
+            </a:endParaRPr>
+          </a:p>
+        </p:txBody>
+      </p:sp>
+      <p:pic>
+        <p:nvPicPr>
+          <p:cNvPr id="62" name="Google Shape;62;p3" descr="LINE公式アカウントのロゴの使用方法とは？種類やダウンロード方法、利用時の注意点を紹介 | Mico（ミコ）"/>
+          <p:cNvPicPr preferRelativeResize="0"/>
+          <p:nvPr/>
+        </p:nvPicPr>
+        <p:blipFill rotWithShape="1">
+          <a:blip r:embed="rId2">
+            <a:alphaModFix/>
+          </a:blip>
+          <a:srcRect/>
+          <a:stretch/>
+        </p:blipFill>
+        <p:spPr>
+          <a:xfrm>
+            <a:off x="351381" y="1234746"/>
+            <a:ext cx="656177" cy="655521"/>
+          </a:xfrm>
+          <a:prstGeom prst="rect">
+            <a:avLst/>
+          </a:prstGeom>
+          <a:noFill/>
+          <a:ln>
+            <a:noFill/>
+          </a:ln>
+        </p:spPr>
+      </p:pic>
+      <p:sp>
+        <p:nvSpPr>
+          <p:cNvPr id="3" name="正方形/長方形 2">
+            <a:extLst>
+              <a:ext uri="{FF2B5EF4-FFF2-40B4-BE49-F238E27FC236}">
+                <a16:creationId xmlns:a16="http://schemas.microsoft.com/office/drawing/2014/main" id="{FDC2FD67-A62F-6E18-8EDA-DB1187DC9A48}"/>
+              </a:ext>
+            </a:extLst>
+          </p:cNvPr>
+          <p:cNvSpPr/>
+          <p:nvPr/>
+        </p:nvSpPr>
+        <p:spPr>
+          <a:xfrm>
+            <a:off x="7560840" y="730955"/>
+            <a:ext cx="829618" cy="435690"/>
+          </a:xfrm>
+          <a:prstGeom prst="rect">
+            <a:avLst/>
+          </a:prstGeom>
+          <a:solidFill>
+            <a:schemeClr val="bg1"/>
+          </a:solidFill>
+          <a:ln w="9525">
+            <a:solidFill>
+              <a:srgbClr val="4F81BD"/>
+            </a:solidFill>
+            <a:prstDash val="sysDash"/>
+          </a:ln>
+          <a:effectLst/>
+        </p:spPr>
+        <p:style>
+          <a:lnRef idx="1">
+            <a:schemeClr val="accent1"/>
+          </a:lnRef>
+          <a:fillRef idx="3">
+            <a:schemeClr val="accent1"/>
+          </a:fillRef>
+          <a:effectRef idx="2">
+            <a:schemeClr val="accent1"/>
+          </a:effectRef>
+          <a:fontRef idx="minor">
+            <a:schemeClr val="lt1"/>
+          </a:fontRef>
+        </p:style>
+        <p:txBody>
+          <a:bodyPr rtlCol="0" anchor="ctr"/>
+          <a:lstStyle/>
+          <a:p>
+            <a:pPr algn="ctr"/>
+            <a:r>
+              <a:rPr lang="ja-JP" altLang="en-US" sz="1200" dirty="0">
+                <a:solidFill>
+                  <a:schemeClr val="tx1"/>
+                </a:solidFill>
+                <a:latin typeface="メイリオ" panose="020B0604030504040204" pitchFamily="50" charset="-128"/>
+                <a:ea typeface="メイリオ" panose="020B0604030504040204" pitchFamily="50" charset="-128"/>
+              </a:rPr>
+              <a:t>その他</a:t>
+            </a:r>
+            <a:endParaRPr kumimoji="1" lang="ja-JP" altLang="en-US" sz="1200" dirty="0">
+              <a:solidFill>
+                <a:schemeClr val="tx1"/>
+              </a:solidFill>
+              <a:latin typeface="メイリオ" panose="020B0604030504040204" pitchFamily="50" charset="-128"/>
+              <a:ea typeface="メイリオ" panose="020B0604030504040204" pitchFamily="50" charset="-128"/>
+            </a:endParaRPr>
+          </a:p>
+        </p:txBody>
+      </p:sp>
+      <p:sp>
+        <p:nvSpPr>
+          <p:cNvPr id="6" name="正方形/長方形 5">
+            <a:extLst>
+              <a:ext uri="{FF2B5EF4-FFF2-40B4-BE49-F238E27FC236}">
+                <a16:creationId xmlns:a16="http://schemas.microsoft.com/office/drawing/2014/main" id="{A047198E-5C74-A939-E628-2EA5E2D7BDAD}"/>
+              </a:ext>
+            </a:extLst>
+          </p:cNvPr>
+          <p:cNvSpPr/>
+          <p:nvPr/>
+        </p:nvSpPr>
+        <p:spPr>
+          <a:xfrm>
+            <a:off x="5797260" y="730955"/>
+            <a:ext cx="829618" cy="435690"/>
+          </a:xfrm>
+          <a:prstGeom prst="rect">
+            <a:avLst/>
+          </a:prstGeom>
+          <a:solidFill>
+            <a:schemeClr val="bg1"/>
+          </a:solidFill>
+          <a:ln w="9525" cap="flat" cmpd="sng" algn="ctr">
+            <a:solidFill>
+              <a:srgbClr val="4F81BD"/>
+            </a:solidFill>
+            <a:prstDash val="sysDash"/>
+          </a:ln>
+          <a:effectLst/>
+        </p:spPr>
+        <p:txBody>
+          <a:bodyPr rtlCol="0" anchor="ctr"/>
+          <a:lstStyle/>
+          <a:p>
+            <a:pPr algn="ctr">
+              <a:buClrTx/>
+              <a:buFontTx/>
+              <a:buNone/>
+            </a:pPr>
+            <a:r>
+              <a:rPr kumimoji="1" lang="ja-JP" altLang="en-US" sz="1000" kern="1200" dirty="0">
+                <a:latin typeface="メイリオ" panose="020B0604030504040204" pitchFamily="50" charset="-128"/>
+                <a:ea typeface="メイリオ" panose="020B0604030504040204" pitchFamily="50" charset="-128"/>
+              </a:rPr>
+              <a:t>開発</a:t>
+            </a:r>
+            <a:endParaRPr kumimoji="1" lang="en-US" altLang="ja-JP" sz="1000" kern="1200" dirty="0">
+              <a:latin typeface="メイリオ" panose="020B0604030504040204" pitchFamily="50" charset="-128"/>
+              <a:ea typeface="メイリオ" panose="020B0604030504040204" pitchFamily="50" charset="-128"/>
+            </a:endParaRPr>
+          </a:p>
+          <a:p>
+            <a:pPr algn="ctr">
+              <a:buClrTx/>
+              <a:buFontTx/>
+              <a:buNone/>
+            </a:pPr>
+            <a:r>
+              <a:rPr lang="en-US" altLang="ja-JP" sz="1000" dirty="0">
+                <a:latin typeface="メイリオ" panose="020B0604030504040204" pitchFamily="50" charset="-128"/>
+                <a:ea typeface="メイリオ" panose="020B0604030504040204" pitchFamily="50" charset="-128"/>
+              </a:rPr>
+              <a:t>LINE</a:t>
+            </a:r>
+            <a:r>
+              <a:rPr lang="ja-JP" altLang="en-US" sz="1000" dirty="0">
+                <a:latin typeface="メイリオ" panose="020B0604030504040204" pitchFamily="50" charset="-128"/>
+                <a:ea typeface="メイリオ" panose="020B0604030504040204" pitchFamily="50" charset="-128"/>
+              </a:rPr>
+              <a:t> </a:t>
+            </a:r>
+            <a:r>
+              <a:rPr lang="en-US" altLang="ja-JP" sz="1000" dirty="0">
+                <a:latin typeface="メイリオ" panose="020B0604030504040204" pitchFamily="50" charset="-128"/>
+                <a:ea typeface="メイリオ" panose="020B0604030504040204" pitchFamily="50" charset="-128"/>
+              </a:rPr>
+              <a:t>API</a:t>
+            </a:r>
+            <a:endParaRPr kumimoji="1" lang="ja-JP" altLang="en-US" sz="1000" kern="1200" dirty="0">
+              <a:latin typeface="メイリオ" panose="020B0604030504040204" pitchFamily="50" charset="-128"/>
+              <a:ea typeface="メイリオ" panose="020B0604030504040204" pitchFamily="50" charset="-128"/>
+            </a:endParaRPr>
+          </a:p>
+        </p:txBody>
+      </p:sp>
+      <p:sp>
+        <p:nvSpPr>
+          <p:cNvPr id="8" name="正方形/長方形 7">
+            <a:extLst>
+              <a:ext uri="{FF2B5EF4-FFF2-40B4-BE49-F238E27FC236}">
+                <a16:creationId xmlns:a16="http://schemas.microsoft.com/office/drawing/2014/main" id="{BB87F300-C517-8B6A-DECA-E2AC2F874676}"/>
+              </a:ext>
+            </a:extLst>
+          </p:cNvPr>
+          <p:cNvSpPr/>
+          <p:nvPr/>
+        </p:nvSpPr>
+        <p:spPr>
+          <a:xfrm>
+            <a:off x="4915470" y="730955"/>
+            <a:ext cx="829618" cy="435690"/>
+          </a:xfrm>
+          <a:prstGeom prst="rect">
+            <a:avLst/>
+          </a:prstGeom>
+          <a:solidFill>
+            <a:srgbClr val="C6D9F1"/>
+          </a:solidFill>
+          <a:ln w="9525">
+            <a:solidFill>
+              <a:schemeClr val="accent1"/>
+            </a:solidFill>
+            <a:prstDash val="solid"/>
+          </a:ln>
+          <a:effectLst/>
+        </p:spPr>
+        <p:style>
+          <a:lnRef idx="1">
+            <a:schemeClr val="accent1"/>
+          </a:lnRef>
+          <a:fillRef idx="3">
+            <a:schemeClr val="accent1"/>
+          </a:fillRef>
+          <a:effectRef idx="2">
+            <a:schemeClr val="accent1"/>
+          </a:effectRef>
+          <a:fontRef idx="minor">
+            <a:schemeClr val="lt1"/>
+          </a:fontRef>
+        </p:style>
+        <p:txBody>
+          <a:bodyPr rtlCol="0" anchor="ctr"/>
+          <a:lstStyle/>
+          <a:p>
+            <a:pPr algn="ctr"/>
+            <a:r>
+              <a:rPr lang="en-US" altLang="ja-JP" sz="1000" dirty="0">
+                <a:solidFill>
+                  <a:schemeClr val="tx1"/>
+                </a:solidFill>
+                <a:latin typeface="メイリオ" panose="020B0604030504040204" pitchFamily="50" charset="-128"/>
+                <a:ea typeface="メイリオ" panose="020B0604030504040204" pitchFamily="50" charset="-128"/>
+              </a:rPr>
+              <a:t>LINE</a:t>
+            </a:r>
+            <a:r>
+              <a:rPr lang="ja-JP" altLang="en-US" sz="1000" dirty="0">
+                <a:solidFill>
+                  <a:schemeClr val="tx1"/>
+                </a:solidFill>
+                <a:latin typeface="メイリオ" panose="020B0604030504040204" pitchFamily="50" charset="-128"/>
+                <a:ea typeface="メイリオ" panose="020B0604030504040204" pitchFamily="50" charset="-128"/>
+              </a:rPr>
+              <a:t>公式アカウント</a:t>
+            </a:r>
+            <a:endParaRPr kumimoji="1" lang="ja-JP" altLang="en-US" sz="1000" dirty="0">
+              <a:solidFill>
+                <a:schemeClr val="tx1"/>
+              </a:solidFill>
+              <a:latin typeface="メイリオ" panose="020B0604030504040204" pitchFamily="50" charset="-128"/>
+              <a:ea typeface="メイリオ" panose="020B0604030504040204" pitchFamily="50" charset="-128"/>
+            </a:endParaRPr>
+          </a:p>
+        </p:txBody>
+      </p:sp>
+      <p:graphicFrame>
+        <p:nvGraphicFramePr>
+          <p:cNvPr id="10" name="図表 9">
+            <a:extLst>
+              <a:ext uri="{FF2B5EF4-FFF2-40B4-BE49-F238E27FC236}">
+                <a16:creationId xmlns:a16="http://schemas.microsoft.com/office/drawing/2014/main" id="{434171DE-9398-A4AE-F24E-2F86F40A3619}"/>
+              </a:ext>
+            </a:extLst>
+          </p:cNvPr>
+          <p:cNvGraphicFramePr/>
+          <p:nvPr>
+            <p:extLst>
+              <p:ext uri="{D42A27DB-BD31-4B8C-83A1-F6EECF244321}">
+                <p14:modId xmlns:p14="http://schemas.microsoft.com/office/powerpoint/2010/main" val="4005745952"/>
+              </p:ext>
+            </p:extLst>
+          </p:nvPr>
+        </p:nvGraphicFramePr>
+        <p:xfrm>
+          <a:off x="8529759" y="688315"/>
+          <a:ext cx="1376241" cy="1131931"/>
+        </p:xfrm>
+        <a:graphic>
+          <a:graphicData uri="http://schemas.openxmlformats.org/drawingml/2006/diagram">
+            <dgm:relIds xmlns:dgm="http://schemas.openxmlformats.org/drawingml/2006/diagram" xmlns:r="http://schemas.openxmlformats.org/officeDocument/2006/relationships" r:dm="rId3" r:lo="rId4" r:qs="rId5" r:cs="rId6"/>
+          </a:graphicData>
+        </a:graphic>
+      </p:graphicFrame>
+      <p:sp>
+        <p:nvSpPr>
+          <p:cNvPr id="12" name="正方形/長方形 11">
+            <a:extLst>
+              <a:ext uri="{FF2B5EF4-FFF2-40B4-BE49-F238E27FC236}">
+                <a16:creationId xmlns:a16="http://schemas.microsoft.com/office/drawing/2014/main" id="{1E4429CE-620E-8CAE-98BB-55D6126937EB}"/>
+              </a:ext>
+            </a:extLst>
+          </p:cNvPr>
+          <p:cNvSpPr/>
+          <p:nvPr/>
+        </p:nvSpPr>
+        <p:spPr>
+          <a:xfrm>
+            <a:off x="6679050" y="730955"/>
+            <a:ext cx="829618" cy="435690"/>
+          </a:xfrm>
+          <a:prstGeom prst="rect">
+            <a:avLst/>
+          </a:prstGeom>
+          <a:noFill/>
+          <a:ln w="9525">
+            <a:solidFill>
+              <a:srgbClr val="4F81BD"/>
+            </a:solidFill>
+            <a:prstDash val="sysDash"/>
+          </a:ln>
+          <a:effectLst/>
+        </p:spPr>
+        <p:style>
+          <a:lnRef idx="1">
+            <a:schemeClr val="accent1"/>
+          </a:lnRef>
+          <a:fillRef idx="3">
+            <a:schemeClr val="accent1"/>
+          </a:fillRef>
+          <a:effectRef idx="2">
+            <a:schemeClr val="accent1"/>
+          </a:effectRef>
+          <a:fontRef idx="minor">
+            <a:schemeClr val="lt1"/>
+          </a:fontRef>
+        </p:style>
+        <p:txBody>
+          <a:bodyPr rtlCol="0" anchor="ctr"/>
+          <a:lstStyle/>
+          <a:p>
+            <a:pPr algn="ctr"/>
+            <a:r>
+              <a:rPr kumimoji="1" lang="ja-JP" altLang="en-US" sz="1000" dirty="0">
+                <a:solidFill>
+                  <a:schemeClr val="tx1"/>
+                </a:solidFill>
+                <a:latin typeface="メイリオ" panose="020B0604030504040204" pitchFamily="50" charset="-128"/>
+                <a:ea typeface="メイリオ" panose="020B0604030504040204" pitchFamily="50" charset="-128"/>
+              </a:rPr>
+              <a:t>オプション</a:t>
+            </a:r>
+            <a:endParaRPr kumimoji="1" lang="en-US" altLang="ja-JP" sz="1000" dirty="0">
+              <a:solidFill>
+                <a:schemeClr val="tx1"/>
+              </a:solidFill>
+              <a:latin typeface="メイリオ" panose="020B0604030504040204" pitchFamily="50" charset="-128"/>
+              <a:ea typeface="メイリオ" panose="020B0604030504040204" pitchFamily="50" charset="-128"/>
+            </a:endParaRPr>
+          </a:p>
+          <a:p>
+            <a:pPr algn="ctr"/>
+            <a:r>
+              <a:rPr kumimoji="1" lang="ja-JP" altLang="en-US" sz="1000" dirty="0">
+                <a:solidFill>
+                  <a:schemeClr val="tx1"/>
+                </a:solidFill>
+                <a:latin typeface="メイリオ" panose="020B0604030504040204" pitchFamily="50" charset="-128"/>
+                <a:ea typeface="メイリオ" panose="020B0604030504040204" pitchFamily="50" charset="-128"/>
+              </a:rPr>
+              <a:t>商材</a:t>
+            </a:r>
+          </a:p>
+        </p:txBody>
+      </p:sp>
+    </p:spTree>
+  </p:cSld>
+  <p:clrMapOvr>
+    <a:masterClrMapping/>
+  </p:clrMapOvr>
+</p:sld>
+</file>
+
 <file path=ppt/slides/slide2.xml><?xml version="1.0" encoding="utf-8"?>
 <p:sld xmlns:a="http://schemas.openxmlformats.org/drawingml/2006/main" xmlns:r="http://schemas.openxmlformats.org/officeDocument/2006/relationships" xmlns:p="http://schemas.openxmlformats.org/presentationml/2006/main">
   <p:cSld>
@@ -39093,7 +38065,7 @@
                 <a:cs typeface="Meiryo"/>
                 <a:sym typeface="Meiryo"/>
               </a:rPr>
-              <a:t>【LINEプロモーションスタンプ】アップデート内容・インパクト</a:t>
+              <a:t>【LINEプロモーションスタンプ】ダウンロード機会拡大のご案内</a:t>
             </a:r>
             <a:endParaRPr sz="1600" b="1" i="0" u="none" strike="noStrike" cap="none" dirty="0">
               <a:solidFill>
@@ -39163,7 +38135,7 @@
                 <a:cs typeface="Meiryo"/>
                 <a:sym typeface="Meiryo"/>
               </a:rPr>
-              <a:t>【LINEオープンキャンペーン】特典内容・実施スケジュール・注意点・ご利用条件</a:t>
+              <a:t>【LINEオープンキャンペーン】26年10-12月 期間限定キャンペーン</a:t>
             </a:r>
             <a:endParaRPr sz="1600" b="1" i="0" u="none" strike="noStrike" cap="none" dirty="0">
               <a:solidFill>
@@ -41532,1410 +40504,6 @@
 </file>
 
 <file path=ppt/slides/slide5.xml><?xml version="1.0" encoding="utf-8"?>
-<p:sld xmlns:a="http://schemas.openxmlformats.org/drawingml/2006/main" xmlns:r="http://schemas.openxmlformats.org/officeDocument/2006/relationships" xmlns:p="http://schemas.openxmlformats.org/presentationml/2006/main" show="0">
-  <p:cSld>
-    <p:spTree>
-      <p:nvGrpSpPr>
-        <p:cNvPr id="1" name=""/>
-        <p:cNvGrpSpPr/>
-        <p:nvPr/>
-      </p:nvGrpSpPr>
-      <p:grpSpPr>
-        <a:xfrm>
-          <a:off x="0" y="0"/>
-          <a:ext cx="0" cy="0"/>
-          <a:chOff x="0" y="0"/>
-          <a:chExt cx="0" cy="0"/>
-        </a:xfrm>
-      </p:grpSpPr>
-      <p:sp>
-        <p:nvSpPr>
-          <p:cNvPr id="40" name="Google Shape;40;p3"/>
-          <p:cNvSpPr/>
-          <p:nvPr/>
-        </p:nvSpPr>
-        <p:spPr>
-          <a:xfrm>
-            <a:off x="292801" y="730955"/>
-            <a:ext cx="1296144" cy="435690"/>
-          </a:xfrm>
-          <a:prstGeom prst="rect">
-            <a:avLst/>
-          </a:prstGeom>
-          <a:solidFill>
-            <a:schemeClr val="dk2"/>
-          </a:solidFill>
-          <a:ln w="9525" cap="flat" cmpd="sng">
-            <a:solidFill>
-              <a:srgbClr val="4A7DBA"/>
-            </a:solidFill>
-            <a:prstDash val="solid"/>
-            <a:round/>
-            <a:headEnd type="none" w="sm" len="sm"/>
-            <a:tailEnd type="none" w="sm" len="sm"/>
-          </a:ln>
-        </p:spPr>
-        <p:txBody>
-          <a:bodyPr spcFirstLastPara="1" wrap="square" lIns="91425" tIns="45700" rIns="91425" bIns="45700" anchor="ctr" anchorCtr="0">
-            <a:noAutofit/>
-          </a:bodyPr>
-          <a:lstStyle/>
-          <a:p>
-            <a:pPr marL="0" marR="0" lvl="0" indent="0" algn="ctr" rtl="0">
-              <a:spcBef>
-                <a:spcPts val="0"/>
-              </a:spcBef>
-              <a:spcAft>
-                <a:spcPts val="0"/>
-              </a:spcAft>
-              <a:buNone/>
-            </a:pPr>
-            <a:r>
-              <a:rPr lang="ja-JP" sz="1800" b="0" i="0" u="none" strike="noStrike" cap="none">
-                <a:solidFill>
-                  <a:schemeClr val="lt1"/>
-                </a:solidFill>
-                <a:latin typeface="メイリオ"/>
-                <a:ea typeface="Meiryo"/>
-                <a:cs typeface="Meiryo"/>
-                <a:sym typeface="Meiryo"/>
-              </a:rPr>
-              <a:t>対象業界</a:t>
-            </a:r>
-            <a:endParaRPr/>
-          </a:p>
-        </p:txBody>
-      </p:sp>
-      <p:sp>
-        <p:nvSpPr>
-          <p:cNvPr id="43" name="Google Shape;43;p3"/>
-          <p:cNvSpPr/>
-          <p:nvPr/>
-        </p:nvSpPr>
-        <p:spPr>
-          <a:xfrm>
-            <a:off x="1594068" y="730955"/>
-            <a:ext cx="2926883" cy="435690"/>
-          </a:xfrm>
-          <a:prstGeom prst="rect">
-            <a:avLst/>
-          </a:prstGeom>
-          <a:noFill/>
-          <a:ln w="9525" cap="flat" cmpd="sng">
-            <a:solidFill>
-              <a:srgbClr val="4A7DBA"/>
-            </a:solidFill>
-            <a:prstDash val="solid"/>
-            <a:round/>
-            <a:headEnd type="none" w="sm" len="sm"/>
-            <a:tailEnd type="none" w="sm" len="sm"/>
-          </a:ln>
-        </p:spPr>
-        <p:txBody>
-          <a:bodyPr spcFirstLastPara="1" wrap="square" lIns="91425" tIns="45700" rIns="91425" bIns="45700" anchor="ctr" anchorCtr="0">
-            <a:noAutofit/>
-          </a:bodyPr>
-          <a:lstStyle/>
-          <a:p>
-            <a:pPr marL="0" marR="0" lvl="0" indent="0" algn="ctr" rtl="0">
-              <a:spcBef>
-                <a:spcPts val="0"/>
-              </a:spcBef>
-              <a:spcAft>
-                <a:spcPts val="0"/>
-              </a:spcAft>
-              <a:buNone/>
-            </a:pPr>
-            <a:r>
-              <a:rPr lang="ja-JP" sz="1300" b="0" i="0" u="none" strike="noStrike" cap="none">
-                <a:solidFill>
-                  <a:schemeClr val="dk1"/>
-                </a:solidFill>
-                <a:latin typeface="メイリオ"/>
-                <a:ea typeface="Meiryo"/>
-                <a:cs typeface="Meiryo"/>
-                <a:sym typeface="Meiryo"/>
-              </a:rPr>
-              <a:t>友だち獲得を強化したい全業種</a:t>
-            </a:r>
-            <a:endParaRPr/>
-          </a:p>
-        </p:txBody>
-      </p:sp>
-      <p:sp>
-        <p:nvSpPr>
-          <p:cNvPr id="44" name="Google Shape;44;p3"/>
-          <p:cNvSpPr txBox="1"/>
-          <p:nvPr/>
-        </p:nvSpPr>
-        <p:spPr>
-          <a:xfrm>
-            <a:off x="3296816" y="6597352"/>
-            <a:ext cx="6209091" cy="215444"/>
-          </a:xfrm>
-          <a:prstGeom prst="rect">
-            <a:avLst/>
-          </a:prstGeom>
-          <a:noFill/>
-          <a:ln>
-            <a:noFill/>
-          </a:ln>
-        </p:spPr>
-        <p:txBody>
-          <a:bodyPr spcFirstLastPara="1" wrap="square" lIns="91425" tIns="45700" rIns="91425" bIns="45700" anchor="t" anchorCtr="0">
-            <a:spAutoFit/>
-          </a:bodyPr>
-          <a:lstStyle/>
-          <a:p>
-            <a:pPr marL="0" marR="0" lvl="0" indent="0" algn="l" rtl="0">
-              <a:spcBef>
-                <a:spcPts val="0"/>
-              </a:spcBef>
-              <a:spcAft>
-                <a:spcPts val="0"/>
-              </a:spcAft>
-              <a:buNone/>
-            </a:pPr>
-            <a:r>
-              <a:rPr lang="ja-JP" sz="800" b="0" i="0" u="none" strike="noStrike" cap="none">
-                <a:solidFill>
-                  <a:schemeClr val="lt1"/>
-                </a:solidFill>
-                <a:latin typeface="メイリオ"/>
-                <a:ea typeface="Meiryo"/>
-                <a:cs typeface="Meiryo"/>
-                <a:sym typeface="Meiryo"/>
-              </a:rPr>
-              <a:t>出典：https://workers-hub.box.com/s/rgfhp6hxyusj7domi1irjx68jld23k9r</a:t>
-            </a:r>
-            <a:endParaRPr sz="800">
-              <a:solidFill>
-                <a:schemeClr val="lt1"/>
-              </a:solidFill>
-              <a:latin typeface="Meiryo"/>
-              <a:ea typeface="Meiryo"/>
-              <a:cs typeface="Meiryo"/>
-              <a:sym typeface="Meiryo"/>
-            </a:endParaRPr>
-          </a:p>
-        </p:txBody>
-      </p:sp>
-      <p:sp>
-        <p:nvSpPr>
-          <p:cNvPr id="45" name="Google Shape;45;p3"/>
-          <p:cNvSpPr/>
-          <p:nvPr/>
-        </p:nvSpPr>
-        <p:spPr>
-          <a:xfrm>
-            <a:off x="0" y="1234746"/>
-            <a:ext cx="9906000" cy="672259"/>
-          </a:xfrm>
-          <a:prstGeom prst="rect">
-            <a:avLst/>
-          </a:prstGeom>
-          <a:solidFill>
-            <a:srgbClr val="C5D8F1"/>
-          </a:solidFill>
-          <a:ln>
-            <a:noFill/>
-          </a:ln>
-        </p:spPr>
-        <p:txBody>
-          <a:bodyPr spcFirstLastPara="1" wrap="square" lIns="91425" tIns="45700" rIns="91425" bIns="45700" anchor="ctr" anchorCtr="0">
-            <a:noAutofit/>
-          </a:bodyPr>
-          <a:lstStyle/>
-          <a:p>
-            <a:pPr marL="0" marR="0" lvl="0" indent="0" algn="ctr" rtl="0">
-              <a:spcBef>
-                <a:spcPts val="0"/>
-              </a:spcBef>
-              <a:spcAft>
-                <a:spcPts val="0"/>
-              </a:spcAft>
-              <a:buNone/>
-            </a:pPr>
-            <a:r>
-              <a:rPr lang="ja-JP" sz="1600" b="1">
-                <a:solidFill>
-                  <a:srgbClr val="004DE6"/>
-                </a:solidFill>
-                <a:latin typeface="メイリオ"/>
-                <a:ea typeface="Meiryo"/>
-                <a:cs typeface="Meiryo"/>
-                <a:sym typeface="Meiryo"/>
-              </a:rPr>
-              <a:t>　　　　　　</a:t>
-            </a:r>
-            <a:endParaRPr sz="1800" b="1">
-              <a:solidFill>
-                <a:srgbClr val="004DE6"/>
-              </a:solidFill>
-              <a:latin typeface="Meiryo"/>
-              <a:ea typeface="Meiryo"/>
-              <a:cs typeface="Meiryo"/>
-              <a:sym typeface="Meiryo"/>
-            </a:endParaRPr>
-          </a:p>
-        </p:txBody>
-      </p:sp>
-      <p:sp>
-        <p:nvSpPr>
-          <p:cNvPr id="46" name="Google Shape;46;p3"/>
-          <p:cNvSpPr/>
-          <p:nvPr/>
-        </p:nvSpPr>
-        <p:spPr>
-          <a:xfrm>
-            <a:off x="1089832" y="1437370"/>
-            <a:ext cx="7031520" cy="338554"/>
-          </a:xfrm>
-          <a:prstGeom prst="rect">
-            <a:avLst/>
-          </a:prstGeom>
-          <a:noFill/>
-          <a:ln>
-            <a:noFill/>
-          </a:ln>
-        </p:spPr>
-        <p:txBody>
-          <a:bodyPr spcFirstLastPara="1" wrap="square" lIns="91425" tIns="45700" rIns="91425" bIns="45700" anchor="t" anchorCtr="0">
-            <a:spAutoFit/>
-          </a:bodyPr>
-          <a:lstStyle/>
-          <a:p>
-            <a:pPr marL="0" marR="0" lvl="0" indent="0" algn="l" rtl="0">
-              <a:spcBef>
-                <a:spcPts val="0"/>
-              </a:spcBef>
-              <a:spcAft>
-                <a:spcPts val="0"/>
-              </a:spcAft>
-              <a:buNone/>
-            </a:pPr>
-            <a:r>
-              <a:rPr lang="ja-JP" sz="1600" b="1" dirty="0">
-                <a:solidFill>
-                  <a:srgbClr val="004DE6"/>
-                </a:solidFill>
-                <a:latin typeface="メイリオ"/>
-                <a:ea typeface="Meiryo"/>
-                <a:cs typeface="Meiryo"/>
-                <a:sym typeface="Meiryo"/>
-              </a:rPr>
-              <a:t>【LINEプロモーションスタンプ】ダウンロード機会拡大のご案内</a:t>
-            </a:r>
-            <a:endParaRPr sz="1600" b="1" dirty="0">
-              <a:solidFill>
-                <a:srgbClr val="004DE6"/>
-              </a:solidFill>
-              <a:latin typeface="Meiryo"/>
-              <a:ea typeface="Meiryo"/>
-              <a:cs typeface="Meiryo"/>
-              <a:sym typeface="Meiryo"/>
-            </a:endParaRPr>
-          </a:p>
-        </p:txBody>
-      </p:sp>
-      <p:sp>
-        <p:nvSpPr>
-          <p:cNvPr id="47" name="Google Shape;47;p3"/>
-          <p:cNvSpPr txBox="1"/>
-          <p:nvPr/>
-        </p:nvSpPr>
-        <p:spPr>
-          <a:xfrm>
-            <a:off x="182880" y="88175"/>
-            <a:ext cx="7512385" cy="365091"/>
-          </a:xfrm>
-          <a:prstGeom prst="rect">
-            <a:avLst/>
-          </a:prstGeom>
-          <a:noFill/>
-          <a:ln>
-            <a:noFill/>
-          </a:ln>
-        </p:spPr>
-        <p:txBody>
-          <a:bodyPr spcFirstLastPara="1" wrap="square" lIns="91425" tIns="72000" rIns="91425" bIns="45700" anchor="t" anchorCtr="0">
-            <a:spAutoFit/>
-          </a:bodyPr>
-          <a:lstStyle/>
-          <a:p>
-            <a:pPr marL="0" marR="0" lvl="0" indent="0" algn="l" rtl="0">
-              <a:spcBef>
-                <a:spcPts val="0"/>
-              </a:spcBef>
-              <a:spcAft>
-                <a:spcPts val="0"/>
-              </a:spcAft>
-              <a:buClr>
-                <a:schemeClr val="dk1"/>
-              </a:buClr>
-              <a:buSzPts val="1600"/>
-              <a:buFont typeface="Arial"/>
-              <a:buNone/>
-            </a:pPr>
-            <a:r>
-              <a:rPr lang="ja-JP" sz="1600" b="0" u="none">
-                <a:solidFill>
-                  <a:schemeClr val="dk1"/>
-                </a:solidFill>
-                <a:latin typeface="メイリオ"/>
-                <a:ea typeface="Meiryo"/>
-                <a:cs typeface="Meiryo"/>
-                <a:sym typeface="Meiryo"/>
-              </a:rPr>
-              <a:t>    今後のアップデート情報</a:t>
-            </a:r>
-            <a:endParaRPr sz="1600" b="0" u="none">
-              <a:solidFill>
-                <a:schemeClr val="dk1"/>
-              </a:solidFill>
-              <a:latin typeface="Meiryo"/>
-              <a:ea typeface="Meiryo"/>
-              <a:cs typeface="Meiryo"/>
-              <a:sym typeface="Meiryo"/>
-            </a:endParaRPr>
-          </a:p>
-        </p:txBody>
-      </p:sp>
-      <p:sp>
-        <p:nvSpPr>
-          <p:cNvPr id="50" name="Google Shape;50;p3"/>
-          <p:cNvSpPr/>
-          <p:nvPr/>
-        </p:nvSpPr>
-        <p:spPr>
-          <a:xfrm>
-            <a:off x="0" y="1890267"/>
-            <a:ext cx="9906000" cy="733579"/>
-          </a:xfrm>
-          <a:prstGeom prst="rect">
-            <a:avLst/>
-          </a:prstGeom>
-          <a:solidFill>
-            <a:srgbClr val="F2F2F2"/>
-          </a:solidFill>
-          <a:ln>
-            <a:noFill/>
-          </a:ln>
-        </p:spPr>
-        <p:txBody>
-          <a:bodyPr spcFirstLastPara="1" wrap="square" lIns="91425" tIns="45700" rIns="91425" bIns="45700" anchor="ctr" anchorCtr="0">
-            <a:noAutofit/>
-          </a:bodyPr>
-          <a:lstStyle/>
-          <a:p>
-            <a:pPr marL="0" marR="0" lvl="0" indent="0" algn="ctr" rtl="0">
-              <a:spcBef>
-                <a:spcPts val="0"/>
-              </a:spcBef>
-              <a:spcAft>
-                <a:spcPts val="0"/>
-              </a:spcAft>
-              <a:buNone/>
-            </a:pPr>
-            <a:endParaRPr sz="1200">
-              <a:solidFill>
-                <a:schemeClr val="dk1"/>
-              </a:solidFill>
-              <a:latin typeface="Meiryo"/>
-              <a:ea typeface="Meiryo"/>
-              <a:cs typeface="Meiryo"/>
-              <a:sym typeface="Meiryo"/>
-            </a:endParaRPr>
-          </a:p>
-        </p:txBody>
-      </p:sp>
-      <p:sp>
-        <p:nvSpPr>
-          <p:cNvPr id="51" name="Google Shape;51;p3"/>
-          <p:cNvSpPr/>
-          <p:nvPr/>
-        </p:nvSpPr>
-        <p:spPr>
-          <a:xfrm>
-            <a:off x="544108" y="1961282"/>
-            <a:ext cx="8817783" cy="646331"/>
-          </a:xfrm>
-          <a:prstGeom prst="rect">
-            <a:avLst/>
-          </a:prstGeom>
-          <a:noFill/>
-          <a:ln>
-            <a:noFill/>
-          </a:ln>
-        </p:spPr>
-        <p:txBody>
-          <a:bodyPr spcFirstLastPara="1" wrap="square" lIns="91425" tIns="45700" rIns="91425" bIns="45700" anchor="t" anchorCtr="0">
-            <a:spAutoFit/>
-          </a:bodyPr>
-          <a:lstStyle/>
-          <a:p>
-            <a:pPr marL="0" marR="0" lvl="0" indent="0" algn="ctr" rtl="0">
-              <a:spcBef>
-                <a:spcPts val="0"/>
-              </a:spcBef>
-              <a:spcAft>
-                <a:spcPts val="0"/>
-              </a:spcAft>
-              <a:buNone/>
-            </a:pPr>
-            <a:r>
-              <a:rPr lang="ja-JP" sz="1200" b="1">
-                <a:solidFill>
-                  <a:schemeClr val="dk1"/>
-                </a:solidFill>
-                <a:latin typeface="メイリオ"/>
-                <a:ea typeface="Meiryo"/>
-                <a:cs typeface="Meiryo"/>
-                <a:sym typeface="Meiryo"/>
-              </a:rPr>
-              <a:t>LINEキーボードのサジェスト機能で無料スタンプが表示される条件を緩和し、</a:t>
-            </a:r>
-            <a:endParaRPr sz="1200" b="1">
-              <a:solidFill>
-                <a:schemeClr val="dk1"/>
-              </a:solidFill>
-              <a:latin typeface="Meiryo"/>
-              <a:ea typeface="Meiryo"/>
-              <a:cs typeface="Meiryo"/>
-              <a:sym typeface="Meiryo"/>
-            </a:endParaRPr>
-          </a:p>
-          <a:p>
-            <a:pPr marL="0" marR="0" lvl="0" indent="0" algn="ctr" rtl="0">
-              <a:spcBef>
-                <a:spcPts val="0"/>
-              </a:spcBef>
-              <a:spcAft>
-                <a:spcPts val="0"/>
-              </a:spcAft>
-              <a:buNone/>
-            </a:pPr>
-            <a:r>
-              <a:rPr lang="ja-JP" sz="1200" b="1">
-                <a:solidFill>
-                  <a:schemeClr val="dk1"/>
-                </a:solidFill>
-                <a:latin typeface="メイリオ"/>
-                <a:ea typeface="Meiryo"/>
-                <a:cs typeface="Meiryo"/>
-                <a:sym typeface="Meiryo"/>
-              </a:rPr>
-              <a:t>これまで一部だったユーザー表示が全ユーザーに拡大された。</a:t>
-            </a:r>
-            <a:endParaRPr/>
-          </a:p>
-          <a:p>
-            <a:pPr marL="0" marR="0" lvl="0" indent="0" algn="ctr" rtl="0">
-              <a:spcBef>
-                <a:spcPts val="0"/>
-              </a:spcBef>
-              <a:spcAft>
-                <a:spcPts val="0"/>
-              </a:spcAft>
-              <a:buNone/>
-            </a:pPr>
-            <a:r>
-              <a:rPr lang="ja-JP" sz="1200" b="1">
-                <a:solidFill>
-                  <a:schemeClr val="dk1"/>
-                </a:solidFill>
-                <a:latin typeface="メイリオ"/>
-                <a:ea typeface="Meiryo"/>
-                <a:cs typeface="Meiryo"/>
-                <a:sym typeface="Meiryo"/>
-              </a:rPr>
-              <a:t>適用開始は2026年8月28日、DL数は平均+5.63%増加している。</a:t>
-            </a:r>
-            <a:endParaRPr sz="1400" b="1">
-              <a:solidFill>
-                <a:schemeClr val="dk1"/>
-              </a:solidFill>
-              <a:latin typeface="Meiryo"/>
-              <a:ea typeface="Meiryo"/>
-              <a:cs typeface="Meiryo"/>
-              <a:sym typeface="Meiryo"/>
-            </a:endParaRPr>
-          </a:p>
-        </p:txBody>
-      </p:sp>
-      <p:sp>
-        <p:nvSpPr>
-          <p:cNvPr id="52" name="Google Shape;52;p3"/>
-          <p:cNvSpPr/>
-          <p:nvPr/>
-        </p:nvSpPr>
-        <p:spPr>
-          <a:xfrm>
-            <a:off x="351381" y="2714173"/>
-            <a:ext cx="5200000" cy="338554"/>
-          </a:xfrm>
-          <a:prstGeom prst="rect">
-            <a:avLst/>
-          </a:prstGeom>
-          <a:noFill/>
-          <a:ln>
-            <a:noFill/>
-          </a:ln>
-        </p:spPr>
-        <p:txBody>
-          <a:bodyPr spcFirstLastPara="1" wrap="square" lIns="91425" tIns="45700" rIns="91425" bIns="45700" anchor="t" anchorCtr="0">
-            <a:noAutofit/>
-          </a:bodyPr>
-          <a:lstStyle/>
-          <a:p>
-            <a:pPr marL="0" marR="0" lvl="0" indent="0" algn="l" rtl="0">
-              <a:spcBef>
-                <a:spcPts val="0"/>
-              </a:spcBef>
-              <a:spcAft>
-                <a:spcPts val="0"/>
-              </a:spcAft>
-              <a:buNone/>
-            </a:pPr>
-            <a:r>
-              <a:rPr lang="ja-JP" sz="1400" b="1">
-                <a:solidFill>
-                  <a:srgbClr val="15133D"/>
-                </a:solidFill>
-                <a:latin typeface="メイリオ"/>
-                <a:ea typeface="Meiryo"/>
-                <a:cs typeface="Meiryo"/>
-                <a:sym typeface="Meiryo"/>
-              </a:rPr>
-              <a:t>■ 詳細</a:t>
-            </a:r>
-            <a:endParaRPr/>
-          </a:p>
-        </p:txBody>
-      </p:sp>
-      <p:pic>
-        <p:nvPicPr>
-          <p:cNvPr id="62" name="Google Shape;62;p3" descr="LINE公式アカウントのロゴの使用方法とは？種類やダウンロード方法、利用時の注意点を紹介 | Mico（ミコ）"/>
-          <p:cNvPicPr preferRelativeResize="0"/>
-          <p:nvPr/>
-        </p:nvPicPr>
-        <p:blipFill rotWithShape="1">
-          <a:blip r:embed="rId2">
-            <a:alphaModFix/>
-          </a:blip>
-          <a:srcRect/>
-          <a:stretch/>
-        </p:blipFill>
-        <p:spPr>
-          <a:xfrm>
-            <a:off x="351381" y="1234746"/>
-            <a:ext cx="656177" cy="655521"/>
-          </a:xfrm>
-          <a:prstGeom prst="rect">
-            <a:avLst/>
-          </a:prstGeom>
-          <a:noFill/>
-          <a:ln>
-            <a:noFill/>
-          </a:ln>
-        </p:spPr>
-      </p:pic>
-      <p:graphicFrame>
-        <p:nvGraphicFramePr>
-          <p:cNvPr id="63" name="Table 62"/>
-          <p:cNvGraphicFramePr>
-            <a:graphicFrameLocks noGrp="1"/>
-          </p:cNvGraphicFramePr>
-          <p:nvPr>
-            <p:extLst>
-              <p:ext uri="{D42A27DB-BD31-4B8C-83A1-F6EECF244321}">
-                <p14:modId xmlns:p14="http://schemas.microsoft.com/office/powerpoint/2010/main" val="1178564674"/>
-              </p:ext>
-            </p:extLst>
-          </p:nvPr>
-        </p:nvGraphicFramePr>
-        <p:xfrm>
-          <a:off x="429808" y="3052727"/>
-          <a:ext cx="8387555" cy="2811046"/>
-        </p:xfrm>
-        <a:graphic>
-          <a:graphicData uri="http://schemas.openxmlformats.org/drawingml/2006/table">
-            <a:tbl>
-              <a:tblPr firstRow="1" bandRow="1">
-                <a:tableStyleId>{5C22544A-7EE6-4342-B048-85BDC9FD1C3A}</a:tableStyleId>
-              </a:tblPr>
-              <a:tblGrid>
-                <a:gridCol w="2168211">
-                  <a:extLst>
-                    <a:ext uri="{9D8B030D-6E8A-4147-A177-3AD203B41FA5}">
-                      <a16:colId xmlns:a16="http://schemas.microsoft.com/office/drawing/2014/main" val="20000"/>
-                    </a:ext>
-                  </a:extLst>
-                </a:gridCol>
-                <a:gridCol w="6219344">
-                  <a:extLst>
-                    <a:ext uri="{9D8B030D-6E8A-4147-A177-3AD203B41FA5}">
-                      <a16:colId xmlns:a16="http://schemas.microsoft.com/office/drawing/2014/main" val="20001"/>
-                    </a:ext>
-                  </a:extLst>
-                </a:gridCol>
-              </a:tblGrid>
-              <a:tr h="1290397">
-                <a:tc>
-                  <a:txBody>
-                    <a:bodyPr/>
-                    <a:lstStyle/>
-                    <a:p>
-                      <a:r>
-                        <a:rPr sz="1050" b="1" dirty="0" err="1">
-                          <a:solidFill>
-                            <a:srgbClr val="FFFFFF"/>
-                          </a:solidFill>
-                          <a:latin typeface="メイリオ"/>
-                        </a:rPr>
-                        <a:t>概要・変更点</a:t>
-                      </a:r>
-                      <a:endParaRPr sz="1050" b="1" dirty="0">
-                        <a:solidFill>
-                          <a:srgbClr val="FFFFFF"/>
-                        </a:solidFill>
-                        <a:latin typeface="メイリオ"/>
-                      </a:endParaRPr>
-                    </a:p>
-                  </a:txBody>
-                  <a:tcPr marL="73152" marR="45720" anchor="ctr">
-                    <a:solidFill>
-                      <a:srgbClr val="15133D"/>
-                    </a:solidFill>
-                  </a:tcPr>
-                </a:tc>
-                <a:tc>
-                  <a:txBody>
-                    <a:bodyPr/>
-                    <a:lstStyle/>
-                    <a:p>
-                      <a:pPr>
-                        <a:lnSpc>
-                          <a:spcPct val="105000"/>
-                        </a:lnSpc>
-                        <a:spcAft>
-                          <a:spcPts val="150"/>
-                        </a:spcAft>
-                      </a:pPr>
-                      <a:r>
-                        <a:rPr sz="1200" dirty="0">
-                          <a:solidFill>
-                            <a:srgbClr val="333333"/>
-                          </a:solidFill>
-                          <a:latin typeface="メイリオ"/>
-                        </a:rPr>
-                        <a:t>・</a:t>
-                      </a:r>
-                      <a:r>
-                        <a:rPr sz="1200" dirty="0" err="1">
-                          <a:solidFill>
-                            <a:srgbClr val="333333"/>
-                          </a:solidFill>
-                          <a:latin typeface="メイリオ"/>
-                        </a:rPr>
-                        <a:t>サジェスト面（ユーザーの入力内容に応じてスタンプを提案する機能）での</a:t>
-                      </a:r>
-                      <a:endParaRPr lang="en-US" sz="1200" dirty="0">
-                        <a:solidFill>
-                          <a:srgbClr val="333333"/>
-                        </a:solidFill>
-                        <a:latin typeface="メイリオ"/>
-                      </a:endParaRPr>
-                    </a:p>
-                    <a:p>
-                      <a:pPr>
-                        <a:lnSpc>
-                          <a:spcPct val="105000"/>
-                        </a:lnSpc>
-                        <a:spcAft>
-                          <a:spcPts val="150"/>
-                        </a:spcAft>
-                      </a:pPr>
-                      <a:r>
-                        <a:rPr sz="1200" dirty="0" err="1">
-                          <a:solidFill>
-                            <a:srgbClr val="333333"/>
-                          </a:solidFill>
-                          <a:latin typeface="メイリオ"/>
-                        </a:rPr>
-                        <a:t>無料スタンプ表示ユーザー条件を緩和</a:t>
-                      </a:r>
-                      <a:endParaRPr sz="1200" dirty="0">
-                        <a:solidFill>
-                          <a:srgbClr val="333333"/>
-                        </a:solidFill>
-                        <a:latin typeface="メイリオ"/>
-                      </a:endParaRPr>
-                    </a:p>
-                    <a:p>
-                      <a:pPr>
-                        <a:lnSpc>
-                          <a:spcPct val="105000"/>
-                        </a:lnSpc>
-                        <a:spcAft>
-                          <a:spcPts val="150"/>
-                        </a:spcAft>
-                      </a:pPr>
-                      <a:r>
-                        <a:rPr sz="1200" dirty="0">
-                          <a:solidFill>
-                            <a:srgbClr val="333333"/>
-                          </a:solidFill>
-                          <a:latin typeface="メイリオ"/>
-                        </a:rPr>
-                        <a:t>・</a:t>
-                      </a:r>
-                      <a:r>
-                        <a:rPr sz="1200" dirty="0" err="1">
-                          <a:solidFill>
-                            <a:srgbClr val="333333"/>
-                          </a:solidFill>
-                          <a:latin typeface="メイリオ"/>
-                        </a:rPr>
-                        <a:t>AS-IS：一部のユーザーにのみ表示</a:t>
-                      </a:r>
-                      <a:r>
-                        <a:rPr sz="1200" dirty="0">
-                          <a:solidFill>
-                            <a:srgbClr val="333333"/>
-                          </a:solidFill>
-                          <a:latin typeface="メイリオ"/>
-                        </a:rPr>
-                        <a:t> </a:t>
-                      </a:r>
-                      <a:endParaRPr lang="en-US" sz="1200" dirty="0">
-                        <a:solidFill>
-                          <a:srgbClr val="333333"/>
-                        </a:solidFill>
-                        <a:latin typeface="メイリオ"/>
-                      </a:endParaRPr>
-                    </a:p>
-                    <a:p>
-                      <a:pPr>
-                        <a:lnSpc>
-                          <a:spcPct val="105000"/>
-                        </a:lnSpc>
-                        <a:spcAft>
-                          <a:spcPts val="150"/>
-                        </a:spcAft>
-                      </a:pPr>
-                      <a:r>
-                        <a:rPr sz="1200" dirty="0">
-                          <a:solidFill>
-                            <a:srgbClr val="333333"/>
-                          </a:solidFill>
-                          <a:latin typeface="メイリオ"/>
-                        </a:rPr>
-                        <a:t>→ </a:t>
-                      </a:r>
-                      <a:r>
-                        <a:rPr sz="1200" dirty="0" err="1">
-                          <a:solidFill>
-                            <a:srgbClr val="333333"/>
-                          </a:solidFill>
-                          <a:latin typeface="メイリオ"/>
-                        </a:rPr>
-                        <a:t>TO-BE：すべてのユーザーに表示（これまで対象外だった層にもリーチ可能</a:t>
-                      </a:r>
-                      <a:r>
-                        <a:rPr sz="1200" dirty="0">
-                          <a:solidFill>
-                            <a:srgbClr val="333333"/>
-                          </a:solidFill>
-                          <a:latin typeface="メイリオ"/>
-                        </a:rPr>
-                        <a:t>）</a:t>
-                      </a:r>
-                    </a:p>
-                    <a:p>
-                      <a:pPr>
-                        <a:lnSpc>
-                          <a:spcPct val="105000"/>
-                        </a:lnSpc>
-                        <a:spcAft>
-                          <a:spcPts val="150"/>
-                        </a:spcAft>
-                      </a:pPr>
-                      <a:r>
-                        <a:rPr sz="1200" dirty="0">
-                          <a:solidFill>
-                            <a:srgbClr val="333333"/>
-                          </a:solidFill>
-                          <a:latin typeface="メイリオ"/>
-                        </a:rPr>
-                        <a:t>・</a:t>
-                      </a:r>
-                      <a:r>
-                        <a:rPr sz="1200" dirty="0" err="1">
-                          <a:solidFill>
-                            <a:srgbClr val="333333"/>
-                          </a:solidFill>
-                          <a:latin typeface="メイリオ"/>
-                        </a:rPr>
-                        <a:t>配信中の案件を含む全案件に自動適用（広告主・案件側の対応は不要</a:t>
-                      </a:r>
-                      <a:r>
-                        <a:rPr sz="1200" dirty="0">
-                          <a:solidFill>
-                            <a:srgbClr val="333333"/>
-                          </a:solidFill>
-                          <a:latin typeface="メイリオ"/>
-                        </a:rPr>
-                        <a:t>）</a:t>
-                      </a:r>
-                    </a:p>
-                  </a:txBody>
-                  <a:tcPr marT="36576" marB="36576" anchor="ctr">
-                    <a:solidFill>
-                      <a:srgbClr val="FFFFFF"/>
-                    </a:solidFill>
-                  </a:tcPr>
-                </a:tc>
-                <a:extLst>
-                  <a:ext uri="{0D108BD9-81ED-4DB2-BD59-A6C34878D82A}">
-                    <a16:rowId xmlns:a16="http://schemas.microsoft.com/office/drawing/2014/main" val="10000"/>
-                  </a:ext>
-                </a:extLst>
-              </a:tr>
-              <a:tr h="1520649">
-                <a:tc>
-                  <a:txBody>
-                    <a:bodyPr/>
-                    <a:lstStyle/>
-                    <a:p>
-                      <a:r>
-                        <a:rPr sz="1100" b="1" dirty="0" err="1">
-                          <a:solidFill>
-                            <a:srgbClr val="FFFFFF"/>
-                          </a:solidFill>
-                          <a:latin typeface="メイリオ"/>
-                        </a:rPr>
-                        <a:t>注意点・影響</a:t>
-                      </a:r>
-                      <a:endParaRPr sz="1100" b="1" dirty="0">
-                        <a:solidFill>
-                          <a:srgbClr val="FFFFFF"/>
-                        </a:solidFill>
-                        <a:latin typeface="メイリオ"/>
-                      </a:endParaRPr>
-                    </a:p>
-                  </a:txBody>
-                  <a:tcPr marL="73152" marR="45720" anchor="ctr">
-                    <a:solidFill>
-                      <a:srgbClr val="15133D"/>
-                    </a:solidFill>
-                  </a:tcPr>
-                </a:tc>
-                <a:tc>
-                  <a:txBody>
-                    <a:bodyPr/>
-                    <a:lstStyle/>
-                    <a:p>
-                      <a:pPr>
-                        <a:lnSpc>
-                          <a:spcPct val="100000"/>
-                        </a:lnSpc>
-                        <a:spcAft>
-                          <a:spcPts val="100"/>
-                        </a:spcAft>
-                      </a:pPr>
-                      <a:r>
-                        <a:rPr sz="1200" dirty="0">
-                          <a:solidFill>
-                            <a:srgbClr val="333333"/>
-                          </a:solidFill>
-                          <a:latin typeface="メイリオ"/>
-                        </a:rPr>
-                        <a:t>・DL数+5.63%増</a:t>
-                      </a:r>
-                      <a:br>
-                        <a:rPr lang="en-US" sz="1200" dirty="0">
-                          <a:solidFill>
-                            <a:srgbClr val="333333"/>
-                          </a:solidFill>
-                          <a:latin typeface="メイリオ"/>
-                        </a:rPr>
-                      </a:br>
-                      <a:r>
-                        <a:rPr sz="1200" dirty="0">
-                          <a:solidFill>
-                            <a:srgbClr val="333333"/>
-                          </a:solidFill>
-                          <a:latin typeface="メイリオ"/>
-                        </a:rPr>
-                        <a:t>・サジェスト経由は友だち追加率74.6%・当日ブロック率9.53%（平均約60%・約22%より好水準）</a:t>
-                      </a:r>
-                    </a:p>
-                    <a:p>
-                      <a:pPr>
-                        <a:lnSpc>
-                          <a:spcPct val="100000"/>
-                        </a:lnSpc>
-                        <a:spcAft>
-                          <a:spcPts val="100"/>
-                        </a:spcAft>
-                      </a:pPr>
-                      <a:r>
-                        <a:rPr sz="1200" dirty="0">
-                          <a:solidFill>
-                            <a:srgbClr val="333333"/>
-                          </a:solidFill>
-                          <a:latin typeface="メイリオ"/>
-                        </a:rPr>
-                        <a:t>・過去6〜18ヶ月DLなし層で約3.0倍</a:t>
-                      </a:r>
-                    </a:p>
-                    <a:p>
-                      <a:pPr>
-                        <a:lnSpc>
-                          <a:spcPct val="100000"/>
-                        </a:lnSpc>
-                        <a:spcAft>
-                          <a:spcPts val="100"/>
-                        </a:spcAft>
-                      </a:pPr>
-                      <a:r>
-                        <a:rPr sz="1200" dirty="0">
-                          <a:solidFill>
-                            <a:srgbClr val="333333"/>
-                          </a:solidFill>
-                          <a:latin typeface="メイリオ"/>
-                        </a:rPr>
-                        <a:t>・</a:t>
-                      </a:r>
-                      <a:r>
-                        <a:rPr sz="1200" dirty="0" err="1">
-                          <a:solidFill>
-                            <a:srgbClr val="333333"/>
-                          </a:solidFill>
-                          <a:latin typeface="メイリオ"/>
-                        </a:rPr>
-                        <a:t>運用中クライアントへの実績報告・追加提案の材料に使える</a:t>
-                      </a:r>
-                      <a:endParaRPr sz="1200" dirty="0">
-                        <a:solidFill>
-                          <a:srgbClr val="333333"/>
-                        </a:solidFill>
-                        <a:latin typeface="メイリオ"/>
-                      </a:endParaRPr>
-                    </a:p>
-                  </a:txBody>
-                  <a:tcPr marT="36576" marB="36576" anchor="ctr">
-                    <a:solidFill>
-                      <a:srgbClr val="FFFFFF"/>
-                    </a:solidFill>
-                  </a:tcPr>
-                </a:tc>
-                <a:extLst>
-                  <a:ext uri="{0D108BD9-81ED-4DB2-BD59-A6C34878D82A}">
-                    <a16:rowId xmlns:a16="http://schemas.microsoft.com/office/drawing/2014/main" val="10003"/>
-                  </a:ext>
-                </a:extLst>
-              </a:tr>
-            </a:tbl>
-          </a:graphicData>
-        </a:graphic>
-      </p:graphicFrame>
-      <p:sp>
-        <p:nvSpPr>
-          <p:cNvPr id="3" name="正方形/長方形 2">
-            <a:extLst>
-              <a:ext uri="{FF2B5EF4-FFF2-40B4-BE49-F238E27FC236}">
-                <a16:creationId xmlns:a16="http://schemas.microsoft.com/office/drawing/2014/main" id="{BA15A3E1-1B15-2AB4-7BD5-31104F3AF764}"/>
-              </a:ext>
-            </a:extLst>
-          </p:cNvPr>
-          <p:cNvSpPr/>
-          <p:nvPr/>
-        </p:nvSpPr>
-        <p:spPr>
-          <a:xfrm>
-            <a:off x="7560840" y="730955"/>
-            <a:ext cx="829618" cy="435690"/>
-          </a:xfrm>
-          <a:prstGeom prst="rect">
-            <a:avLst/>
-          </a:prstGeom>
-          <a:solidFill>
-            <a:schemeClr val="bg1"/>
-          </a:solidFill>
-          <a:ln w="9525">
-            <a:solidFill>
-              <a:srgbClr val="4F81BD"/>
-            </a:solidFill>
-            <a:prstDash val="sysDash"/>
-          </a:ln>
-          <a:effectLst/>
-        </p:spPr>
-        <p:style>
-          <a:lnRef idx="1">
-            <a:schemeClr val="accent1"/>
-          </a:lnRef>
-          <a:fillRef idx="3">
-            <a:schemeClr val="accent1"/>
-          </a:fillRef>
-          <a:effectRef idx="2">
-            <a:schemeClr val="accent1"/>
-          </a:effectRef>
-          <a:fontRef idx="minor">
-            <a:schemeClr val="lt1"/>
-          </a:fontRef>
-        </p:style>
-        <p:txBody>
-          <a:bodyPr rtlCol="0" anchor="ctr"/>
-          <a:lstStyle/>
-          <a:p>
-            <a:pPr algn="ctr"/>
-            <a:r>
-              <a:rPr lang="ja-JP" altLang="en-US" sz="1200" dirty="0">
-                <a:solidFill>
-                  <a:schemeClr val="tx1"/>
-                </a:solidFill>
-                <a:latin typeface="メイリオ" panose="020B0604030504040204" pitchFamily="50" charset="-128"/>
-                <a:ea typeface="メイリオ" panose="020B0604030504040204" pitchFamily="50" charset="-128"/>
-              </a:rPr>
-              <a:t>その他</a:t>
-            </a:r>
-            <a:endParaRPr kumimoji="1" lang="ja-JP" altLang="en-US" sz="1200" dirty="0">
-              <a:solidFill>
-                <a:schemeClr val="tx1"/>
-              </a:solidFill>
-              <a:latin typeface="メイリオ" panose="020B0604030504040204" pitchFamily="50" charset="-128"/>
-              <a:ea typeface="メイリオ" panose="020B0604030504040204" pitchFamily="50" charset="-128"/>
-            </a:endParaRPr>
-          </a:p>
-        </p:txBody>
-      </p:sp>
-      <p:sp>
-        <p:nvSpPr>
-          <p:cNvPr id="5" name="正方形/長方形 4">
-            <a:extLst>
-              <a:ext uri="{FF2B5EF4-FFF2-40B4-BE49-F238E27FC236}">
-                <a16:creationId xmlns:a16="http://schemas.microsoft.com/office/drawing/2014/main" id="{4A8B2DD9-FE56-61EE-61D3-B56499FEDF42}"/>
-              </a:ext>
-            </a:extLst>
-          </p:cNvPr>
-          <p:cNvSpPr/>
-          <p:nvPr/>
-        </p:nvSpPr>
-        <p:spPr>
-          <a:xfrm>
-            <a:off x="5797260" y="730955"/>
-            <a:ext cx="829618" cy="435690"/>
-          </a:xfrm>
-          <a:prstGeom prst="rect">
-            <a:avLst/>
-          </a:prstGeom>
-          <a:solidFill>
-            <a:schemeClr val="bg1"/>
-          </a:solidFill>
-          <a:ln w="9525" cap="flat" cmpd="sng" algn="ctr">
-            <a:solidFill>
-              <a:srgbClr val="4F81BD"/>
-            </a:solidFill>
-            <a:prstDash val="sysDash"/>
-          </a:ln>
-          <a:effectLst/>
-        </p:spPr>
-        <p:txBody>
-          <a:bodyPr rtlCol="0" anchor="ctr"/>
-          <a:lstStyle/>
-          <a:p>
-            <a:pPr algn="ctr">
-              <a:buClrTx/>
-              <a:buFontTx/>
-              <a:buNone/>
-            </a:pPr>
-            <a:r>
-              <a:rPr kumimoji="1" lang="ja-JP" altLang="en-US" sz="1000" kern="1200" dirty="0">
-                <a:latin typeface="メイリオ" panose="020B0604030504040204" pitchFamily="50" charset="-128"/>
-                <a:ea typeface="メイリオ" panose="020B0604030504040204" pitchFamily="50" charset="-128"/>
-              </a:rPr>
-              <a:t>開発</a:t>
-            </a:r>
-            <a:endParaRPr kumimoji="1" lang="en-US" altLang="ja-JP" sz="1000" kern="1200" dirty="0">
-              <a:latin typeface="メイリオ" panose="020B0604030504040204" pitchFamily="50" charset="-128"/>
-              <a:ea typeface="メイリオ" panose="020B0604030504040204" pitchFamily="50" charset="-128"/>
-            </a:endParaRPr>
-          </a:p>
-          <a:p>
-            <a:pPr algn="ctr">
-              <a:buClrTx/>
-              <a:buFontTx/>
-              <a:buNone/>
-            </a:pPr>
-            <a:r>
-              <a:rPr lang="en-US" altLang="ja-JP" sz="1000" dirty="0">
-                <a:latin typeface="メイリオ" panose="020B0604030504040204" pitchFamily="50" charset="-128"/>
-                <a:ea typeface="メイリオ" panose="020B0604030504040204" pitchFamily="50" charset="-128"/>
-              </a:rPr>
-              <a:t>LINE</a:t>
-            </a:r>
-            <a:r>
-              <a:rPr lang="ja-JP" altLang="en-US" sz="1000" dirty="0">
-                <a:latin typeface="メイリオ" panose="020B0604030504040204" pitchFamily="50" charset="-128"/>
-                <a:ea typeface="メイリオ" panose="020B0604030504040204" pitchFamily="50" charset="-128"/>
-              </a:rPr>
-              <a:t> </a:t>
-            </a:r>
-            <a:r>
-              <a:rPr lang="en-US" altLang="ja-JP" sz="1000" dirty="0">
-                <a:latin typeface="メイリオ" panose="020B0604030504040204" pitchFamily="50" charset="-128"/>
-                <a:ea typeface="メイリオ" panose="020B0604030504040204" pitchFamily="50" charset="-128"/>
-              </a:rPr>
-              <a:t>API</a:t>
-            </a:r>
-            <a:endParaRPr kumimoji="1" lang="ja-JP" altLang="en-US" sz="1000" kern="1200" dirty="0">
-              <a:latin typeface="メイリオ" panose="020B0604030504040204" pitchFamily="50" charset="-128"/>
-              <a:ea typeface="メイリオ" panose="020B0604030504040204" pitchFamily="50" charset="-128"/>
-            </a:endParaRPr>
-          </a:p>
-        </p:txBody>
-      </p:sp>
-      <p:sp>
-        <p:nvSpPr>
-          <p:cNvPr id="7" name="正方形/長方形 6">
-            <a:extLst>
-              <a:ext uri="{FF2B5EF4-FFF2-40B4-BE49-F238E27FC236}">
-                <a16:creationId xmlns:a16="http://schemas.microsoft.com/office/drawing/2014/main" id="{BFE878AF-9155-C011-C36E-3107D1F6B04E}"/>
-              </a:ext>
-            </a:extLst>
-          </p:cNvPr>
-          <p:cNvSpPr/>
-          <p:nvPr/>
-        </p:nvSpPr>
-        <p:spPr>
-          <a:xfrm>
-            <a:off x="4915470" y="730955"/>
-            <a:ext cx="829618" cy="435690"/>
-          </a:xfrm>
-          <a:prstGeom prst="rect">
-            <a:avLst/>
-          </a:prstGeom>
-          <a:solidFill>
-            <a:srgbClr val="C6D9F1"/>
-          </a:solidFill>
-          <a:ln w="9525">
-            <a:solidFill>
-              <a:schemeClr val="accent1"/>
-            </a:solidFill>
-            <a:prstDash val="solid"/>
-          </a:ln>
-          <a:effectLst/>
-        </p:spPr>
-        <p:style>
-          <a:lnRef idx="1">
-            <a:schemeClr val="accent1"/>
-          </a:lnRef>
-          <a:fillRef idx="3">
-            <a:schemeClr val="accent1"/>
-          </a:fillRef>
-          <a:effectRef idx="2">
-            <a:schemeClr val="accent1"/>
-          </a:effectRef>
-          <a:fontRef idx="minor">
-            <a:schemeClr val="lt1"/>
-          </a:fontRef>
-        </p:style>
-        <p:txBody>
-          <a:bodyPr rtlCol="0" anchor="ctr"/>
-          <a:lstStyle/>
-          <a:p>
-            <a:pPr algn="ctr"/>
-            <a:r>
-              <a:rPr lang="en-US" altLang="ja-JP" sz="1000" dirty="0">
-                <a:solidFill>
-                  <a:schemeClr val="tx1"/>
-                </a:solidFill>
-                <a:latin typeface="メイリオ" panose="020B0604030504040204" pitchFamily="50" charset="-128"/>
-                <a:ea typeface="メイリオ" panose="020B0604030504040204" pitchFamily="50" charset="-128"/>
-              </a:rPr>
-              <a:t>LINE</a:t>
-            </a:r>
-            <a:r>
-              <a:rPr lang="ja-JP" altLang="en-US" sz="1000" dirty="0">
-                <a:solidFill>
-                  <a:schemeClr val="tx1"/>
-                </a:solidFill>
-                <a:latin typeface="メイリオ" panose="020B0604030504040204" pitchFamily="50" charset="-128"/>
-                <a:ea typeface="メイリオ" panose="020B0604030504040204" pitchFamily="50" charset="-128"/>
-              </a:rPr>
-              <a:t>公式アカウント</a:t>
-            </a:r>
-            <a:endParaRPr kumimoji="1" lang="ja-JP" altLang="en-US" sz="1000" dirty="0">
-              <a:solidFill>
-                <a:schemeClr val="tx1"/>
-              </a:solidFill>
-              <a:latin typeface="メイリオ" panose="020B0604030504040204" pitchFamily="50" charset="-128"/>
-              <a:ea typeface="メイリオ" panose="020B0604030504040204" pitchFamily="50" charset="-128"/>
-            </a:endParaRPr>
-          </a:p>
-        </p:txBody>
-      </p:sp>
-      <p:graphicFrame>
-        <p:nvGraphicFramePr>
-          <p:cNvPr id="9" name="図表 8">
-            <a:extLst>
-              <a:ext uri="{FF2B5EF4-FFF2-40B4-BE49-F238E27FC236}">
-                <a16:creationId xmlns:a16="http://schemas.microsoft.com/office/drawing/2014/main" id="{070F1D99-B035-C902-8074-181C1632DB64}"/>
-              </a:ext>
-            </a:extLst>
-          </p:cNvPr>
-          <p:cNvGraphicFramePr/>
-          <p:nvPr>
-            <p:extLst>
-              <p:ext uri="{D42A27DB-BD31-4B8C-83A1-F6EECF244321}">
-                <p14:modId xmlns:p14="http://schemas.microsoft.com/office/powerpoint/2010/main" val="558520007"/>
-              </p:ext>
-            </p:extLst>
-          </p:nvPr>
-        </p:nvGraphicFramePr>
-        <p:xfrm>
-          <a:off x="8529759" y="688315"/>
-          <a:ext cx="1376241" cy="1131931"/>
-        </p:xfrm>
-        <a:graphic>
-          <a:graphicData uri="http://schemas.openxmlformats.org/drawingml/2006/diagram">
-            <dgm:relIds xmlns:dgm="http://schemas.openxmlformats.org/drawingml/2006/diagram" xmlns:r="http://schemas.openxmlformats.org/officeDocument/2006/relationships" r:dm="rId3" r:lo="rId4" r:qs="rId5" r:cs="rId6"/>
-          </a:graphicData>
-        </a:graphic>
-      </p:graphicFrame>
-      <p:sp>
-        <p:nvSpPr>
-          <p:cNvPr id="11" name="正方形/長方形 10">
-            <a:extLst>
-              <a:ext uri="{FF2B5EF4-FFF2-40B4-BE49-F238E27FC236}">
-                <a16:creationId xmlns:a16="http://schemas.microsoft.com/office/drawing/2014/main" id="{03058F07-2A81-9D7D-4421-E80EB6D98CB7}"/>
-              </a:ext>
-            </a:extLst>
-          </p:cNvPr>
-          <p:cNvSpPr/>
-          <p:nvPr/>
-        </p:nvSpPr>
-        <p:spPr>
-          <a:xfrm>
-            <a:off x="6679050" y="730955"/>
-            <a:ext cx="829618" cy="435690"/>
-          </a:xfrm>
-          <a:prstGeom prst="rect">
-            <a:avLst/>
-          </a:prstGeom>
-          <a:noFill/>
-          <a:ln w="9525">
-            <a:solidFill>
-              <a:srgbClr val="4F81BD"/>
-            </a:solidFill>
-            <a:prstDash val="sysDash"/>
-          </a:ln>
-          <a:effectLst/>
-        </p:spPr>
-        <p:style>
-          <a:lnRef idx="1">
-            <a:schemeClr val="accent1"/>
-          </a:lnRef>
-          <a:fillRef idx="3">
-            <a:schemeClr val="accent1"/>
-          </a:fillRef>
-          <a:effectRef idx="2">
-            <a:schemeClr val="accent1"/>
-          </a:effectRef>
-          <a:fontRef idx="minor">
-            <a:schemeClr val="lt1"/>
-          </a:fontRef>
-        </p:style>
-        <p:txBody>
-          <a:bodyPr rtlCol="0" anchor="ctr"/>
-          <a:lstStyle/>
-          <a:p>
-            <a:pPr algn="ctr"/>
-            <a:r>
-              <a:rPr kumimoji="1" lang="ja-JP" altLang="en-US" sz="1000" dirty="0">
-                <a:solidFill>
-                  <a:schemeClr val="tx1"/>
-                </a:solidFill>
-                <a:latin typeface="メイリオ" panose="020B0604030504040204" pitchFamily="50" charset="-128"/>
-                <a:ea typeface="メイリオ" panose="020B0604030504040204" pitchFamily="50" charset="-128"/>
-              </a:rPr>
-              <a:t>オプション</a:t>
-            </a:r>
-            <a:endParaRPr kumimoji="1" lang="en-US" altLang="ja-JP" sz="1000" dirty="0">
-              <a:solidFill>
-                <a:schemeClr val="tx1"/>
-              </a:solidFill>
-              <a:latin typeface="メイリオ" panose="020B0604030504040204" pitchFamily="50" charset="-128"/>
-              <a:ea typeface="メイリオ" panose="020B0604030504040204" pitchFamily="50" charset="-128"/>
-            </a:endParaRPr>
-          </a:p>
-          <a:p>
-            <a:pPr algn="ctr"/>
-            <a:r>
-              <a:rPr kumimoji="1" lang="ja-JP" altLang="en-US" sz="1000" dirty="0">
-                <a:solidFill>
-                  <a:schemeClr val="tx1"/>
-                </a:solidFill>
-                <a:latin typeface="メイリオ" panose="020B0604030504040204" pitchFamily="50" charset="-128"/>
-                <a:ea typeface="メイリオ" panose="020B0604030504040204" pitchFamily="50" charset="-128"/>
-              </a:rPr>
-              <a:t>商材</a:t>
-            </a:r>
-          </a:p>
-        </p:txBody>
-      </p:sp>
-      <p:sp>
-        <p:nvSpPr>
-          <p:cNvPr id="13" name="テキスト ボックス 12">
-            <a:extLst>
-              <a:ext uri="{FF2B5EF4-FFF2-40B4-BE49-F238E27FC236}">
-                <a16:creationId xmlns:a16="http://schemas.microsoft.com/office/drawing/2014/main" id="{AC603382-2AAB-8564-CC3B-DF58099DC1DC}"/>
-              </a:ext>
-            </a:extLst>
-          </p:cNvPr>
-          <p:cNvSpPr txBox="1"/>
-          <p:nvPr/>
-        </p:nvSpPr>
-        <p:spPr>
-          <a:xfrm>
-            <a:off x="8473303" y="6597352"/>
-            <a:ext cx="1032604" cy="215444"/>
-          </a:xfrm>
-          <a:prstGeom prst="rect">
-            <a:avLst/>
-          </a:prstGeom>
-          <a:noFill/>
-        </p:spPr>
-        <p:txBody>
-          <a:bodyPr wrap="square">
-            <a:spAutoFit/>
-          </a:bodyPr>
-          <a:lstStyle/>
-          <a:p>
-            <a:r>
-              <a:rPr lang="ja-JP" altLang="en-US" sz="800" dirty="0">
-                <a:solidFill>
-                  <a:schemeClr val="bg1"/>
-                </a:solidFill>
-                <a:latin typeface="メイリオ" panose="020B0604030504040204" pitchFamily="50" charset="-128"/>
-                <a:ea typeface="メイリオ" panose="020B0604030504040204" pitchFamily="50" charset="-128"/>
-              </a:rPr>
-              <a:t>出典：代理店情報</a:t>
-            </a:r>
-          </a:p>
-        </p:txBody>
-      </p:sp>
-    </p:spTree>
-  </p:cSld>
-  <p:clrMapOvr>
-    <a:masterClrMapping/>
-  </p:clrMapOvr>
-</p:sld>
-</file>
-
-<file path=ppt/slides/slide6.xml><?xml version="1.0" encoding="utf-8"?>
 <p:sld xmlns:a="http://schemas.openxmlformats.org/drawingml/2006/main" xmlns:r="http://schemas.openxmlformats.org/officeDocument/2006/relationships" xmlns:p="http://schemas.openxmlformats.org/presentationml/2006/main">
   <p:cSld>
     <p:spTree>
@@ -44368,7 +41936,7 @@
 </p:sld>
 </file>
 
-<file path=ppt/slides/slide7.xml><?xml version="1.0" encoding="utf-8"?>
+<file path=ppt/slides/slide6.xml><?xml version="1.0" encoding="utf-8"?>
 <p:sld xmlns:a="http://schemas.openxmlformats.org/drawingml/2006/main" xmlns:r="http://schemas.openxmlformats.org/officeDocument/2006/relationships" xmlns:p="http://schemas.openxmlformats.org/presentationml/2006/main">
   <p:cSld>
     <p:spTree>
@@ -46130,7 +43698,7 @@
 </p:sld>
 </file>
 
-<file path=ppt/slides/slide8.xml><?xml version="1.0" encoding="utf-8"?>
+<file path=ppt/slides/slide7.xml><?xml version="1.0" encoding="utf-8"?>
 <p:sld xmlns:a="http://schemas.openxmlformats.org/drawingml/2006/main" xmlns:r="http://schemas.openxmlformats.org/officeDocument/2006/relationships" xmlns:p="http://schemas.openxmlformats.org/presentationml/2006/main">
   <p:cSld>
     <p:spTree>
@@ -47072,12 +44640,12 @@
 </p:sld>
 </file>
 
-<file path=ppt/slides/slide9.xml><?xml version="1.0" encoding="utf-8"?>
-<p:sld xmlns:a="http://schemas.openxmlformats.org/drawingml/2006/main" xmlns:r="http://schemas.openxmlformats.org/officeDocument/2006/relationships" xmlns:p="http://schemas.openxmlformats.org/presentationml/2006/main" show="0">
+<file path=ppt/slides/slide8.xml><?xml version="1.0" encoding="utf-8"?>
+<p:sld xmlns:a="http://schemas.openxmlformats.org/drawingml/2006/main" xmlns:r="http://schemas.openxmlformats.org/officeDocument/2006/relationships" xmlns:p="http://schemas.openxmlformats.org/presentationml/2006/main">
   <p:cSld>
     <p:spTree>
       <p:nvGrpSpPr>
-        <p:cNvPr id="1" name=""/>
+        <p:cNvPr id="1" name="Shape 39"/>
         <p:cNvGrpSpPr/>
         <p:nvPr/>
       </p:nvGrpSpPr>
@@ -47205,64 +44773,6 @@
       </p:sp>
       <p:sp>
         <p:nvSpPr>
-          <p:cNvPr id="44" name="Google Shape;44;p3"/>
-          <p:cNvSpPr txBox="1"/>
-          <p:nvPr/>
-        </p:nvSpPr>
-        <p:spPr>
-          <a:xfrm>
-            <a:off x="3296816" y="6597352"/>
-            <a:ext cx="6209091" cy="215444"/>
-          </a:xfrm>
-          <a:prstGeom prst="rect">
-            <a:avLst/>
-          </a:prstGeom>
-          <a:noFill/>
-          <a:ln>
-            <a:noFill/>
-          </a:ln>
-        </p:spPr>
-        <p:txBody>
-          <a:bodyPr spcFirstLastPara="1" wrap="square" lIns="91425" tIns="45700" rIns="91425" bIns="45700" anchor="t" anchorCtr="0">
-            <a:spAutoFit/>
-          </a:bodyPr>
-          <a:lstStyle/>
-          <a:p>
-            <a:pPr marL="0" marR="0" lvl="0" indent="0" algn="l" rtl="0">
-              <a:spcBef>
-                <a:spcPts val="0"/>
-              </a:spcBef>
-              <a:spcAft>
-                <a:spcPts val="0"/>
-              </a:spcAft>
-              <a:buNone/>
-            </a:pPr>
-            <a:r>
-              <a:rPr lang="ja-JP" sz="800" b="0" i="0" u="none" strike="noStrike" cap="none">
-                <a:solidFill>
-                  <a:schemeClr val="lt1"/>
-                </a:solidFill>
-                <a:latin typeface="メイリオ"/>
-                <a:ea typeface="Meiryo"/>
-                <a:cs typeface="Meiryo"/>
-                <a:sym typeface="Meiryo"/>
-              </a:rPr>
-              <a:t>出典：https://workers-hub.box.com/s/odilqpe44tp398zlfko148yggcgj68ny</a:t>
-            </a:r>
-            <a:endParaRPr sz="800">
-              <a:solidFill>
-                <a:schemeClr val="lt1"/>
-              </a:solidFill>
-              <a:latin typeface="Meiryo"/>
-              <a:ea typeface="Meiryo"/>
-              <a:cs typeface="Meiryo"/>
-              <a:sym typeface="Meiryo"/>
-            </a:endParaRPr>
-          </a:p>
-        </p:txBody>
-      </p:sp>
-      <p:sp>
-        <p:nvSpPr>
           <p:cNvPr id="45" name="Google Shape;45;p3"/>
           <p:cNvSpPr/>
           <p:nvPr/>
@@ -47346,17 +44856,9 @@
           </a:bodyPr>
           <a:lstStyle/>
           <a:p>
-            <a:pPr marL="0" marR="0" lvl="0" indent="0" algn="l" rtl="0">
-              <a:spcBef>
-                <a:spcPts val="0"/>
-              </a:spcBef>
-              <a:spcAft>
-                <a:spcPts val="0"/>
-              </a:spcAft>
-              <a:buNone/>
-            </a:pPr>
+            <a:pPr lvl="0"/>
             <a:r>
-              <a:rPr lang="ja-JP" sz="1600" b="1" dirty="0">
+              <a:rPr lang="en-US" altLang="ja-JP" sz="1600" b="1" dirty="0">
                 <a:solidFill>
                   <a:srgbClr val="004DE6"/>
                 </a:solidFill>
@@ -47365,9 +44867,69 @@
                 <a:cs typeface="Meiryo"/>
                 <a:sym typeface="Meiryo"/>
               </a:rPr>
-              <a:t>【LINEオープンキャンペーン】26年10-12月 期間限定キャンペーン</a:t>
+              <a:t>【LINE</a:t>
             </a:r>
-            <a:endParaRPr sz="1600" b="1" dirty="0">
+            <a:r>
+              <a:rPr lang="ja-JP" altLang="en-US" sz="1600" b="1" dirty="0">
+                <a:solidFill>
+                  <a:srgbClr val="004DE6"/>
+                </a:solidFill>
+                <a:latin typeface="メイリオ"/>
+                <a:ea typeface="Meiryo"/>
+                <a:cs typeface="Meiryo"/>
+                <a:sym typeface="Meiryo"/>
+              </a:rPr>
+              <a:t>オープンキャンペーン</a:t>
+            </a:r>
+            <a:r>
+              <a:rPr lang="en-US" altLang="ja-JP" sz="1600" b="1" dirty="0">
+                <a:solidFill>
+                  <a:srgbClr val="004DE6"/>
+                </a:solidFill>
+                <a:latin typeface="メイリオ"/>
+                <a:ea typeface="Meiryo"/>
+                <a:cs typeface="Meiryo"/>
+                <a:sym typeface="Meiryo"/>
+              </a:rPr>
+              <a:t>】26</a:t>
+            </a:r>
+            <a:r>
+              <a:rPr lang="ja-JP" altLang="en-US" sz="1600" b="1" dirty="0">
+                <a:solidFill>
+                  <a:srgbClr val="004DE6"/>
+                </a:solidFill>
+                <a:latin typeface="メイリオ"/>
+                <a:ea typeface="Meiryo"/>
+                <a:cs typeface="Meiryo"/>
+                <a:sym typeface="Meiryo"/>
+              </a:rPr>
+              <a:t>年</a:t>
+            </a:r>
+            <a:r>
+              <a:rPr lang="en-US" altLang="ja-JP" sz="1600" b="1" dirty="0">
+                <a:solidFill>
+                  <a:srgbClr val="004DE6"/>
+                </a:solidFill>
+                <a:latin typeface="メイリオ"/>
+                <a:ea typeface="Meiryo"/>
+                <a:cs typeface="Meiryo"/>
+                <a:sym typeface="Meiryo"/>
+              </a:rPr>
+              <a:t>10-12</a:t>
+            </a:r>
+            <a:r>
+              <a:rPr lang="ja-JP" altLang="en-US" sz="1600" b="1" dirty="0">
+                <a:solidFill>
+                  <a:srgbClr val="004DE6"/>
+                </a:solidFill>
+                <a:latin typeface="メイリオ"/>
+                <a:ea typeface="Meiryo"/>
+                <a:cs typeface="Meiryo"/>
+                <a:sym typeface="Meiryo"/>
+              </a:rPr>
+              <a:t>月 期間限定キャンペーン</a:t>
+            </a:r>
+            <a:endParaRPr lang="ja-JP" altLang="en-US" sz="1600" b="1" dirty="0">
               <a:solidFill>
                 <a:srgbClr val="004DE6"/>
               </a:solidFill>
@@ -47525,7 +45087,7 @@
               <a:buNone/>
             </a:pPr>
             <a:r>
-              <a:rPr lang="ja-JP" sz="1200" b="1" dirty="0">
+              <a:rPr lang="ja-JP" sz="1200" b="1">
                 <a:solidFill>
                   <a:schemeClr val="dk1"/>
                 </a:solidFill>
@@ -47536,7 +45098,7 @@
               </a:rPr>
               <a:t>2026年10月20日開始〜12月25日までに終了する案件限定で、</a:t>
             </a:r>
-            <a:endParaRPr sz="1200" b="1" dirty="0">
+            <a:endParaRPr sz="1200" b="1">
               <a:solidFill>
                 <a:schemeClr val="dk1"/>
               </a:solidFill>
@@ -47557,7 +45119,7 @@
               <a:buNone/>
             </a:pPr>
             <a:r>
-              <a:rPr lang="ja-JP" sz="1200" b="1" dirty="0">
+              <a:rPr lang="ja-JP" sz="1200" b="1">
                 <a:solidFill>
                   <a:schemeClr val="dk1"/>
                 </a:solidFill>
@@ -47566,9 +45128,9 @@
                 <a:cs typeface="Meiryo"/>
                 <a:sym typeface="Meiryo"/>
               </a:rPr>
-              <a:t>特別価格・特別掲載期間・特別通数の3特典が適用される期間限定キャンペーン。</a:t>
+              <a:t>基本費用・掲載期間・配信通数の3点が特別条件になるキャンペーン。</a:t>
             </a:r>
-            <a:endParaRPr dirty="0"/>
+            <a:endParaRPr/>
           </a:p>
           <a:p>
             <a:pPr marL="0" marR="0" lvl="0" indent="0" algn="ctr" rtl="0">
@@ -47581,7 +45143,7 @@
               <a:buNone/>
             </a:pPr>
             <a:r>
-              <a:rPr lang="ja-JP" sz="1200" b="1" dirty="0">
+              <a:rPr lang="ja-JP" sz="1200" b="1">
                 <a:solidFill>
                   <a:schemeClr val="dk1"/>
                 </a:solidFill>
@@ -47592,7 +45154,7 @@
               </a:rPr>
               <a:t>友だち獲得を一気に伸ばしたいクライアントへの提案材料になる。</a:t>
             </a:r>
-            <a:endParaRPr sz="1400" b="1" dirty="0">
+            <a:endParaRPr sz="1400" b="1">
               <a:solidFill>
                 <a:schemeClr val="dk1"/>
               </a:solidFill>
@@ -47604,6 +45166,56 @@
           </a:p>
         </p:txBody>
       </p:sp>
+      <p:sp>
+        <p:nvSpPr>
+          <p:cNvPr id="52" name="Google Shape;52;p3"/>
+          <p:cNvSpPr/>
+          <p:nvPr/>
+        </p:nvSpPr>
+        <p:spPr>
+          <a:xfrm>
+            <a:off x="351381" y="2714173"/>
+            <a:ext cx="5200000" cy="338554"/>
+          </a:xfrm>
+          <a:prstGeom prst="rect">
+            <a:avLst/>
+          </a:prstGeom>
+          <a:noFill/>
+          <a:ln>
+            <a:noFill/>
+          </a:ln>
+        </p:spPr>
+        <p:txBody>
+          <a:bodyPr spcFirstLastPara="1" wrap="square" lIns="91425" tIns="45700" rIns="91425" bIns="45700" anchor="t" anchorCtr="0">
+            <a:noAutofit/>
+          </a:bodyPr>
+          <a:lstStyle/>
+          <a:p>
+            <a:pPr marL="0" marR="0" lvl="0" indent="0" algn="l" rtl="0">
+              <a:spcBef>
+                <a:spcPts val="0"/>
+              </a:spcBef>
+              <a:spcAft>
+                <a:spcPts val="0"/>
+              </a:spcAft>
+              <a:buNone/>
+            </a:pPr>
+            <a:r>
+              <a:rPr lang="ja-JP" sz="1400" b="1">
+                <a:solidFill>
+                  <a:srgbClr val="15133D"/>
+                </a:solidFill>
+                <a:latin typeface="メイリオ"/>
+                <a:ea typeface="Meiryo"/>
+                <a:cs typeface="Meiryo"/>
+                <a:sym typeface="Meiryo"/>
+              </a:rPr>
+              <a:t>■ 詳細</a:t>
+            </a:r>
+            <a:endParaRPr/>
+          </a:p>
+        </p:txBody>
+      </p:sp>
       <p:pic>
         <p:nvPicPr>
           <p:cNvPr id="62" name="Google Shape;62;p3" descr="LINE公式アカウントのロゴの使用方法とは？種類やダウンロード方法、利用時の注意点を紹介 | Mico（ミコ）"/>
@@ -47611,7 +45223,7 @@
           <p:nvPr/>
         </p:nvPicPr>
         <p:blipFill rotWithShape="1">
-          <a:blip r:embed="rId2">
+          <a:blip r:embed="rId3">
             <a:alphaModFix/>
           </a:blip>
           <a:srcRect/>
@@ -47633,10 +45245,554 @@
       </p:pic>
       <p:sp>
         <p:nvSpPr>
+          <p:cNvPr id="63" name="Rectangle 62"/>
+          <p:cNvSpPr/>
+          <p:nvPr/>
+        </p:nvSpPr>
+        <p:spPr>
+          <a:xfrm>
+            <a:off x="544108" y="3068960"/>
+            <a:ext cx="3547872" cy="274320"/>
+          </a:xfrm>
+          <a:prstGeom prst="rect">
+            <a:avLst/>
+          </a:prstGeom>
+          <a:solidFill>
+            <a:srgbClr val="F2F2F2"/>
+          </a:solidFill>
+          <a:ln>
+            <a:noFill/>
+          </a:ln>
+          <a:effectLst/>
+        </p:spPr>
+        <p:style>
+          <a:lnRef idx="1">
+            <a:schemeClr val="accent1"/>
+          </a:lnRef>
+          <a:fillRef idx="3">
+            <a:schemeClr val="accent1"/>
+          </a:fillRef>
+          <a:effectRef idx="2">
+            <a:schemeClr val="accent1"/>
+          </a:effectRef>
+          <a:fontRef idx="minor">
+            <a:schemeClr val="lt1"/>
+          </a:fontRef>
+        </p:style>
+        <p:txBody>
+          <a:bodyPr wrap="square" rIns="45720" rtlCol="0" anchor="ctr"/>
+          <a:lstStyle/>
+          <a:p>
+            <a:pPr algn="ctr"/>
+            <a:r>
+              <a:rPr sz="1300" b="1">
+                <a:solidFill>
+                  <a:srgbClr val="333333"/>
+                </a:solidFill>
+                <a:latin typeface="メイリオ"/>
+              </a:rPr>
+              <a:t>AS-IS</a:t>
+            </a:r>
+          </a:p>
+        </p:txBody>
+      </p:sp>
+      <p:sp>
+        <p:nvSpPr>
+          <p:cNvPr id="64" name="Rectangle 63"/>
+          <p:cNvSpPr/>
+          <p:nvPr/>
+        </p:nvSpPr>
+        <p:spPr>
+          <a:xfrm>
+            <a:off x="544108" y="3343280"/>
+            <a:ext cx="3547872" cy="640080"/>
+          </a:xfrm>
+          <a:prstGeom prst="rect">
+            <a:avLst/>
+          </a:prstGeom>
+          <a:solidFill>
+            <a:srgbClr val="F2F2F2"/>
+          </a:solidFill>
+          <a:ln w="12700">
+            <a:solidFill>
+              <a:srgbClr val="D9D9D9"/>
+            </a:solidFill>
+          </a:ln>
+          <a:effectLst/>
+        </p:spPr>
+        <p:style>
+          <a:lnRef idx="1">
+            <a:schemeClr val="accent1"/>
+          </a:lnRef>
+          <a:fillRef idx="3">
+            <a:schemeClr val="accent1"/>
+          </a:fillRef>
+          <a:effectRef idx="2">
+            <a:schemeClr val="accent1"/>
+          </a:effectRef>
+          <a:fontRef idx="minor">
+            <a:schemeClr val="lt1"/>
+          </a:fontRef>
+        </p:style>
+        <p:txBody>
+          <a:bodyPr wrap="square" lIns="182880" tIns="54864" rIns="137160" bIns="54864" rtlCol="0" anchor="ctr"/>
+          <a:lstStyle/>
+          <a:p>
+            <a:pPr algn="ctr">
+              <a:lnSpc>
+                <a:spcPct val="110000"/>
+              </a:lnSpc>
+            </a:pPr>
+            <a:r>
+              <a:rPr sz="1300" b="1" dirty="0">
+                <a:solidFill>
+                  <a:srgbClr val="15133D"/>
+                </a:solidFill>
+                <a:latin typeface="メイリオ"/>
+              </a:rPr>
+              <a:t>通常プラン｜基本費用1,800万円・</a:t>
+            </a:r>
+            <a:endParaRPr lang="en-US" sz="1300" b="1" dirty="0">
+              <a:solidFill>
+                <a:srgbClr val="15133D"/>
+              </a:solidFill>
+              <a:latin typeface="メイリオ"/>
+            </a:endParaRPr>
+          </a:p>
+          <a:p>
+            <a:pPr algn="ctr">
+              <a:lnSpc>
+                <a:spcPct val="110000"/>
+              </a:lnSpc>
+            </a:pPr>
+            <a:r>
+              <a:rPr sz="1300" b="1" dirty="0">
+                <a:solidFill>
+                  <a:srgbClr val="15133D"/>
+                </a:solidFill>
+                <a:latin typeface="メイリオ"/>
+              </a:rPr>
+              <a:t>掲載期間7日間・配信900万通</a:t>
+            </a:r>
+          </a:p>
+        </p:txBody>
+      </p:sp>
+      <p:sp>
+        <p:nvSpPr>
+          <p:cNvPr id="65" name="TextBox 64"/>
+          <p:cNvSpPr txBox="1"/>
+          <p:nvPr/>
+        </p:nvSpPr>
+        <p:spPr>
+          <a:xfrm>
+            <a:off x="4091980" y="3068960"/>
+            <a:ext cx="457200" cy="914400"/>
+          </a:xfrm>
+          <a:prstGeom prst="rect">
+            <a:avLst/>
+          </a:prstGeom>
+          <a:noFill/>
+        </p:spPr>
+        <p:txBody>
+          <a:bodyPr wrap="none" anchor="ctr">
+            <a:spAutoFit/>
+          </a:bodyPr>
+          <a:lstStyle/>
+          <a:p>
+            <a:pPr algn="ctr"/>
+            <a:r>
+              <a:rPr sz="1800" b="1">
+                <a:solidFill>
+                  <a:srgbClr val="3467B2"/>
+                </a:solidFill>
+                <a:latin typeface="メイリオ"/>
+              </a:rPr>
+              <a:t>▶</a:t>
+            </a:r>
+          </a:p>
+        </p:txBody>
+      </p:sp>
+      <p:sp>
+        <p:nvSpPr>
+          <p:cNvPr id="66" name="Rectangle 65"/>
+          <p:cNvSpPr/>
+          <p:nvPr/>
+        </p:nvSpPr>
+        <p:spPr>
+          <a:xfrm>
+            <a:off x="4549180" y="3068960"/>
+            <a:ext cx="5059521" cy="274320"/>
+          </a:xfrm>
+          <a:prstGeom prst="rect">
+            <a:avLst/>
+          </a:prstGeom>
+          <a:solidFill>
+            <a:srgbClr val="15133D"/>
+          </a:solidFill>
+          <a:ln>
+            <a:noFill/>
+          </a:ln>
+          <a:effectLst/>
+        </p:spPr>
+        <p:style>
+          <a:lnRef idx="1">
+            <a:schemeClr val="accent1"/>
+          </a:lnRef>
+          <a:fillRef idx="3">
+            <a:schemeClr val="accent1"/>
+          </a:fillRef>
+          <a:effectRef idx="2">
+            <a:schemeClr val="accent1"/>
+          </a:effectRef>
+          <a:fontRef idx="minor">
+            <a:schemeClr val="lt1"/>
+          </a:fontRef>
+        </p:style>
+        <p:txBody>
+          <a:bodyPr wrap="square" rIns="45720" rtlCol="0" anchor="ctr"/>
+          <a:lstStyle/>
+          <a:p>
+            <a:pPr algn="ctr"/>
+            <a:r>
+              <a:rPr sz="1300" b="1">
+                <a:solidFill>
+                  <a:srgbClr val="FFFFFF"/>
+                </a:solidFill>
+                <a:latin typeface="メイリオ"/>
+              </a:rPr>
+              <a:t>TO-BE</a:t>
+            </a:r>
+          </a:p>
+        </p:txBody>
+      </p:sp>
+      <p:sp>
+        <p:nvSpPr>
+          <p:cNvPr id="67" name="Rectangle 66"/>
+          <p:cNvSpPr/>
+          <p:nvPr/>
+        </p:nvSpPr>
+        <p:spPr>
+          <a:xfrm>
+            <a:off x="4549180" y="3343280"/>
+            <a:ext cx="5059521" cy="640080"/>
+          </a:xfrm>
+          <a:prstGeom prst="rect">
+            <a:avLst/>
+          </a:prstGeom>
+          <a:solidFill>
+            <a:srgbClr val="EAF0FA"/>
+          </a:solidFill>
+          <a:ln w="12700">
+            <a:solidFill>
+              <a:srgbClr val="3467B2"/>
+            </a:solidFill>
+          </a:ln>
+          <a:effectLst/>
+        </p:spPr>
+        <p:style>
+          <a:lnRef idx="1">
+            <a:schemeClr val="accent1"/>
+          </a:lnRef>
+          <a:fillRef idx="3">
+            <a:schemeClr val="accent1"/>
+          </a:fillRef>
+          <a:effectRef idx="2">
+            <a:schemeClr val="accent1"/>
+          </a:effectRef>
+          <a:fontRef idx="minor">
+            <a:schemeClr val="lt1"/>
+          </a:fontRef>
+        </p:style>
+        <p:txBody>
+          <a:bodyPr wrap="square" lIns="182880" tIns="54864" rIns="137160" bIns="54864" rtlCol="0" anchor="ctr"/>
+          <a:lstStyle/>
+          <a:p>
+            <a:pPr algn="ctr">
+              <a:lnSpc>
+                <a:spcPct val="110000"/>
+              </a:lnSpc>
+            </a:pPr>
+            <a:r>
+              <a:rPr sz="2200" b="1" dirty="0">
+                <a:solidFill>
+                  <a:srgbClr val="15133D"/>
+                </a:solidFill>
+                <a:latin typeface="メイリオ"/>
+              </a:rPr>
+              <a:t>特別プラン｜基本費用1,500万円</a:t>
+            </a:r>
+          </a:p>
+          <a:p>
+            <a:pPr>
+              <a:lnSpc>
+                <a:spcPct val="110000"/>
+              </a:lnSpc>
+              <a:spcBef>
+                <a:spcPts val="500"/>
+              </a:spcBef>
+            </a:pPr>
+            <a:r>
+              <a:rPr sz="1100" dirty="0">
+                <a:solidFill>
+                  <a:srgbClr val="333333"/>
+                </a:solidFill>
+                <a:latin typeface="メイリオ"/>
+              </a:rPr>
+              <a:t>掲載期間15日間・配信1,050万通に拡大</a:t>
+            </a:r>
+          </a:p>
+        </p:txBody>
+      </p:sp>
+      <p:sp>
+        <p:nvSpPr>
+          <p:cNvPr id="68" name="Rounded Rectangle 67"/>
+          <p:cNvSpPr/>
+          <p:nvPr/>
+        </p:nvSpPr>
+        <p:spPr>
+          <a:xfrm>
+            <a:off x="544108" y="4211960"/>
+            <a:ext cx="3547872" cy="1371600"/>
+          </a:xfrm>
+          <a:prstGeom prst="roundRect">
+            <a:avLst>
+              <a:gd name="adj" fmla="val 6000"/>
+            </a:avLst>
+          </a:prstGeom>
+          <a:solidFill>
+            <a:srgbClr val="EAF0FA"/>
+          </a:solidFill>
+          <a:ln w="12700">
+            <a:solidFill>
+              <a:srgbClr val="3467B2"/>
+            </a:solidFill>
+          </a:ln>
+          <a:effectLst/>
+        </p:spPr>
+        <p:style>
+          <a:lnRef idx="1">
+            <a:schemeClr val="accent1"/>
+          </a:lnRef>
+          <a:fillRef idx="3">
+            <a:schemeClr val="accent1"/>
+          </a:fillRef>
+          <a:effectRef idx="2">
+            <a:schemeClr val="accent1"/>
+          </a:effectRef>
+          <a:fontRef idx="minor">
+            <a:schemeClr val="lt1"/>
+          </a:fontRef>
+        </p:style>
+        <p:txBody>
+          <a:bodyPr wrap="square" lIns="228600" rIns="182880" rtlCol="0" anchor="ctr"/>
+          <a:lstStyle/>
+          <a:p>
+            <a:pPr algn="l"/>
+            <a:r>
+              <a:rPr sz="1800" b="1" dirty="0" err="1">
+                <a:solidFill>
+                  <a:srgbClr val="15133D"/>
+                </a:solidFill>
+                <a:latin typeface="メイリオ"/>
+              </a:rPr>
+              <a:t>特別価格で提案しやすい</a:t>
+            </a:r>
+            <a:endParaRPr sz="1800" b="1" dirty="0">
+              <a:solidFill>
+                <a:srgbClr val="15133D"/>
+              </a:solidFill>
+              <a:latin typeface="メイリオ"/>
+            </a:endParaRPr>
+          </a:p>
+          <a:p>
+            <a:pPr algn="l">
+              <a:lnSpc>
+                <a:spcPct val="115000"/>
+              </a:lnSpc>
+              <a:spcBef>
+                <a:spcPts val="600"/>
+              </a:spcBef>
+            </a:pPr>
+            <a:r>
+              <a:rPr sz="1200" dirty="0">
+                <a:solidFill>
+                  <a:srgbClr val="333333"/>
+                </a:solidFill>
+                <a:latin typeface="メイリオ"/>
+              </a:rPr>
+              <a:t>基本費用が1,800万円→1,500万円に。</a:t>
+            </a:r>
+            <a:endParaRPr lang="en-US" sz="1200" dirty="0">
+              <a:solidFill>
+                <a:srgbClr val="333333"/>
+              </a:solidFill>
+              <a:latin typeface="メイリオ"/>
+            </a:endParaRPr>
+          </a:p>
+          <a:p>
+            <a:pPr algn="l">
+              <a:lnSpc>
+                <a:spcPct val="115000"/>
+              </a:lnSpc>
+              <a:spcBef>
+                <a:spcPts val="600"/>
+              </a:spcBef>
+            </a:pPr>
+            <a:r>
+              <a:rPr sz="1200" dirty="0" err="1">
+                <a:solidFill>
+                  <a:srgbClr val="333333"/>
+                </a:solidFill>
+                <a:latin typeface="メイリオ"/>
+              </a:rPr>
+              <a:t>期間限定の特別プランとして提案の後押しになる</a:t>
+            </a:r>
+            <a:r>
+              <a:rPr sz="1200" dirty="0">
+                <a:solidFill>
+                  <a:srgbClr val="333333"/>
+                </a:solidFill>
+                <a:latin typeface="メイリオ"/>
+              </a:rPr>
+              <a:t>。</a:t>
+            </a:r>
+          </a:p>
+        </p:txBody>
+      </p:sp>
+      <p:sp>
+        <p:nvSpPr>
+          <p:cNvPr id="69" name="Rounded Rectangle 68"/>
+          <p:cNvSpPr/>
+          <p:nvPr/>
+        </p:nvSpPr>
+        <p:spPr>
+          <a:xfrm>
+            <a:off x="4549180" y="4211960"/>
+            <a:ext cx="5059521" cy="1371600"/>
+          </a:xfrm>
+          <a:prstGeom prst="roundRect">
+            <a:avLst>
+              <a:gd name="adj" fmla="val 6000"/>
+            </a:avLst>
+          </a:prstGeom>
+          <a:solidFill>
+            <a:srgbClr val="EAF0FA"/>
+          </a:solidFill>
+          <a:ln w="12700">
+            <a:solidFill>
+              <a:srgbClr val="3467B2"/>
+            </a:solidFill>
+          </a:ln>
+          <a:effectLst/>
+        </p:spPr>
+        <p:style>
+          <a:lnRef idx="1">
+            <a:schemeClr val="accent1"/>
+          </a:lnRef>
+          <a:fillRef idx="3">
+            <a:schemeClr val="accent1"/>
+          </a:fillRef>
+          <a:effectRef idx="2">
+            <a:schemeClr val="accent1"/>
+          </a:effectRef>
+          <a:fontRef idx="minor">
+            <a:schemeClr val="lt1"/>
+          </a:fontRef>
+        </p:style>
+        <p:txBody>
+          <a:bodyPr wrap="square" lIns="228600" rIns="182880" rtlCol="0" anchor="ctr"/>
+          <a:lstStyle/>
+          <a:p>
+            <a:pPr algn="l"/>
+            <a:r>
+              <a:rPr sz="1700" b="1" dirty="0">
+                <a:solidFill>
+                  <a:srgbClr val="15133D"/>
+                </a:solidFill>
+                <a:latin typeface="メイリオ"/>
+              </a:rPr>
+              <a:t>景品はLINEポイント2pt総付</a:t>
+            </a:r>
+          </a:p>
+          <a:p>
+            <a:pPr algn="l">
+              <a:lnSpc>
+                <a:spcPct val="115000"/>
+              </a:lnSpc>
+              <a:spcBef>
+                <a:spcPts val="600"/>
+              </a:spcBef>
+            </a:pPr>
+            <a:r>
+              <a:rPr sz="1100" dirty="0">
+                <a:solidFill>
+                  <a:srgbClr val="333333"/>
+                </a:solidFill>
+                <a:latin typeface="メイリオ"/>
+              </a:rPr>
+              <a:t>応募者全員にLINEポイント2ptを進呈するアンケート型キャンペーン。</a:t>
+            </a:r>
+            <a:endParaRPr lang="en-US" sz="1100" dirty="0">
+              <a:solidFill>
+                <a:srgbClr val="333333"/>
+              </a:solidFill>
+              <a:latin typeface="メイリオ"/>
+            </a:endParaRPr>
+          </a:p>
+          <a:p>
+            <a:pPr algn="l">
+              <a:lnSpc>
+                <a:spcPct val="115000"/>
+              </a:lnSpc>
+              <a:spcBef>
+                <a:spcPts val="600"/>
+              </a:spcBef>
+            </a:pPr>
+            <a:r>
+              <a:rPr sz="1100" dirty="0" err="1">
+                <a:solidFill>
+                  <a:srgbClr val="333333"/>
+                </a:solidFill>
+                <a:latin typeface="メイリオ"/>
+              </a:rPr>
+              <a:t>対象はLINE公式アカウント・Messaging</a:t>
+            </a:r>
+            <a:r>
+              <a:rPr sz="1100" dirty="0">
+                <a:solidFill>
+                  <a:srgbClr val="333333"/>
+                </a:solidFill>
+                <a:latin typeface="メイリオ"/>
+              </a:rPr>
+              <a:t> </a:t>
+            </a:r>
+            <a:r>
+              <a:rPr sz="1100" dirty="0" err="1">
+                <a:solidFill>
+                  <a:srgbClr val="333333"/>
+                </a:solidFill>
+                <a:latin typeface="メイリオ"/>
+              </a:rPr>
+              <a:t>API対応かつ認証プロバイダー必須</a:t>
+            </a:r>
+            <a:r>
+              <a:rPr sz="1100" dirty="0">
+                <a:solidFill>
+                  <a:srgbClr val="333333"/>
+                </a:solidFill>
+                <a:latin typeface="メイリオ"/>
+              </a:rPr>
+              <a:t>。</a:t>
+            </a:r>
+          </a:p>
+        </p:txBody>
+      </p:sp>
+      <p:sp>
+        <p:nvSpPr>
           <p:cNvPr id="3" name="正方形/長方形 2">
             <a:extLst>
               <a:ext uri="{FF2B5EF4-FFF2-40B4-BE49-F238E27FC236}">
-                <a16:creationId xmlns:a16="http://schemas.microsoft.com/office/drawing/2014/main" id="{FDC2FD67-A62F-6E18-8EDA-DB1187DC9A48}"/>
+                <a16:creationId xmlns:a16="http://schemas.microsoft.com/office/drawing/2014/main" id="{B4A2C5C5-23E7-72FD-079B-3C246572FE9A}"/>
               </a:ext>
             </a:extLst>
           </p:cNvPr>
@@ -47703,10 +45859,10 @@
       </p:sp>
       <p:sp>
         <p:nvSpPr>
-          <p:cNvPr id="6" name="正方形/長方形 5">
+          <p:cNvPr id="5" name="正方形/長方形 4">
             <a:extLst>
               <a:ext uri="{FF2B5EF4-FFF2-40B4-BE49-F238E27FC236}">
-                <a16:creationId xmlns:a16="http://schemas.microsoft.com/office/drawing/2014/main" id="{A047198E-5C74-A939-E628-2EA5E2D7BDAD}"/>
+                <a16:creationId xmlns:a16="http://schemas.microsoft.com/office/drawing/2014/main" id="{2024E7FC-BCCF-EF5E-24E7-6708EA4D9CE6}"/>
               </a:ext>
             </a:extLst>
           </p:cNvPr>
@@ -47789,10 +45945,10 @@
       </p:sp>
       <p:sp>
         <p:nvSpPr>
-          <p:cNvPr id="8" name="正方形/長方形 7">
+          <p:cNvPr id="7" name="正方形/長方形 6">
             <a:extLst>
               <a:ext uri="{FF2B5EF4-FFF2-40B4-BE49-F238E27FC236}">
-                <a16:creationId xmlns:a16="http://schemas.microsoft.com/office/drawing/2014/main" id="{BB87F300-C517-8B6A-DECA-E2AC2F874676}"/>
+                <a16:creationId xmlns:a16="http://schemas.microsoft.com/office/drawing/2014/main" id="{F0E0E3F0-F17E-3F21-B751-96468BECEAD0}"/>
               </a:ext>
             </a:extLst>
           </p:cNvPr>
@@ -47808,7 +45964,7 @@
             <a:avLst/>
           </a:prstGeom>
           <a:solidFill>
-            <a:srgbClr val="C6D9F1"/>
+            <a:schemeClr val="bg1"/>
           </a:solidFill>
           <a:ln w="9525">
             <a:solidFill>
@@ -47869,21 +46025,15 @@
       </p:sp>
       <p:graphicFrame>
         <p:nvGraphicFramePr>
-          <p:cNvPr id="10" name="図表 9">
+          <p:cNvPr id="9" name="図表 8">
             <a:extLst>
               <a:ext uri="{FF2B5EF4-FFF2-40B4-BE49-F238E27FC236}">
-                <a16:creationId xmlns:a16="http://schemas.microsoft.com/office/drawing/2014/main" id="{434171DE-9398-A4AE-F24E-2F86F40A3619}"/>
+                <a16:creationId xmlns:a16="http://schemas.microsoft.com/office/drawing/2014/main" id="{C761A312-CBA2-643B-0133-3A448D5EB91C}"/>
               </a:ext>
             </a:extLst>
           </p:cNvPr>
           <p:cNvGraphicFramePr/>
-          <p:nvPr>
-            <p:extLst>
-              <p:ext uri="{D42A27DB-BD31-4B8C-83A1-F6EECF244321}">
-                <p14:modId xmlns:p14="http://schemas.microsoft.com/office/powerpoint/2010/main" val="4005745952"/>
-              </p:ext>
-            </p:extLst>
-          </p:nvPr>
+          <p:nvPr/>
         </p:nvGraphicFramePr>
         <p:xfrm>
           <a:off x="8529759" y="688315"/>
@@ -47891,16 +46041,16 @@
         </p:xfrm>
         <a:graphic>
           <a:graphicData uri="http://schemas.openxmlformats.org/drawingml/2006/diagram">
-            <dgm:relIds xmlns:dgm="http://schemas.openxmlformats.org/drawingml/2006/diagram" xmlns:r="http://schemas.openxmlformats.org/officeDocument/2006/relationships" r:dm="rId3" r:lo="rId4" r:qs="rId5" r:cs="rId6"/>
+            <dgm:relIds xmlns:dgm="http://schemas.openxmlformats.org/drawingml/2006/diagram" xmlns:r="http://schemas.openxmlformats.org/officeDocument/2006/relationships" r:dm="rId4" r:lo="rId5" r:qs="rId6" r:cs="rId7"/>
           </a:graphicData>
         </a:graphic>
       </p:graphicFrame>
       <p:sp>
         <p:nvSpPr>
-          <p:cNvPr id="12" name="正方形/長方形 11">
+          <p:cNvPr id="11" name="正方形/長方形 10">
             <a:extLst>
               <a:ext uri="{FF2B5EF4-FFF2-40B4-BE49-F238E27FC236}">
-                <a16:creationId xmlns:a16="http://schemas.microsoft.com/office/drawing/2014/main" id="{1E4429CE-620E-8CAE-98BB-55D6126937EB}"/>
+                <a16:creationId xmlns:a16="http://schemas.microsoft.com/office/drawing/2014/main" id="{361304B1-F9A7-8DB6-7F0D-C4C8C50522F4}"/>
               </a:ext>
             </a:extLst>
           </p:cNvPr>
@@ -47915,7 +46065,12 @@
           <a:prstGeom prst="rect">
             <a:avLst/>
           </a:prstGeom>
-          <a:noFill/>
+          <a:solidFill>
+            <a:schemeClr val="bg2">
+              <a:lumMod val="20000"/>
+              <a:lumOff val="80000"/>
+            </a:schemeClr>
+          </a:solidFill>
           <a:ln w="9525">
             <a:solidFill>
               <a:srgbClr val="4F81BD"/>
@@ -47973,6 +46128,1851 @@
               </a:rPr>
               <a:t>商材</a:t>
             </a:r>
+          </a:p>
+        </p:txBody>
+      </p:sp>
+      <p:sp>
+        <p:nvSpPr>
+          <p:cNvPr id="44" name="Google Shape;44;p3"/>
+          <p:cNvSpPr txBox="1"/>
+          <p:nvPr/>
+        </p:nvSpPr>
+        <p:spPr>
+          <a:xfrm>
+            <a:off x="3296816" y="6597352"/>
+            <a:ext cx="6209091" cy="215444"/>
+          </a:xfrm>
+          <a:prstGeom prst="rect">
+            <a:avLst/>
+          </a:prstGeom>
+          <a:noFill/>
+          <a:ln>
+            <a:noFill/>
+          </a:ln>
+        </p:spPr>
+        <p:txBody>
+          <a:bodyPr anchorCtr="0" anchor="t" bIns="45700" lIns="91425" spcFirstLastPara="1" rIns="91425" wrap="square" tIns="45700">
+            <a:spAutoFit/>
+          </a:bodyPr>
+          <a:lstStyle/>
+          <a:p>
+            <a:pPr indent="0" lvl="0" marL="0" marR="0" rtl="0" algn="l">
+              <a:spcBef>
+                <a:spcPts val="0"/>
+              </a:spcBef>
+              <a:spcAft>
+                <a:spcPts val="0"/>
+              </a:spcAft>
+              <a:buNone/>
+            </a:pPr>
+            <a:r>
+              <a:rPr b="0" i="0" lang="ja-JP" sz="800" u="none" cap="none" strike="noStrike">
+                <a:solidFill>
+                  <a:schemeClr val="lt1"/>
+                </a:solidFill>
+                <a:latin typeface="メイリオ"/>
+                <a:ea typeface="Meiryo"/>
+                <a:cs typeface="Meiryo"/>
+                <a:sym typeface="Meiryo"/>
+              </a:rPr>
+              <a:t>出典：https://www.lycbiz.com/jp/service/line-sales-promotion/</a:t>
+            </a:r>
+            <a:endParaRPr sz="800">
+              <a:solidFill>
+                <a:schemeClr val="lt1"/>
+              </a:solidFill>
+              <a:latin typeface="Meiryo"/>
+              <a:ea typeface="Meiryo"/>
+              <a:cs typeface="Meiryo"/>
+              <a:sym typeface="Meiryo"/>
+            </a:endParaRPr>
+          </a:p>
+        </p:txBody>
+      </p:sp>
+    </p:spTree>
+  </p:cSld>
+  <p:clrMapOvr>
+    <a:masterClrMapping/>
+  </p:clrMapOvr>
+</p:sld>
+</file>
+
+<file path=ppt/slides/slide9.xml><?xml version="1.0" encoding="utf-8"?>
+<p:sld xmlns:a="http://schemas.openxmlformats.org/drawingml/2006/main" xmlns:r="http://schemas.openxmlformats.org/officeDocument/2006/relationships" xmlns:p="http://schemas.openxmlformats.org/presentationml/2006/main">
+  <p:cSld>
+    <p:spTree>
+      <p:nvGrpSpPr>
+        <p:cNvPr id="1" name=""/>
+        <p:cNvGrpSpPr/>
+        <p:nvPr/>
+      </p:nvGrpSpPr>
+      <p:grpSpPr>
+        <a:xfrm>
+          <a:off x="0" y="0"/>
+          <a:ext cx="0" cy="0"/>
+          <a:chOff x="0" y="0"/>
+          <a:chExt cx="0" cy="0"/>
+        </a:xfrm>
+      </p:grpSpPr>
+      <p:sp>
+        <p:nvSpPr>
+          <p:cNvPr id="40" name="Google Shape;40;p3"/>
+          <p:cNvSpPr/>
+          <p:nvPr/>
+        </p:nvSpPr>
+        <p:spPr>
+          <a:xfrm>
+            <a:off x="292801" y="730955"/>
+            <a:ext cx="1296144" cy="435690"/>
+          </a:xfrm>
+          <a:prstGeom prst="rect">
+            <a:avLst/>
+          </a:prstGeom>
+          <a:solidFill>
+            <a:schemeClr val="dk2"/>
+          </a:solidFill>
+          <a:ln w="9525" cap="flat" cmpd="sng">
+            <a:solidFill>
+              <a:srgbClr val="4A7DBA"/>
+            </a:solidFill>
+            <a:prstDash val="solid"/>
+            <a:round/>
+            <a:headEnd type="none" w="sm" len="sm"/>
+            <a:tailEnd type="none" w="sm" len="sm"/>
+          </a:ln>
+        </p:spPr>
+        <p:txBody>
+          <a:bodyPr spcFirstLastPara="1" wrap="square" lIns="91425" tIns="45700" rIns="91425" bIns="45700" anchor="ctr" anchorCtr="0">
+            <a:noAutofit/>
+          </a:bodyPr>
+          <a:lstStyle/>
+          <a:p>
+            <a:pPr marL="0" marR="0" lvl="0" indent="0" algn="ctr" rtl="0">
+              <a:spcBef>
+                <a:spcPts val="0"/>
+              </a:spcBef>
+              <a:spcAft>
+                <a:spcPts val="0"/>
+              </a:spcAft>
+              <a:buNone/>
+            </a:pPr>
+            <a:r>
+              <a:rPr lang="ja-JP" sz="1800" b="0" i="0" u="none" strike="noStrike" cap="none">
+                <a:solidFill>
+                  <a:schemeClr val="lt1"/>
+                </a:solidFill>
+                <a:latin typeface="メイリオ"/>
+                <a:ea typeface="Meiryo"/>
+                <a:cs typeface="Meiryo"/>
+                <a:sym typeface="Meiryo"/>
+              </a:rPr>
+              <a:t>対象業界</a:t>
+            </a:r>
+            <a:endParaRPr/>
+          </a:p>
+        </p:txBody>
+      </p:sp>
+      <p:sp>
+        <p:nvSpPr>
+          <p:cNvPr id="43" name="Google Shape;43;p3"/>
+          <p:cNvSpPr/>
+          <p:nvPr/>
+        </p:nvSpPr>
+        <p:spPr>
+          <a:xfrm>
+            <a:off x="1594068" y="730955"/>
+            <a:ext cx="2926883" cy="435690"/>
+          </a:xfrm>
+          <a:prstGeom prst="rect">
+            <a:avLst/>
+          </a:prstGeom>
+          <a:noFill/>
+          <a:ln w="9525" cap="flat" cmpd="sng">
+            <a:solidFill>
+              <a:srgbClr val="4A7DBA"/>
+            </a:solidFill>
+            <a:prstDash val="solid"/>
+            <a:round/>
+            <a:headEnd type="none" w="sm" len="sm"/>
+            <a:tailEnd type="none" w="sm" len="sm"/>
+          </a:ln>
+        </p:spPr>
+        <p:txBody>
+          <a:bodyPr spcFirstLastPara="1" wrap="square" lIns="91425" tIns="45700" rIns="91425" bIns="45700" anchor="ctr" anchorCtr="0">
+            <a:noAutofit/>
+          </a:bodyPr>
+          <a:lstStyle/>
+          <a:p>
+            <a:pPr marL="0" marR="0" lvl="0" indent="0" algn="ctr" rtl="0">
+              <a:spcBef>
+                <a:spcPts val="0"/>
+              </a:spcBef>
+              <a:spcAft>
+                <a:spcPts val="0"/>
+              </a:spcAft>
+              <a:buNone/>
+            </a:pPr>
+            <a:r>
+              <a:rPr lang="ja-JP" sz="1300" b="0" i="0" u="none" strike="noStrike" cap="none">
+                <a:solidFill>
+                  <a:schemeClr val="dk1"/>
+                </a:solidFill>
+                <a:latin typeface="メイリオ"/>
+                <a:ea typeface="Meiryo"/>
+                <a:cs typeface="Meiryo"/>
+                <a:sym typeface="Meiryo"/>
+              </a:rPr>
+              <a:t>友だち獲得を強化したい全業種</a:t>
+            </a:r>
+            <a:endParaRPr/>
+          </a:p>
+        </p:txBody>
+      </p:sp>
+      <p:sp>
+        <p:nvSpPr>
+          <p:cNvPr id="45" name="Google Shape;45;p3"/>
+          <p:cNvSpPr/>
+          <p:nvPr/>
+        </p:nvSpPr>
+        <p:spPr>
+          <a:xfrm>
+            <a:off x="0" y="1234746"/>
+            <a:ext cx="9906000" cy="672259"/>
+          </a:xfrm>
+          <a:prstGeom prst="rect">
+            <a:avLst/>
+          </a:prstGeom>
+          <a:solidFill>
+            <a:srgbClr val="C5D8F1"/>
+          </a:solidFill>
+          <a:ln>
+            <a:noFill/>
+          </a:ln>
+        </p:spPr>
+        <p:txBody>
+          <a:bodyPr spcFirstLastPara="1" wrap="square" lIns="91425" tIns="45700" rIns="91425" bIns="45700" anchor="ctr" anchorCtr="0">
+            <a:noAutofit/>
+          </a:bodyPr>
+          <a:lstStyle/>
+          <a:p>
+            <a:pPr marL="0" marR="0" lvl="0" indent="0" algn="ctr" rtl="0">
+              <a:spcBef>
+                <a:spcPts val="0"/>
+              </a:spcBef>
+              <a:spcAft>
+                <a:spcPts val="0"/>
+              </a:spcAft>
+              <a:buNone/>
+            </a:pPr>
+            <a:r>
+              <a:rPr lang="ja-JP" sz="1600" b="1">
+                <a:solidFill>
+                  <a:srgbClr val="004DE6"/>
+                </a:solidFill>
+                <a:latin typeface="メイリオ"/>
+                <a:ea typeface="Meiryo"/>
+                <a:cs typeface="Meiryo"/>
+                <a:sym typeface="Meiryo"/>
+              </a:rPr>
+              <a:t>　　　　　　</a:t>
+            </a:r>
+            <a:endParaRPr sz="1800" b="1">
+              <a:solidFill>
+                <a:srgbClr val="004DE6"/>
+              </a:solidFill>
+              <a:latin typeface="Meiryo"/>
+              <a:ea typeface="Meiryo"/>
+              <a:cs typeface="Meiryo"/>
+              <a:sym typeface="Meiryo"/>
+            </a:endParaRPr>
+          </a:p>
+        </p:txBody>
+      </p:sp>
+      <p:sp>
+        <p:nvSpPr>
+          <p:cNvPr id="46" name="Google Shape;46;p3"/>
+          <p:cNvSpPr/>
+          <p:nvPr/>
+        </p:nvSpPr>
+        <p:spPr>
+          <a:xfrm>
+            <a:off x="1089832" y="1437370"/>
+            <a:ext cx="7031520" cy="338554"/>
+          </a:xfrm>
+          <a:prstGeom prst="rect">
+            <a:avLst/>
+          </a:prstGeom>
+          <a:noFill/>
+          <a:ln>
+            <a:noFill/>
+          </a:ln>
+        </p:spPr>
+        <p:txBody>
+          <a:bodyPr spcFirstLastPara="1" wrap="square" lIns="91425" tIns="45700" rIns="91425" bIns="45700" anchor="t" anchorCtr="0">
+            <a:spAutoFit/>
+          </a:bodyPr>
+          <a:lstStyle/>
+          <a:p>
+            <a:pPr lvl="0"/>
+            <a:r>
+              <a:rPr lang="en-US" altLang="ja-JP" sz="1600" b="1" dirty="0">
+                <a:solidFill>
+                  <a:srgbClr val="004DE6"/>
+                </a:solidFill>
+                <a:latin typeface="メイリオ"/>
+                <a:ea typeface="Meiryo"/>
+                <a:cs typeface="Meiryo"/>
+                <a:sym typeface="Meiryo"/>
+              </a:rPr>
+              <a:t>【LINE</a:t>
+            </a:r>
+            <a:r>
+              <a:rPr lang="ja-JP" altLang="en-US" sz="1600" b="1" dirty="0">
+                <a:solidFill>
+                  <a:srgbClr val="004DE6"/>
+                </a:solidFill>
+                <a:latin typeface="メイリオ"/>
+                <a:ea typeface="Meiryo"/>
+                <a:cs typeface="Meiryo"/>
+                <a:sym typeface="Meiryo"/>
+              </a:rPr>
+              <a:t>オープンキャンペーン</a:t>
+            </a:r>
+            <a:r>
+              <a:rPr lang="en-US" altLang="ja-JP" sz="1600" b="1" dirty="0">
+                <a:solidFill>
+                  <a:srgbClr val="004DE6"/>
+                </a:solidFill>
+                <a:latin typeface="メイリオ"/>
+                <a:ea typeface="Meiryo"/>
+                <a:cs typeface="Meiryo"/>
+                <a:sym typeface="Meiryo"/>
+              </a:rPr>
+              <a:t>】26</a:t>
+            </a:r>
+            <a:r>
+              <a:rPr lang="ja-JP" altLang="en-US" sz="1600" b="1" dirty="0">
+                <a:solidFill>
+                  <a:srgbClr val="004DE6"/>
+                </a:solidFill>
+                <a:latin typeface="メイリオ"/>
+                <a:ea typeface="Meiryo"/>
+                <a:cs typeface="Meiryo"/>
+                <a:sym typeface="Meiryo"/>
+              </a:rPr>
+              <a:t>年</a:t>
+            </a:r>
+            <a:r>
+              <a:rPr lang="en-US" altLang="ja-JP" sz="1600" b="1" dirty="0">
+                <a:solidFill>
+                  <a:srgbClr val="004DE6"/>
+                </a:solidFill>
+                <a:latin typeface="メイリオ"/>
+                <a:ea typeface="Meiryo"/>
+                <a:cs typeface="Meiryo"/>
+                <a:sym typeface="Meiryo"/>
+              </a:rPr>
+              <a:t>10-12</a:t>
+            </a:r>
+            <a:r>
+              <a:rPr lang="ja-JP" altLang="en-US" sz="1600" b="1" dirty="0">
+                <a:solidFill>
+                  <a:srgbClr val="004DE6"/>
+                </a:solidFill>
+                <a:latin typeface="メイリオ"/>
+                <a:ea typeface="Meiryo"/>
+                <a:cs typeface="Meiryo"/>
+                <a:sym typeface="Meiryo"/>
+              </a:rPr>
+              <a:t>月 期間限定キャンペーン</a:t>
+            </a:r>
+            <a:endParaRPr lang="ja-JP" altLang="en-US" sz="1600" b="1" dirty="0">
+              <a:solidFill>
+                <a:srgbClr val="004DE6"/>
+              </a:solidFill>
+              <a:latin typeface="Meiryo"/>
+              <a:ea typeface="Meiryo"/>
+              <a:cs typeface="Meiryo"/>
+              <a:sym typeface="Meiryo"/>
+            </a:endParaRPr>
+          </a:p>
+        </p:txBody>
+      </p:sp>
+      <p:sp>
+        <p:nvSpPr>
+          <p:cNvPr id="47" name="Google Shape;47;p3"/>
+          <p:cNvSpPr txBox="1"/>
+          <p:nvPr/>
+        </p:nvSpPr>
+        <p:spPr>
+          <a:xfrm>
+            <a:off x="182880" y="88175"/>
+            <a:ext cx="7512385" cy="365091"/>
+          </a:xfrm>
+          <a:prstGeom prst="rect">
+            <a:avLst/>
+          </a:prstGeom>
+          <a:noFill/>
+          <a:ln>
+            <a:noFill/>
+          </a:ln>
+        </p:spPr>
+        <p:txBody>
+          <a:bodyPr spcFirstLastPara="1" wrap="square" lIns="91425" tIns="72000" rIns="91425" bIns="45700" anchor="t" anchorCtr="0">
+            <a:spAutoFit/>
+          </a:bodyPr>
+          <a:lstStyle/>
+          <a:p>
+            <a:pPr marL="0" marR="0" lvl="0" indent="0" algn="l" rtl="0">
+              <a:spcBef>
+                <a:spcPts val="0"/>
+              </a:spcBef>
+              <a:spcAft>
+                <a:spcPts val="0"/>
+              </a:spcAft>
+              <a:buClr>
+                <a:schemeClr val="dk1"/>
+              </a:buClr>
+              <a:buSzPts val="1600"/>
+              <a:buFont typeface="Arial"/>
+              <a:buNone/>
+            </a:pPr>
+            <a:r>
+              <a:rPr lang="ja-JP" sz="1600" b="0" u="none">
+                <a:solidFill>
+                  <a:schemeClr val="dk1"/>
+                </a:solidFill>
+                <a:latin typeface="メイリオ"/>
+                <a:ea typeface="Meiryo"/>
+                <a:cs typeface="Meiryo"/>
+                <a:sym typeface="Meiryo"/>
+              </a:rPr>
+              <a:t>    今後のアップデート情報</a:t>
+            </a:r>
+            <a:endParaRPr sz="1600" b="0" u="none">
+              <a:solidFill>
+                <a:schemeClr val="dk1"/>
+              </a:solidFill>
+              <a:latin typeface="Meiryo"/>
+              <a:ea typeface="Meiryo"/>
+              <a:cs typeface="Meiryo"/>
+              <a:sym typeface="Meiryo"/>
+            </a:endParaRPr>
+          </a:p>
+        </p:txBody>
+      </p:sp>
+      <p:sp>
+        <p:nvSpPr>
+          <p:cNvPr id="50" name="Google Shape;50;p3"/>
+          <p:cNvSpPr/>
+          <p:nvPr/>
+        </p:nvSpPr>
+        <p:spPr>
+          <a:xfrm>
+            <a:off x="0" y="1890267"/>
+            <a:ext cx="9906000" cy="733579"/>
+          </a:xfrm>
+          <a:prstGeom prst="rect">
+            <a:avLst/>
+          </a:prstGeom>
+          <a:solidFill>
+            <a:srgbClr val="F2F2F2"/>
+          </a:solidFill>
+          <a:ln>
+            <a:noFill/>
+          </a:ln>
+        </p:spPr>
+        <p:txBody>
+          <a:bodyPr spcFirstLastPara="1" wrap="square" lIns="91425" tIns="45700" rIns="91425" bIns="45700" anchor="ctr" anchorCtr="0">
+            <a:noAutofit/>
+          </a:bodyPr>
+          <a:lstStyle/>
+          <a:p>
+            <a:pPr marL="0" marR="0" lvl="0" indent="0" algn="ctr" rtl="0">
+              <a:spcBef>
+                <a:spcPts val="0"/>
+              </a:spcBef>
+              <a:spcAft>
+                <a:spcPts val="0"/>
+              </a:spcAft>
+              <a:buNone/>
+            </a:pPr>
+            <a:endParaRPr sz="1200">
+              <a:solidFill>
+                <a:schemeClr val="dk1"/>
+              </a:solidFill>
+              <a:latin typeface="Meiryo"/>
+              <a:ea typeface="Meiryo"/>
+              <a:cs typeface="Meiryo"/>
+              <a:sym typeface="Meiryo"/>
+            </a:endParaRPr>
+          </a:p>
+        </p:txBody>
+      </p:sp>
+      <p:sp>
+        <p:nvSpPr>
+          <p:cNvPr id="51" name="Google Shape;51;p3"/>
+          <p:cNvSpPr/>
+          <p:nvPr/>
+        </p:nvSpPr>
+        <p:spPr>
+          <a:xfrm>
+            <a:off x="544108" y="1961282"/>
+            <a:ext cx="8817783" cy="646331"/>
+          </a:xfrm>
+          <a:prstGeom prst="rect">
+            <a:avLst/>
+          </a:prstGeom>
+          <a:noFill/>
+          <a:ln>
+            <a:noFill/>
+          </a:ln>
+        </p:spPr>
+        <p:txBody>
+          <a:bodyPr spcFirstLastPara="1" wrap="square" lIns="91425" tIns="45700" rIns="91425" bIns="45700" anchor="t" anchorCtr="0">
+            <a:spAutoFit/>
+          </a:bodyPr>
+          <a:lstStyle/>
+          <a:p>
+            <a:pPr marL="0" marR="0" lvl="0" indent="0" algn="ctr" rtl="0">
+              <a:spcBef>
+                <a:spcPts val="0"/>
+              </a:spcBef>
+              <a:spcAft>
+                <a:spcPts val="0"/>
+              </a:spcAft>
+              <a:buNone/>
+            </a:pPr>
+            <a:r>
+              <a:rPr lang="ja-JP" sz="1200" b="1">
+                <a:solidFill>
+                  <a:schemeClr val="dk1"/>
+                </a:solidFill>
+                <a:latin typeface="メイリオ"/>
+                <a:ea typeface="Meiryo"/>
+                <a:cs typeface="Meiryo"/>
+                <a:sym typeface="Meiryo"/>
+              </a:rPr>
+              <a:t>申込みから掲載開始まで、審査・枠おさえ・入稿の3段階を経る。</a:t>
+            </a:r>
+            <a:endParaRPr sz="1200" b="1">
+              <a:solidFill>
+                <a:schemeClr val="dk1"/>
+              </a:solidFill>
+              <a:latin typeface="Meiryo"/>
+              <a:ea typeface="Meiryo"/>
+              <a:cs typeface="Meiryo"/>
+              <a:sym typeface="Meiryo"/>
+            </a:endParaRPr>
+          </a:p>
+          <a:p>
+            <a:pPr marL="0" marR="0" lvl="0" indent="0" algn="ctr" rtl="0">
+              <a:spcBef>
+                <a:spcPts val="0"/>
+              </a:spcBef>
+              <a:spcAft>
+                <a:spcPts val="0"/>
+              </a:spcAft>
+              <a:buNone/>
+            </a:pPr>
+            <a:r>
+              <a:rPr lang="ja-JP" sz="1200" b="1">
+                <a:solidFill>
+                  <a:schemeClr val="dk1"/>
+                </a:solidFill>
+                <a:latin typeface="メイリオ"/>
+                <a:ea typeface="Meiryo"/>
+                <a:cs typeface="Meiryo"/>
+                <a:sym typeface="Meiryo"/>
+              </a:rPr>
+              <a:t>配信枠は早い者勝ちのため、各締切の厳守が前提条件になる。</a:t>
+            </a:r>
+            <a:endParaRPr/>
+          </a:p>
+          <a:p>
+            <a:pPr marL="0" marR="0" lvl="0" indent="0" algn="ctr" rtl="0">
+              <a:spcBef>
+                <a:spcPts val="0"/>
+              </a:spcBef>
+              <a:spcAft>
+                <a:spcPts val="0"/>
+              </a:spcAft>
+              <a:buNone/>
+            </a:pPr>
+            <a:r>
+              <a:rPr lang="ja-JP" sz="1200" b="1">
+                <a:solidFill>
+                  <a:schemeClr val="dk1"/>
+                </a:solidFill>
+                <a:latin typeface="メイリオ"/>
+                <a:ea typeface="Meiryo"/>
+                <a:cs typeface="Meiryo"/>
+                <a:sym typeface="Meiryo"/>
+              </a:rPr>
+              <a:t>土日祝日の掲載開始は不可なので、平日での日程調整が必要。</a:t>
+            </a:r>
+            <a:endParaRPr sz="1400" b="1">
+              <a:solidFill>
+                <a:schemeClr val="dk1"/>
+              </a:solidFill>
+              <a:latin typeface="Meiryo"/>
+              <a:ea typeface="Meiryo"/>
+              <a:cs typeface="Meiryo"/>
+              <a:sym typeface="Meiryo"/>
+            </a:endParaRPr>
+          </a:p>
+        </p:txBody>
+      </p:sp>
+      <p:sp>
+        <p:nvSpPr>
+          <p:cNvPr id="52" name="Google Shape;52;p3"/>
+          <p:cNvSpPr/>
+          <p:nvPr/>
+        </p:nvSpPr>
+        <p:spPr>
+          <a:xfrm>
+            <a:off x="351381" y="2714173"/>
+            <a:ext cx="5200000" cy="338554"/>
+          </a:xfrm>
+          <a:prstGeom prst="rect">
+            <a:avLst/>
+          </a:prstGeom>
+          <a:noFill/>
+          <a:ln>
+            <a:noFill/>
+          </a:ln>
+        </p:spPr>
+        <p:txBody>
+          <a:bodyPr spcFirstLastPara="1" wrap="square" lIns="91425" tIns="45700" rIns="91425" bIns="45700" anchor="t" anchorCtr="0">
+            <a:noAutofit/>
+          </a:bodyPr>
+          <a:lstStyle/>
+          <a:p>
+            <a:pPr marL="0" marR="0" lvl="0" indent="0" algn="l" rtl="0">
+              <a:spcBef>
+                <a:spcPts val="0"/>
+              </a:spcBef>
+              <a:spcAft>
+                <a:spcPts val="0"/>
+              </a:spcAft>
+              <a:buNone/>
+            </a:pPr>
+            <a:r>
+              <a:rPr lang="ja-JP" sz="1400" b="1">
+                <a:solidFill>
+                  <a:srgbClr val="15133D"/>
+                </a:solidFill>
+                <a:latin typeface="メイリオ"/>
+                <a:ea typeface="Meiryo"/>
+                <a:cs typeface="Meiryo"/>
+                <a:sym typeface="Meiryo"/>
+              </a:rPr>
+              <a:t>■ 詳細</a:t>
+            </a:r>
+            <a:endParaRPr/>
+          </a:p>
+        </p:txBody>
+      </p:sp>
+      <p:pic>
+        <p:nvPicPr>
+          <p:cNvPr id="62" name="Google Shape;62;p3" descr="LINE公式アカウントのロゴの使用方法とは？種類やダウンロード方法、利用時の注意点を紹介 | Mico（ミコ）"/>
+          <p:cNvPicPr preferRelativeResize="0"/>
+          <p:nvPr/>
+        </p:nvPicPr>
+        <p:blipFill rotWithShape="1">
+          <a:blip r:embed="rId2">
+            <a:alphaModFix/>
+          </a:blip>
+          <a:srcRect/>
+          <a:stretch/>
+        </p:blipFill>
+        <p:spPr>
+          <a:xfrm>
+            <a:off x="351381" y="1234746"/>
+            <a:ext cx="656177" cy="655521"/>
+          </a:xfrm>
+          <a:prstGeom prst="rect">
+            <a:avLst/>
+          </a:prstGeom>
+          <a:noFill/>
+          <a:ln>
+            <a:noFill/>
+          </a:ln>
+        </p:spPr>
+      </p:pic>
+      <p:sp>
+        <p:nvSpPr>
+          <p:cNvPr id="63" name="Rectangle 62"/>
+          <p:cNvSpPr/>
+          <p:nvPr/>
+        </p:nvSpPr>
+        <p:spPr>
+          <a:xfrm>
+            <a:off x="544108" y="3068960"/>
+            <a:ext cx="1730462" cy="365760"/>
+          </a:xfrm>
+          <a:prstGeom prst="rect">
+            <a:avLst/>
+          </a:prstGeom>
+          <a:solidFill>
+            <a:srgbClr val="15133D"/>
+          </a:solidFill>
+          <a:ln>
+            <a:noFill/>
+          </a:ln>
+          <a:effectLst/>
+        </p:spPr>
+        <p:style>
+          <a:lnRef idx="1">
+            <a:schemeClr val="accent1"/>
+          </a:lnRef>
+          <a:fillRef idx="3">
+            <a:schemeClr val="accent1"/>
+          </a:fillRef>
+          <a:effectRef idx="2">
+            <a:schemeClr val="accent1"/>
+          </a:effectRef>
+          <a:fontRef idx="minor">
+            <a:schemeClr val="lt1"/>
+          </a:fontRef>
+        </p:style>
+        <p:txBody>
+          <a:bodyPr wrap="square" rIns="45720" rtlCol="0" anchor="ctr"/>
+          <a:lstStyle/>
+          <a:p>
+            <a:pPr algn="ctr"/>
+            <a:r>
+              <a:rPr sz="1300" b="1">
+                <a:solidFill>
+                  <a:srgbClr val="FFFFFF"/>
+                </a:solidFill>
+                <a:latin typeface="メイリオ"/>
+              </a:rPr>
+              <a:t>30営業日前</a:t>
+            </a:r>
+          </a:p>
+        </p:txBody>
+      </p:sp>
+      <p:sp>
+        <p:nvSpPr>
+          <p:cNvPr id="64" name="Rectangle 63"/>
+          <p:cNvSpPr/>
+          <p:nvPr/>
+        </p:nvSpPr>
+        <p:spPr>
+          <a:xfrm>
+            <a:off x="544108" y="3434720"/>
+            <a:ext cx="1730462" cy="1005840"/>
+          </a:xfrm>
+          <a:prstGeom prst="rect">
+            <a:avLst/>
+          </a:prstGeom>
+          <a:solidFill>
+            <a:srgbClr val="EAF0FA"/>
+          </a:solidFill>
+          <a:ln w="12700">
+            <a:solidFill>
+              <a:srgbClr val="3467B2"/>
+            </a:solidFill>
+          </a:ln>
+          <a:effectLst/>
+        </p:spPr>
+        <p:style>
+          <a:lnRef idx="1">
+            <a:schemeClr val="accent1"/>
+          </a:lnRef>
+          <a:fillRef idx="3">
+            <a:schemeClr val="accent1"/>
+          </a:fillRef>
+          <a:effectRef idx="2">
+            <a:schemeClr val="accent1"/>
+          </a:effectRef>
+          <a:fontRef idx="minor">
+            <a:schemeClr val="lt1"/>
+          </a:fontRef>
+        </p:style>
+        <p:txBody>
+          <a:bodyPr wrap="square" lIns="182880" tIns="54864" rIns="137160" bIns="54864" rtlCol="0" anchor="ctr"/>
+          <a:lstStyle/>
+          <a:p>
+            <a:pPr algn="ctr">
+              <a:lnSpc>
+                <a:spcPct val="110000"/>
+              </a:lnSpc>
+            </a:pPr>
+            <a:r>
+              <a:rPr sz="1200" dirty="0" err="1">
+                <a:solidFill>
+                  <a:srgbClr val="333333"/>
+                </a:solidFill>
+                <a:latin typeface="メイリオ"/>
+              </a:rPr>
+              <a:t>企業・商材審査</a:t>
+            </a:r>
+            <a:endParaRPr lang="en-US" sz="1200" dirty="0">
+              <a:solidFill>
+                <a:srgbClr val="333333"/>
+              </a:solidFill>
+              <a:latin typeface="メイリオ"/>
+            </a:endParaRPr>
+          </a:p>
+          <a:p>
+            <a:pPr algn="ctr">
+              <a:lnSpc>
+                <a:spcPct val="110000"/>
+              </a:lnSpc>
+            </a:pPr>
+            <a:r>
+              <a:rPr sz="1200" dirty="0" err="1">
+                <a:solidFill>
+                  <a:srgbClr val="333333"/>
+                </a:solidFill>
+                <a:latin typeface="メイリオ"/>
+              </a:rPr>
+              <a:t>企画審査</a:t>
+            </a:r>
+            <a:endParaRPr sz="1200" dirty="0">
+              <a:solidFill>
+                <a:srgbClr val="333333"/>
+              </a:solidFill>
+              <a:latin typeface="メイリオ"/>
+            </a:endParaRPr>
+          </a:p>
+        </p:txBody>
+      </p:sp>
+      <p:sp>
+        <p:nvSpPr>
+          <p:cNvPr id="65" name="TextBox 64"/>
+          <p:cNvSpPr txBox="1"/>
+          <p:nvPr/>
+        </p:nvSpPr>
+        <p:spPr>
+          <a:xfrm>
+            <a:off x="2477677" y="3693842"/>
+            <a:ext cx="264770" cy="338554"/>
+          </a:xfrm>
+          <a:prstGeom prst="rect">
+            <a:avLst/>
+          </a:prstGeom>
+          <a:noFill/>
+        </p:spPr>
+        <p:txBody>
+          <a:bodyPr wrap="square" anchor="ctr">
+            <a:spAutoFit/>
+          </a:bodyPr>
+          <a:lstStyle/>
+          <a:p>
+            <a:pPr algn="ctr"/>
+            <a:r>
+              <a:rPr sz="1600" b="1">
+                <a:solidFill>
+                  <a:srgbClr val="3467B2"/>
+                </a:solidFill>
+                <a:latin typeface="メイリオ"/>
+              </a:rPr>
+              <a:t>▶</a:t>
+            </a:r>
+          </a:p>
+        </p:txBody>
+      </p:sp>
+      <p:sp>
+        <p:nvSpPr>
+          <p:cNvPr id="66" name="Rectangle 65"/>
+          <p:cNvSpPr/>
+          <p:nvPr/>
+        </p:nvSpPr>
+        <p:spPr>
+          <a:xfrm>
+            <a:off x="2955838" y="3068960"/>
+            <a:ext cx="1730462" cy="365760"/>
+          </a:xfrm>
+          <a:prstGeom prst="rect">
+            <a:avLst/>
+          </a:prstGeom>
+          <a:solidFill>
+            <a:srgbClr val="15133D"/>
+          </a:solidFill>
+          <a:ln>
+            <a:noFill/>
+          </a:ln>
+          <a:effectLst/>
+        </p:spPr>
+        <p:style>
+          <a:lnRef idx="1">
+            <a:schemeClr val="accent1"/>
+          </a:lnRef>
+          <a:fillRef idx="3">
+            <a:schemeClr val="accent1"/>
+          </a:fillRef>
+          <a:effectRef idx="2">
+            <a:schemeClr val="accent1"/>
+          </a:effectRef>
+          <a:fontRef idx="minor">
+            <a:schemeClr val="lt1"/>
+          </a:fontRef>
+        </p:style>
+        <p:txBody>
+          <a:bodyPr wrap="square" rIns="45720" rtlCol="0" anchor="ctr"/>
+          <a:lstStyle/>
+          <a:p>
+            <a:pPr algn="ctr"/>
+            <a:r>
+              <a:rPr sz="1300" b="1">
+                <a:solidFill>
+                  <a:srgbClr val="FFFFFF"/>
+                </a:solidFill>
+                <a:latin typeface="メイリオ"/>
+              </a:rPr>
+              <a:t>25営業日前 17時</a:t>
+            </a:r>
+          </a:p>
+        </p:txBody>
+      </p:sp>
+      <p:sp>
+        <p:nvSpPr>
+          <p:cNvPr id="67" name="Rectangle 66"/>
+          <p:cNvSpPr/>
+          <p:nvPr/>
+        </p:nvSpPr>
+        <p:spPr>
+          <a:xfrm>
+            <a:off x="2955838" y="3434720"/>
+            <a:ext cx="1730462" cy="1005840"/>
+          </a:xfrm>
+          <a:prstGeom prst="rect">
+            <a:avLst/>
+          </a:prstGeom>
+          <a:solidFill>
+            <a:srgbClr val="EAF0FA"/>
+          </a:solidFill>
+          <a:ln w="12700">
+            <a:solidFill>
+              <a:srgbClr val="3467B2"/>
+            </a:solidFill>
+          </a:ln>
+          <a:effectLst/>
+        </p:spPr>
+        <p:style>
+          <a:lnRef idx="1">
+            <a:schemeClr val="accent1"/>
+          </a:lnRef>
+          <a:fillRef idx="3">
+            <a:schemeClr val="accent1"/>
+          </a:fillRef>
+          <a:effectRef idx="2">
+            <a:schemeClr val="accent1"/>
+          </a:effectRef>
+          <a:fontRef idx="minor">
+            <a:schemeClr val="lt1"/>
+          </a:fontRef>
+        </p:style>
+        <p:txBody>
+          <a:bodyPr wrap="square" lIns="182880" tIns="54864" rIns="137160" bIns="54864" rtlCol="0" anchor="ctr"/>
+          <a:lstStyle/>
+          <a:p>
+            <a:pPr algn="ctr">
+              <a:lnSpc>
+                <a:spcPct val="110000"/>
+              </a:lnSpc>
+            </a:pPr>
+            <a:r>
+              <a:rPr sz="1200" dirty="0" err="1">
+                <a:solidFill>
+                  <a:srgbClr val="333333"/>
+                </a:solidFill>
+                <a:latin typeface="メイリオ"/>
+              </a:rPr>
+              <a:t>配信枠おさえ</a:t>
+            </a:r>
+            <a:endParaRPr lang="en-US" sz="1200" dirty="0">
+              <a:solidFill>
+                <a:srgbClr val="333333"/>
+              </a:solidFill>
+              <a:latin typeface="メイリオ"/>
+            </a:endParaRPr>
+          </a:p>
+          <a:p>
+            <a:pPr algn="ctr">
+              <a:lnSpc>
+                <a:spcPct val="110000"/>
+              </a:lnSpc>
+            </a:pPr>
+            <a:r>
+              <a:rPr sz="1200" dirty="0" err="1">
+                <a:solidFill>
+                  <a:srgbClr val="333333"/>
+                </a:solidFill>
+                <a:latin typeface="メイリオ"/>
+              </a:rPr>
+              <a:t>申込み</a:t>
+            </a:r>
+            <a:endParaRPr sz="1200" dirty="0">
+              <a:solidFill>
+                <a:srgbClr val="333333"/>
+              </a:solidFill>
+              <a:latin typeface="メイリオ"/>
+            </a:endParaRPr>
+          </a:p>
+        </p:txBody>
+      </p:sp>
+      <p:sp>
+        <p:nvSpPr>
+          <p:cNvPr id="68" name="TextBox 67"/>
+          <p:cNvSpPr txBox="1"/>
+          <p:nvPr/>
+        </p:nvSpPr>
+        <p:spPr>
+          <a:xfrm>
+            <a:off x="4899691" y="3699414"/>
+            <a:ext cx="264770" cy="338554"/>
+          </a:xfrm>
+          <a:prstGeom prst="rect">
+            <a:avLst/>
+          </a:prstGeom>
+          <a:noFill/>
+        </p:spPr>
+        <p:txBody>
+          <a:bodyPr wrap="square" anchor="ctr">
+            <a:spAutoFit/>
+          </a:bodyPr>
+          <a:lstStyle/>
+          <a:p>
+            <a:pPr algn="ctr"/>
+            <a:r>
+              <a:rPr sz="1600" b="1" dirty="0">
+                <a:solidFill>
+                  <a:srgbClr val="3467B2"/>
+                </a:solidFill>
+                <a:latin typeface="メイリオ"/>
+              </a:rPr>
+              <a:t>▶</a:t>
+            </a:r>
+          </a:p>
+        </p:txBody>
+      </p:sp>
+      <p:sp>
+        <p:nvSpPr>
+          <p:cNvPr id="69" name="Rectangle 68"/>
+          <p:cNvSpPr/>
+          <p:nvPr/>
+        </p:nvSpPr>
+        <p:spPr>
+          <a:xfrm>
+            <a:off x="5367568" y="3068960"/>
+            <a:ext cx="1730462" cy="365760"/>
+          </a:xfrm>
+          <a:prstGeom prst="rect">
+            <a:avLst/>
+          </a:prstGeom>
+          <a:solidFill>
+            <a:srgbClr val="15133D"/>
+          </a:solidFill>
+          <a:ln>
+            <a:noFill/>
+          </a:ln>
+          <a:effectLst/>
+        </p:spPr>
+        <p:style>
+          <a:lnRef idx="1">
+            <a:schemeClr val="accent1"/>
+          </a:lnRef>
+          <a:fillRef idx="3">
+            <a:schemeClr val="accent1"/>
+          </a:fillRef>
+          <a:effectRef idx="2">
+            <a:schemeClr val="accent1"/>
+          </a:effectRef>
+          <a:fontRef idx="minor">
+            <a:schemeClr val="lt1"/>
+          </a:fontRef>
+        </p:style>
+        <p:txBody>
+          <a:bodyPr wrap="square" rIns="45720" rtlCol="0" anchor="ctr"/>
+          <a:lstStyle/>
+          <a:p>
+            <a:pPr algn="ctr"/>
+            <a:r>
+              <a:rPr sz="1300" b="1">
+                <a:solidFill>
+                  <a:srgbClr val="FFFFFF"/>
+                </a:solidFill>
+                <a:latin typeface="メイリオ"/>
+              </a:rPr>
+              <a:t>20営業日前 17時</a:t>
+            </a:r>
+          </a:p>
+        </p:txBody>
+      </p:sp>
+      <p:sp>
+        <p:nvSpPr>
+          <p:cNvPr id="70" name="Rectangle 69"/>
+          <p:cNvSpPr/>
+          <p:nvPr/>
+        </p:nvSpPr>
+        <p:spPr>
+          <a:xfrm>
+            <a:off x="5367568" y="3434720"/>
+            <a:ext cx="1730462" cy="1005840"/>
+          </a:xfrm>
+          <a:prstGeom prst="rect">
+            <a:avLst/>
+          </a:prstGeom>
+          <a:solidFill>
+            <a:srgbClr val="EAF0FA"/>
+          </a:solidFill>
+          <a:ln w="12700">
+            <a:solidFill>
+              <a:srgbClr val="3467B2"/>
+            </a:solidFill>
+          </a:ln>
+          <a:effectLst/>
+        </p:spPr>
+        <p:style>
+          <a:lnRef idx="1">
+            <a:schemeClr val="accent1"/>
+          </a:lnRef>
+          <a:fillRef idx="3">
+            <a:schemeClr val="accent1"/>
+          </a:fillRef>
+          <a:effectRef idx="2">
+            <a:schemeClr val="accent1"/>
+          </a:effectRef>
+          <a:fontRef idx="minor">
+            <a:schemeClr val="lt1"/>
+          </a:fontRef>
+        </p:style>
+        <p:txBody>
+          <a:bodyPr wrap="square" lIns="182880" tIns="54864" rIns="137160" bIns="54864" rtlCol="0" anchor="ctr"/>
+          <a:lstStyle/>
+          <a:p>
+            <a:pPr algn="ctr">
+              <a:lnSpc>
+                <a:spcPct val="110000"/>
+              </a:lnSpc>
+            </a:pPr>
+            <a:r>
+              <a:rPr sz="1200">
+                <a:solidFill>
+                  <a:srgbClr val="333333"/>
+                </a:solidFill>
+                <a:latin typeface="メイリオ"/>
+              </a:rPr>
+              <a:t>入稿物の提出</a:t>
+            </a:r>
+          </a:p>
+        </p:txBody>
+      </p:sp>
+      <p:sp>
+        <p:nvSpPr>
+          <p:cNvPr id="71" name="TextBox 70"/>
+          <p:cNvSpPr txBox="1"/>
+          <p:nvPr/>
+        </p:nvSpPr>
+        <p:spPr>
+          <a:xfrm>
+            <a:off x="7194082" y="3693842"/>
+            <a:ext cx="264770" cy="338554"/>
+          </a:xfrm>
+          <a:prstGeom prst="rect">
+            <a:avLst/>
+          </a:prstGeom>
+          <a:noFill/>
+        </p:spPr>
+        <p:txBody>
+          <a:bodyPr wrap="square" anchor="ctr">
+            <a:spAutoFit/>
+          </a:bodyPr>
+          <a:lstStyle/>
+          <a:p>
+            <a:pPr algn="ctr"/>
+            <a:r>
+              <a:rPr sz="1600" b="1" dirty="0">
+                <a:solidFill>
+                  <a:srgbClr val="3467B2"/>
+                </a:solidFill>
+                <a:latin typeface="メイリオ"/>
+              </a:rPr>
+              <a:t>▶</a:t>
+            </a:r>
+          </a:p>
+        </p:txBody>
+      </p:sp>
+      <p:sp>
+        <p:nvSpPr>
+          <p:cNvPr id="72" name="Rectangle 71"/>
+          <p:cNvSpPr/>
+          <p:nvPr/>
+        </p:nvSpPr>
+        <p:spPr>
+          <a:xfrm>
+            <a:off x="7554904" y="3068960"/>
+            <a:ext cx="1730462" cy="365760"/>
+          </a:xfrm>
+          <a:prstGeom prst="rect">
+            <a:avLst/>
+          </a:prstGeom>
+          <a:solidFill>
+            <a:srgbClr val="15133D"/>
+          </a:solidFill>
+          <a:ln>
+            <a:noFill/>
+          </a:ln>
+          <a:effectLst/>
+        </p:spPr>
+        <p:style>
+          <a:lnRef idx="1">
+            <a:schemeClr val="accent1"/>
+          </a:lnRef>
+          <a:fillRef idx="3">
+            <a:schemeClr val="accent1"/>
+          </a:fillRef>
+          <a:effectRef idx="2">
+            <a:schemeClr val="accent1"/>
+          </a:effectRef>
+          <a:fontRef idx="minor">
+            <a:schemeClr val="lt1"/>
+          </a:fontRef>
+        </p:style>
+        <p:txBody>
+          <a:bodyPr wrap="square" rIns="45720" rtlCol="0" anchor="ctr"/>
+          <a:lstStyle/>
+          <a:p>
+            <a:pPr algn="ctr"/>
+            <a:r>
+              <a:rPr sz="1300" b="1">
+                <a:solidFill>
+                  <a:srgbClr val="FFFFFF"/>
+                </a:solidFill>
+                <a:latin typeface="メイリオ"/>
+              </a:rPr>
+              <a:t>開始日</a:t>
+            </a:r>
+          </a:p>
+        </p:txBody>
+      </p:sp>
+      <p:sp>
+        <p:nvSpPr>
+          <p:cNvPr id="73" name="Rectangle 72"/>
+          <p:cNvSpPr/>
+          <p:nvPr/>
+        </p:nvSpPr>
+        <p:spPr>
+          <a:xfrm>
+            <a:off x="7554904" y="3434720"/>
+            <a:ext cx="1730462" cy="1005840"/>
+          </a:xfrm>
+          <a:prstGeom prst="rect">
+            <a:avLst/>
+          </a:prstGeom>
+          <a:solidFill>
+            <a:srgbClr val="EAF0FA"/>
+          </a:solidFill>
+          <a:ln w="12700">
+            <a:solidFill>
+              <a:srgbClr val="3467B2"/>
+            </a:solidFill>
+          </a:ln>
+          <a:effectLst/>
+        </p:spPr>
+        <p:style>
+          <a:lnRef idx="1">
+            <a:schemeClr val="accent1"/>
+          </a:lnRef>
+          <a:fillRef idx="3">
+            <a:schemeClr val="accent1"/>
+          </a:fillRef>
+          <a:effectRef idx="2">
+            <a:schemeClr val="accent1"/>
+          </a:effectRef>
+          <a:fontRef idx="minor">
+            <a:schemeClr val="lt1"/>
+          </a:fontRef>
+        </p:style>
+        <p:txBody>
+          <a:bodyPr wrap="square" lIns="182880" tIns="54864" rIns="137160" bIns="54864" rtlCol="0" anchor="ctr"/>
+          <a:lstStyle/>
+          <a:p>
+            <a:pPr algn="ctr">
+              <a:lnSpc>
+                <a:spcPct val="110000"/>
+              </a:lnSpc>
+            </a:pPr>
+            <a:r>
+              <a:rPr sz="1200" dirty="0" err="1">
+                <a:solidFill>
+                  <a:srgbClr val="333333"/>
+                </a:solidFill>
+                <a:latin typeface="メイリオ"/>
+              </a:rPr>
+              <a:t>掲載開始</a:t>
+            </a:r>
+            <a:endParaRPr lang="en-US" sz="1200" dirty="0">
+              <a:solidFill>
+                <a:srgbClr val="333333"/>
+              </a:solidFill>
+              <a:latin typeface="メイリオ"/>
+            </a:endParaRPr>
+          </a:p>
+          <a:p>
+            <a:pPr algn="ctr">
+              <a:lnSpc>
+                <a:spcPct val="110000"/>
+              </a:lnSpc>
+            </a:pPr>
+            <a:r>
+              <a:rPr sz="1200" dirty="0">
+                <a:solidFill>
+                  <a:srgbClr val="333333"/>
+                </a:solidFill>
+                <a:latin typeface="メイリオ"/>
+              </a:rPr>
+              <a:t>（</a:t>
+            </a:r>
+            <a:r>
+              <a:rPr sz="1200" dirty="0" err="1">
+                <a:solidFill>
+                  <a:srgbClr val="333333"/>
+                </a:solidFill>
+                <a:latin typeface="メイリオ"/>
+              </a:rPr>
+              <a:t>土日祝日不可</a:t>
+            </a:r>
+            <a:r>
+              <a:rPr sz="1200" dirty="0">
+                <a:solidFill>
+                  <a:srgbClr val="333333"/>
+                </a:solidFill>
+                <a:latin typeface="メイリオ"/>
+              </a:rPr>
+              <a:t>）</a:t>
+            </a:r>
+          </a:p>
+        </p:txBody>
+      </p:sp>
+      <p:sp>
+        <p:nvSpPr>
+          <p:cNvPr id="74" name="Rounded Rectangle 73"/>
+          <p:cNvSpPr/>
+          <p:nvPr/>
+        </p:nvSpPr>
+        <p:spPr>
+          <a:xfrm>
+            <a:off x="544108" y="4669160"/>
+            <a:ext cx="8737052" cy="1005840"/>
+          </a:xfrm>
+          <a:prstGeom prst="roundRect">
+            <a:avLst>
+              <a:gd name="adj" fmla="val 6000"/>
+            </a:avLst>
+          </a:prstGeom>
+          <a:solidFill>
+            <a:srgbClr val="EAF0FA"/>
+          </a:solidFill>
+          <a:ln w="12700">
+            <a:solidFill>
+              <a:srgbClr val="3467B2"/>
+            </a:solidFill>
+          </a:ln>
+          <a:effectLst/>
+        </p:spPr>
+        <p:style>
+          <a:lnRef idx="1">
+            <a:schemeClr val="accent1"/>
+          </a:lnRef>
+          <a:fillRef idx="3">
+            <a:schemeClr val="accent1"/>
+          </a:fillRef>
+          <a:effectRef idx="2">
+            <a:schemeClr val="accent1"/>
+          </a:effectRef>
+          <a:fontRef idx="minor">
+            <a:schemeClr val="lt1"/>
+          </a:fontRef>
+        </p:style>
+        <p:txBody>
+          <a:bodyPr wrap="square" lIns="228600" rIns="182880" rtlCol="0" anchor="ctr"/>
+          <a:lstStyle/>
+          <a:p>
+            <a:pPr algn="l"/>
+            <a:r>
+              <a:rPr sz="2000" b="1" dirty="0" err="1">
+                <a:solidFill>
+                  <a:srgbClr val="15133D"/>
+                </a:solidFill>
+                <a:latin typeface="メイリオ"/>
+              </a:rPr>
+              <a:t>早めの申込みが必須</a:t>
+            </a:r>
+            <a:endParaRPr sz="2000" b="1" dirty="0">
+              <a:solidFill>
+                <a:srgbClr val="15133D"/>
+              </a:solidFill>
+              <a:latin typeface="メイリオ"/>
+            </a:endParaRPr>
+          </a:p>
+          <a:p>
+            <a:pPr algn="l">
+              <a:lnSpc>
+                <a:spcPct val="115000"/>
+              </a:lnSpc>
+              <a:spcBef>
+                <a:spcPts val="600"/>
+              </a:spcBef>
+            </a:pPr>
+            <a:r>
+              <a:rPr dirty="0" err="1">
+                <a:solidFill>
+                  <a:srgbClr val="333333"/>
+                </a:solidFill>
+                <a:latin typeface="メイリオ"/>
+              </a:rPr>
+              <a:t>期間・条件限定のキャンペーンのため、早めの提案・申込み誘導がカギ</a:t>
+            </a:r>
+            <a:r>
+              <a:rPr dirty="0">
+                <a:solidFill>
+                  <a:srgbClr val="333333"/>
+                </a:solidFill>
+                <a:latin typeface="メイリオ"/>
+              </a:rPr>
+              <a:t>。</a:t>
+            </a:r>
+            <a:endParaRPr lang="en-US" dirty="0">
+              <a:solidFill>
+                <a:srgbClr val="333333"/>
+              </a:solidFill>
+              <a:latin typeface="メイリオ"/>
+            </a:endParaRPr>
+          </a:p>
+          <a:p>
+            <a:pPr algn="l">
+              <a:lnSpc>
+                <a:spcPct val="115000"/>
+              </a:lnSpc>
+              <a:spcBef>
+                <a:spcPts val="600"/>
+              </a:spcBef>
+            </a:pPr>
+            <a:r>
+              <a:rPr dirty="0" err="1">
+                <a:solidFill>
+                  <a:srgbClr val="333333"/>
+                </a:solidFill>
+                <a:latin typeface="メイリオ"/>
+              </a:rPr>
+              <a:t>配信枠は先着で埋まるため、審査期間も見込んだ逆算スケジュールを組む</a:t>
+            </a:r>
+            <a:r>
+              <a:rPr dirty="0">
+                <a:solidFill>
+                  <a:srgbClr val="333333"/>
+                </a:solidFill>
+                <a:latin typeface="メイリオ"/>
+              </a:rPr>
+              <a:t>。</a:t>
+            </a:r>
+          </a:p>
+        </p:txBody>
+      </p:sp>
+      <p:graphicFrame>
+        <p:nvGraphicFramePr>
+          <p:cNvPr id="9" name="図表 8">
+            <a:extLst>
+              <a:ext uri="{FF2B5EF4-FFF2-40B4-BE49-F238E27FC236}">
+                <a16:creationId xmlns:a16="http://schemas.microsoft.com/office/drawing/2014/main" id="{FB91556C-B694-7FDD-BAA5-4D6F5B361174}"/>
+              </a:ext>
+            </a:extLst>
+          </p:cNvPr>
+          <p:cNvGraphicFramePr/>
+          <p:nvPr/>
+        </p:nvGraphicFramePr>
+        <p:xfrm>
+          <a:off x="8529759" y="688315"/>
+          <a:ext cx="1376241" cy="1131931"/>
+        </p:xfrm>
+        <a:graphic>
+          <a:graphicData uri="http://schemas.openxmlformats.org/drawingml/2006/diagram">
+            <dgm:relIds xmlns:dgm="http://schemas.openxmlformats.org/drawingml/2006/diagram" xmlns:r="http://schemas.openxmlformats.org/officeDocument/2006/relationships" r:dm="rId3" r:lo="rId4" r:qs="rId5" r:cs="rId6"/>
+          </a:graphicData>
+        </a:graphic>
+      </p:graphicFrame>
+      <p:sp>
+        <p:nvSpPr>
+          <p:cNvPr id="13" name="正方形/長方形 12">
+            <a:extLst>
+              <a:ext uri="{FF2B5EF4-FFF2-40B4-BE49-F238E27FC236}">
+                <a16:creationId xmlns:a16="http://schemas.microsoft.com/office/drawing/2014/main" id="{AC20BBD9-4A18-AAE8-35A2-AE112AFF738F}"/>
+              </a:ext>
+            </a:extLst>
+          </p:cNvPr>
+          <p:cNvSpPr/>
+          <p:nvPr/>
+        </p:nvSpPr>
+        <p:spPr>
+          <a:xfrm>
+            <a:off x="7560840" y="730955"/>
+            <a:ext cx="829618" cy="435690"/>
+          </a:xfrm>
+          <a:prstGeom prst="rect">
+            <a:avLst/>
+          </a:prstGeom>
+          <a:solidFill>
+            <a:schemeClr val="bg1"/>
+          </a:solidFill>
+          <a:ln w="9525">
+            <a:solidFill>
+              <a:srgbClr val="4F81BD"/>
+            </a:solidFill>
+            <a:prstDash val="sysDash"/>
+          </a:ln>
+          <a:effectLst/>
+        </p:spPr>
+        <p:style>
+          <a:lnRef idx="1">
+            <a:schemeClr val="accent1"/>
+          </a:lnRef>
+          <a:fillRef idx="3">
+            <a:schemeClr val="accent1"/>
+          </a:fillRef>
+          <a:effectRef idx="2">
+            <a:schemeClr val="accent1"/>
+          </a:effectRef>
+          <a:fontRef idx="minor">
+            <a:schemeClr val="lt1"/>
+          </a:fontRef>
+        </p:style>
+        <p:txBody>
+          <a:bodyPr rtlCol="0" anchor="ctr"/>
+          <a:lstStyle/>
+          <a:p>
+            <a:pPr algn="ctr"/>
+            <a:r>
+              <a:rPr lang="ja-JP" altLang="en-US" sz="1200" dirty="0">
+                <a:solidFill>
+                  <a:schemeClr val="tx1"/>
+                </a:solidFill>
+                <a:latin typeface="メイリオ" panose="020B0604030504040204" pitchFamily="50" charset="-128"/>
+                <a:ea typeface="メイリオ" panose="020B0604030504040204" pitchFamily="50" charset="-128"/>
+              </a:rPr>
+              <a:t>その他</a:t>
+            </a:r>
+            <a:endParaRPr kumimoji="1" lang="ja-JP" altLang="en-US" sz="1200" dirty="0">
+              <a:solidFill>
+                <a:schemeClr val="tx1"/>
+              </a:solidFill>
+              <a:latin typeface="メイリオ" panose="020B0604030504040204" pitchFamily="50" charset="-128"/>
+              <a:ea typeface="メイリオ" panose="020B0604030504040204" pitchFamily="50" charset="-128"/>
+            </a:endParaRPr>
+          </a:p>
+        </p:txBody>
+      </p:sp>
+      <p:sp>
+        <p:nvSpPr>
+          <p:cNvPr id="15" name="正方形/長方形 14">
+            <a:extLst>
+              <a:ext uri="{FF2B5EF4-FFF2-40B4-BE49-F238E27FC236}">
+                <a16:creationId xmlns:a16="http://schemas.microsoft.com/office/drawing/2014/main" id="{40F3355E-080B-0A5A-34B5-42D33EF674CE}"/>
+              </a:ext>
+            </a:extLst>
+          </p:cNvPr>
+          <p:cNvSpPr/>
+          <p:nvPr/>
+        </p:nvSpPr>
+        <p:spPr>
+          <a:xfrm>
+            <a:off x="5797260" y="730955"/>
+            <a:ext cx="829618" cy="435690"/>
+          </a:xfrm>
+          <a:prstGeom prst="rect">
+            <a:avLst/>
+          </a:prstGeom>
+          <a:solidFill>
+            <a:schemeClr val="bg1"/>
+          </a:solidFill>
+          <a:ln w="9525" cap="flat" cmpd="sng" algn="ctr">
+            <a:solidFill>
+              <a:srgbClr val="4F81BD"/>
+            </a:solidFill>
+            <a:prstDash val="sysDash"/>
+          </a:ln>
+          <a:effectLst/>
+        </p:spPr>
+        <p:txBody>
+          <a:bodyPr rtlCol="0" anchor="ctr"/>
+          <a:lstStyle/>
+          <a:p>
+            <a:pPr algn="ctr">
+              <a:buClrTx/>
+              <a:buFontTx/>
+              <a:buNone/>
+            </a:pPr>
+            <a:r>
+              <a:rPr kumimoji="1" lang="ja-JP" altLang="en-US" sz="1000" kern="1200" dirty="0">
+                <a:latin typeface="メイリオ" panose="020B0604030504040204" pitchFamily="50" charset="-128"/>
+                <a:ea typeface="メイリオ" panose="020B0604030504040204" pitchFamily="50" charset="-128"/>
+              </a:rPr>
+              <a:t>開発</a:t>
+            </a:r>
+            <a:endParaRPr kumimoji="1" lang="en-US" altLang="ja-JP" sz="1000" kern="1200" dirty="0">
+              <a:latin typeface="メイリオ" panose="020B0604030504040204" pitchFamily="50" charset="-128"/>
+              <a:ea typeface="メイリオ" panose="020B0604030504040204" pitchFamily="50" charset="-128"/>
+            </a:endParaRPr>
+          </a:p>
+          <a:p>
+            <a:pPr algn="ctr">
+              <a:buClrTx/>
+              <a:buFontTx/>
+              <a:buNone/>
+            </a:pPr>
+            <a:r>
+              <a:rPr lang="en-US" altLang="ja-JP" sz="1000" dirty="0">
+                <a:latin typeface="メイリオ" panose="020B0604030504040204" pitchFamily="50" charset="-128"/>
+                <a:ea typeface="メイリオ" panose="020B0604030504040204" pitchFamily="50" charset="-128"/>
+              </a:rPr>
+              <a:t>LINE</a:t>
+            </a:r>
+            <a:r>
+              <a:rPr lang="ja-JP" altLang="en-US" sz="1000" dirty="0">
+                <a:latin typeface="メイリオ" panose="020B0604030504040204" pitchFamily="50" charset="-128"/>
+                <a:ea typeface="メイリオ" panose="020B0604030504040204" pitchFamily="50" charset="-128"/>
+              </a:rPr>
+              <a:t> </a:t>
+            </a:r>
+            <a:r>
+              <a:rPr lang="en-US" altLang="ja-JP" sz="1000" dirty="0">
+                <a:latin typeface="メイリオ" panose="020B0604030504040204" pitchFamily="50" charset="-128"/>
+                <a:ea typeface="メイリオ" panose="020B0604030504040204" pitchFamily="50" charset="-128"/>
+              </a:rPr>
+              <a:t>API</a:t>
+            </a:r>
+            <a:endParaRPr kumimoji="1" lang="ja-JP" altLang="en-US" sz="1000" kern="1200" dirty="0">
+              <a:latin typeface="メイリオ" panose="020B0604030504040204" pitchFamily="50" charset="-128"/>
+              <a:ea typeface="メイリオ" panose="020B0604030504040204" pitchFamily="50" charset="-128"/>
+            </a:endParaRPr>
+          </a:p>
+        </p:txBody>
+      </p:sp>
+      <p:sp>
+        <p:nvSpPr>
+          <p:cNvPr id="17" name="正方形/長方形 16">
+            <a:extLst>
+              <a:ext uri="{FF2B5EF4-FFF2-40B4-BE49-F238E27FC236}">
+                <a16:creationId xmlns:a16="http://schemas.microsoft.com/office/drawing/2014/main" id="{CD3D93BD-8423-CC15-ADA5-9715DA4FA257}"/>
+              </a:ext>
+            </a:extLst>
+          </p:cNvPr>
+          <p:cNvSpPr/>
+          <p:nvPr/>
+        </p:nvSpPr>
+        <p:spPr>
+          <a:xfrm>
+            <a:off x="4915470" y="730955"/>
+            <a:ext cx="829618" cy="435690"/>
+          </a:xfrm>
+          <a:prstGeom prst="rect">
+            <a:avLst/>
+          </a:prstGeom>
+          <a:solidFill>
+            <a:schemeClr val="bg1"/>
+          </a:solidFill>
+          <a:ln w="9525">
+            <a:solidFill>
+              <a:schemeClr val="accent1"/>
+            </a:solidFill>
+            <a:prstDash val="solid"/>
+          </a:ln>
+          <a:effectLst/>
+        </p:spPr>
+        <p:style>
+          <a:lnRef idx="1">
+            <a:schemeClr val="accent1"/>
+          </a:lnRef>
+          <a:fillRef idx="3">
+            <a:schemeClr val="accent1"/>
+          </a:fillRef>
+          <a:effectRef idx="2">
+            <a:schemeClr val="accent1"/>
+          </a:effectRef>
+          <a:fontRef idx="minor">
+            <a:schemeClr val="lt1"/>
+          </a:fontRef>
+        </p:style>
+        <p:txBody>
+          <a:bodyPr rtlCol="0" anchor="ctr"/>
+          <a:lstStyle/>
+          <a:p>
+            <a:pPr algn="ctr"/>
+            <a:r>
+              <a:rPr lang="en-US" altLang="ja-JP" sz="1000" dirty="0">
+                <a:solidFill>
+                  <a:schemeClr val="tx1"/>
+                </a:solidFill>
+                <a:latin typeface="メイリオ" panose="020B0604030504040204" pitchFamily="50" charset="-128"/>
+                <a:ea typeface="メイリオ" panose="020B0604030504040204" pitchFamily="50" charset="-128"/>
+              </a:rPr>
+              <a:t>LINE</a:t>
+            </a:r>
+            <a:r>
+              <a:rPr lang="ja-JP" altLang="en-US" sz="1000" dirty="0">
+                <a:solidFill>
+                  <a:schemeClr val="tx1"/>
+                </a:solidFill>
+                <a:latin typeface="メイリオ" panose="020B0604030504040204" pitchFamily="50" charset="-128"/>
+                <a:ea typeface="メイリオ" panose="020B0604030504040204" pitchFamily="50" charset="-128"/>
+              </a:rPr>
+              <a:t>公式アカウント</a:t>
+            </a:r>
+            <a:endParaRPr kumimoji="1" lang="ja-JP" altLang="en-US" sz="1000" dirty="0">
+              <a:solidFill>
+                <a:schemeClr val="tx1"/>
+              </a:solidFill>
+              <a:latin typeface="メイリオ" panose="020B0604030504040204" pitchFamily="50" charset="-128"/>
+              <a:ea typeface="メイリオ" panose="020B0604030504040204" pitchFamily="50" charset="-128"/>
+            </a:endParaRPr>
+          </a:p>
+        </p:txBody>
+      </p:sp>
+      <p:sp>
+        <p:nvSpPr>
+          <p:cNvPr id="19" name="正方形/長方形 18">
+            <a:extLst>
+              <a:ext uri="{FF2B5EF4-FFF2-40B4-BE49-F238E27FC236}">
+                <a16:creationId xmlns:a16="http://schemas.microsoft.com/office/drawing/2014/main" id="{603EFA71-D6B2-4EAF-80D9-77D6A4FC03BB}"/>
+              </a:ext>
+            </a:extLst>
+          </p:cNvPr>
+          <p:cNvSpPr/>
+          <p:nvPr/>
+        </p:nvSpPr>
+        <p:spPr>
+          <a:xfrm>
+            <a:off x="6679050" y="730955"/>
+            <a:ext cx="829618" cy="435690"/>
+          </a:xfrm>
+          <a:prstGeom prst="rect">
+            <a:avLst/>
+          </a:prstGeom>
+          <a:solidFill>
+            <a:schemeClr val="bg2">
+              <a:lumMod val="20000"/>
+              <a:lumOff val="80000"/>
+            </a:schemeClr>
+          </a:solidFill>
+          <a:ln w="9525">
+            <a:solidFill>
+              <a:srgbClr val="4F81BD"/>
+            </a:solidFill>
+            <a:prstDash val="sysDash"/>
+          </a:ln>
+          <a:effectLst/>
+        </p:spPr>
+        <p:style>
+          <a:lnRef idx="1">
+            <a:schemeClr val="accent1"/>
+          </a:lnRef>
+          <a:fillRef idx="3">
+            <a:schemeClr val="accent1"/>
+          </a:fillRef>
+          <a:effectRef idx="2">
+            <a:schemeClr val="accent1"/>
+          </a:effectRef>
+          <a:fontRef idx="minor">
+            <a:schemeClr val="lt1"/>
+          </a:fontRef>
+        </p:style>
+        <p:txBody>
+          <a:bodyPr rtlCol="0" anchor="ctr"/>
+          <a:lstStyle/>
+          <a:p>
+            <a:pPr algn="ctr"/>
+            <a:r>
+              <a:rPr kumimoji="1" lang="ja-JP" altLang="en-US" sz="1000" dirty="0">
+                <a:solidFill>
+                  <a:schemeClr val="tx1"/>
+                </a:solidFill>
+                <a:latin typeface="メイリオ" panose="020B0604030504040204" pitchFamily="50" charset="-128"/>
+                <a:ea typeface="メイリオ" panose="020B0604030504040204" pitchFamily="50" charset="-128"/>
+              </a:rPr>
+              <a:t>オプション</a:t>
+            </a:r>
+            <a:endParaRPr kumimoji="1" lang="en-US" altLang="ja-JP" sz="1000" dirty="0">
+              <a:solidFill>
+                <a:schemeClr val="tx1"/>
+              </a:solidFill>
+              <a:latin typeface="メイリオ" panose="020B0604030504040204" pitchFamily="50" charset="-128"/>
+              <a:ea typeface="メイリオ" panose="020B0604030504040204" pitchFamily="50" charset="-128"/>
+            </a:endParaRPr>
+          </a:p>
+          <a:p>
+            <a:pPr algn="ctr"/>
+            <a:r>
+              <a:rPr kumimoji="1" lang="ja-JP" altLang="en-US" sz="1000" dirty="0">
+                <a:solidFill>
+                  <a:schemeClr val="tx1"/>
+                </a:solidFill>
+                <a:latin typeface="メイリオ" panose="020B0604030504040204" pitchFamily="50" charset="-128"/>
+                <a:ea typeface="メイリオ" panose="020B0604030504040204" pitchFamily="50" charset="-128"/>
+              </a:rPr>
+              <a:t>商材</a:t>
+            </a:r>
+          </a:p>
+        </p:txBody>
+      </p:sp>
+      <p:sp>
+        <p:nvSpPr>
+          <p:cNvPr id="44" name="Google Shape;44;p3"/>
+          <p:cNvSpPr txBox="1"/>
+          <p:nvPr/>
+        </p:nvSpPr>
+        <p:spPr>
+          <a:xfrm>
+            <a:off x="3296816" y="6597352"/>
+            <a:ext cx="6209091" cy="215444"/>
+          </a:xfrm>
+          <a:prstGeom prst="rect">
+            <a:avLst/>
+          </a:prstGeom>
+          <a:noFill/>
+          <a:ln>
+            <a:noFill/>
+          </a:ln>
+        </p:spPr>
+        <p:txBody>
+          <a:bodyPr anchorCtr="0" anchor="t" bIns="45700" lIns="91425" spcFirstLastPara="1" rIns="91425" wrap="square" tIns="45700">
+            <a:spAutoFit/>
+          </a:bodyPr>
+          <a:lstStyle/>
+          <a:p>
+            <a:pPr indent="0" lvl="0" marL="0" marR="0" rtl="0" algn="l">
+              <a:spcBef>
+                <a:spcPts val="0"/>
+              </a:spcBef>
+              <a:spcAft>
+                <a:spcPts val="0"/>
+              </a:spcAft>
+              <a:buNone/>
+            </a:pPr>
+            <a:r>
+              <a:rPr b="0" i="0" lang="ja-JP" sz="800" u="none" cap="none" strike="noStrike">
+                <a:solidFill>
+                  <a:schemeClr val="lt1"/>
+                </a:solidFill>
+                <a:latin typeface="メイリオ"/>
+                <a:ea typeface="Meiryo"/>
+                <a:cs typeface="Meiryo"/>
+                <a:sym typeface="Meiryo"/>
+              </a:rPr>
+              <a:t>出典：https://www.lycbiz.com/jp/service/line-sales-promotion/</a:t>
+            </a:r>
+            <a:endParaRPr sz="800">
+              <a:solidFill>
+                <a:schemeClr val="lt1"/>
+              </a:solidFill>
+              <a:latin typeface="Meiryo"/>
+              <a:ea typeface="Meiryo"/>
+              <a:cs typeface="Meiryo"/>
+              <a:sym typeface="Meiryo"/>
+            </a:endParaRPr>
           </a:p>
         </p:txBody>
       </p:sp>
